--- a/marketing/beta/output/deck/gwatch-beta-deck.pptx
+++ b/marketing/beta/output/deck/gwatch-beta-deck.pptx
@@ -2003,28 +2003,28 @@
       </p:grpSp>
       <p:grpSp>
         <p:nvGrpSpPr>
-          <p:cNvPr id="51" name="t-mark"/>
+          <p:cNvPr id="48" name="t-mark"/>
           <p:cNvGrpSpPr/>
           <p:nvPr/>
         </p:nvGrpSpPr>
         <p:grpSpPr>
           <a:xfrm>
-            <a:off x="7747000" y="1270000"/>
-            <a:ext cx="3556000" cy="3556000"/>
+            <a:off x="7778750" y="1270000"/>
+            <a:ext cx="3492500" cy="3562350"/>
             <a:chOff x="0" y="0"/>
-            <a:chExt cx="3556000" cy="3556000"/>
+            <a:chExt cx="3492500" cy="3562350"/>
           </a:xfrm>
         </p:grpSpPr>
         <p:sp>
           <p:nvSpPr>
-            <p:cNvPr id="44" name="t-mark-c0"/>
+            <p:cNvPr id="44" name="t-mark-g"/>
             <p:cNvSpPr/>
             <p:nvPr/>
           </p:nvSpPr>
           <p:spPr>
             <a:xfrm>
               <a:off x="0" y="0"/>
-              <a:ext cx="3556000" cy="3556000"/>
+              <a:ext cx="3092450" cy="3092450"/>
             </a:xfrm>
             <a:custGeom>
               <a:avLst/>
@@ -2033,52 +2033,84 @@
               <a:cxnLst/>
               <a:rect l="0" t="0" r="r" b="b"/>
               <a:pathLst>
-                <a:path w="56000" h="56000">
+                <a:path w="48700" h="48700">
                   <a:moveTo>
-                    <a:pt x="7131" y="24412"/>
+                    <a:pt x="44667" y="10925"/>
                   </a:moveTo>
                   <a:cubicBezTo>
-                    <a:pt x="7131" y="33956"/>
-                    <a:pt x="14868" y="41694"/>
-                    <a:pt x="24412" y="41694"/>
-                  </a:cubicBezTo>
-                  <a:cubicBezTo>
-                    <a:pt x="33957" y="41694"/>
-                    <a:pt x="41694" y="33956"/>
-                    <a:pt x="41694" y="24412"/>
-                  </a:cubicBezTo>
-                  <a:cubicBezTo>
-                    <a:pt x="41694" y="14868"/>
-                    <a:pt x="33957" y="7131"/>
-                    <a:pt x="24412" y="7131"/>
-                  </a:cubicBezTo>
-                  <a:cubicBezTo>
-                    <a:pt x="14868" y="7131"/>
-                    <a:pt x="7131" y="14868"/>
-                    <a:pt x="7131" y="24412"/>
-                  </a:cubicBezTo>
+                    <a:pt x="37966" y="762"/>
+                    <a:pt x="24780" y="-2876"/>
+                    <a:pt x="13816" y="2413"/>
+                  </a:cubicBezTo>
+                  <a:cubicBezTo>
+                    <a:pt x="2852" y="7702"/>
+                    <a:pt x="-2507" y="20287"/>
+                    <a:pt x="1276" y="31857"/>
+                  </a:cubicBezTo>
+                  <a:cubicBezTo>
+                    <a:pt x="5060" y="43427"/>
+                    <a:pt x="16820" y="50414"/>
+                    <a:pt x="28790" y="48203"/>
+                  </a:cubicBezTo>
+                  <a:cubicBezTo>
+                    <a:pt x="40761" y="45992"/>
+                    <a:pt x="49250" y="35266"/>
+                    <a:pt x="48651" y="23108"/>
+                  </a:cubicBezTo>
+                  <a:lnTo>
+                    <a:pt x="36260" y="23108"/>
+                  </a:lnTo>
+                  <a:lnTo>
+                    <a:pt x="36260" y="28451"/>
+                  </a:lnTo>
+                  <a:lnTo>
+                    <a:pt x="42327" y="28451"/>
+                  </a:lnTo>
+                  <a:cubicBezTo>
+                    <a:pt x="40358" y="36973"/>
+                    <a:pt x="32669" y="42936"/>
+                    <a:pt x="23925" y="42721"/>
+                  </a:cubicBezTo>
+                  <a:cubicBezTo>
+                    <a:pt x="15181" y="42507"/>
+                    <a:pt x="7793" y="36173"/>
+                    <a:pt x="6245" y="27565"/>
+                  </a:cubicBezTo>
+                  <a:cubicBezTo>
+                    <a:pt x="4696" y="18957"/>
+                    <a:pt x="9414" y="10446"/>
+                    <a:pt x="17536" y="7198"/>
+                  </a:cubicBezTo>
+                  <a:cubicBezTo>
+                    <a:pt x="25657" y="3950"/>
+                    <a:pt x="34942" y="6860"/>
+                    <a:pt x="39757" y="14162"/>
+                  </a:cubicBezTo>
+                  <a:lnTo>
+                    <a:pt x="44667" y="10925"/>
+                  </a:lnTo>
                   <a:close/>
                 </a:path>
               </a:pathLst>
             </a:custGeom>
             <a:solidFill>
-              <a:srgbClr val="1B1E24"/>
-            </a:solidFill>
-            <a:ln>
-              <a:noFill/>
-            </a:ln>
-          </p:spPr>
-        </p:sp>
-        <p:sp>
-          <p:nvSpPr>
-            <p:cNvPr id="45" name="t-mark-c1"/>
-            <p:cNvSpPr/>
-            <p:nvPr/>
-          </p:nvSpPr>
-          <p:spPr>
-            <a:xfrm>
-              <a:off x="0" y="0"/>
-              <a:ext cx="3556000" cy="3556000"/>
+              <a:srgbClr val="FFFFFF"/>
+            </a:solidFill>
+            <a:ln>
+              <a:noFill/>
+            </a:ln>
+          </p:spPr>
+        </p:sp>
+        <p:sp>
+          <p:nvSpPr>
+            <p:cNvPr id="45" name="t-mark-handle"/>
+            <p:cNvSpPr/>
+            <p:nvPr/>
+          </p:nvSpPr>
+          <p:spPr>
+            <a:xfrm>
+              <a:off x="2406650" y="2413000"/>
+              <a:ext cx="1085850" cy="1149350"/>
             </a:xfrm>
             <a:custGeom>
               <a:avLst/>
@@ -2087,52 +2119,58 @@
               <a:cxnLst/>
               <a:rect l="0" t="0" r="r" b="b"/>
               <a:pathLst>
-                <a:path w="56000" h="56000">
+                <a:path w="17100" h="18100">
                   <a:moveTo>
-                    <a:pt x="14831" y="24675"/>
+                    <a:pt x="4" y="5328"/>
                   </a:moveTo>
-                  <a:cubicBezTo>
-                    <a:pt x="14831" y="30208"/>
-                    <a:pt x="19317" y="34694"/>
-                    <a:pt x="24850" y="34694"/>
-                  </a:cubicBezTo>
-                  <a:cubicBezTo>
-                    <a:pt x="30383" y="34694"/>
-                    <a:pt x="34869" y="30208"/>
-                    <a:pt x="34869" y="24675"/>
-                  </a:cubicBezTo>
-                  <a:cubicBezTo>
-                    <a:pt x="34869" y="19142"/>
-                    <a:pt x="30383" y="14656"/>
-                    <a:pt x="24850" y="14656"/>
-                  </a:cubicBezTo>
-                  <a:cubicBezTo>
-                    <a:pt x="19317" y="14656"/>
-                    <a:pt x="14831" y="19142"/>
-                    <a:pt x="14831" y="24675"/>
+                  <a:lnTo>
+                    <a:pt x="10011" y="16646"/>
+                  </a:lnTo>
+                  <a:cubicBezTo>
+                    <a:pt x="11478" y="18306"/>
+                    <a:pt x="14013" y="18461"/>
+                    <a:pt x="15673" y="16994"/>
+                  </a:cubicBezTo>
+                  <a:cubicBezTo>
+                    <a:pt x="17333" y="15527"/>
+                    <a:pt x="17488" y="12992"/>
+                    <a:pt x="16021" y="11332"/>
+                  </a:cubicBezTo>
+                  <a:lnTo>
+                    <a:pt x="6014" y="14"/>
+                  </a:lnTo>
+                  <a:cubicBezTo>
+                    <a:pt x="4547" y="-1646"/>
+                    <a:pt x="2012" y="-1801"/>
+                    <a:pt x="352" y="-334"/>
+                  </a:cubicBezTo>
+                  <a:cubicBezTo>
+                    <a:pt x="-1308" y="1133"/>
+                    <a:pt x="-1463" y="3668"/>
+                    <a:pt x="4" y="5328"/>
                   </a:cubicBezTo>
                   <a:close/>
                 </a:path>
               </a:pathLst>
             </a:custGeom>
             <a:solidFill>
-              <a:srgbClr val="D3A32E"/>
-            </a:solidFill>
-            <a:ln>
-              <a:noFill/>
-            </a:ln>
-          </p:spPr>
-        </p:sp>
-        <p:sp>
-          <p:nvSpPr>
-            <p:cNvPr id="46" name="t-mark-c2"/>
-            <p:cNvSpPr/>
-            <p:nvPr/>
-          </p:nvSpPr>
-          <p:spPr>
-            <a:xfrm>
-              <a:off x="0" y="0"/>
-              <a:ext cx="3556000" cy="3556000"/>
+              <a:srgbClr val="FFFFFF"/>
+            </a:solidFill>
+            <a:ln>
+              <a:noFill/>
+            </a:ln>
+          </p:spPr>
+        </p:sp>
+        <p:sp>
+          <p:nvSpPr>
+            <p:cNvPr id="46" name="t-mark-iris"/>
+            <p:cNvSpPr/>
+            <p:nvPr/>
+          </p:nvSpPr>
+          <p:spPr>
+            <a:xfrm>
+              <a:off x="850900" y="889000"/>
+              <a:ext cx="1365250" cy="1358900"/>
             </a:xfrm>
             <a:custGeom>
               <a:avLst/>
@@ -2141,52 +2179,76 @@
               <a:cxnLst/>
               <a:rect l="0" t="0" r="r" b="b"/>
               <a:pathLst>
-                <a:path w="56000" h="56000">
+                <a:path w="21500" h="21400">
                   <a:moveTo>
-                    <a:pt x="19338" y="24894"/>
+                    <a:pt x="82" y="10684"/>
                   </a:moveTo>
                   <a:cubicBezTo>
-                    <a:pt x="19338" y="27962"/>
-                    <a:pt x="21826" y="30450"/>
-                    <a:pt x="24894" y="30450"/>
-                  </a:cubicBezTo>
-                  <a:cubicBezTo>
-                    <a:pt x="27962" y="30450"/>
-                    <a:pt x="30450" y="27962"/>
-                    <a:pt x="30450" y="24894"/>
-                  </a:cubicBezTo>
-                  <a:cubicBezTo>
-                    <a:pt x="30450" y="21826"/>
-                    <a:pt x="27962" y="19338"/>
-                    <a:pt x="24894" y="19338"/>
-                  </a:cubicBezTo>
-                  <a:cubicBezTo>
-                    <a:pt x="21826" y="19338"/>
-                    <a:pt x="19338" y="21826"/>
-                    <a:pt x="19338" y="24894"/>
+                    <a:pt x="82" y="4789"/>
+                    <a:pt x="4860" y="11"/>
+                    <a:pt x="10755" y="11"/>
+                  </a:cubicBezTo>
+                  <a:cubicBezTo>
+                    <a:pt x="16650" y="11"/>
+                    <a:pt x="21428" y="4789"/>
+                    <a:pt x="21428" y="10684"/>
+                  </a:cubicBezTo>
+                  <a:cubicBezTo>
+                    <a:pt x="21428" y="16579"/>
+                    <a:pt x="16650" y="21357"/>
+                    <a:pt x="10755" y="21357"/>
+                  </a:cubicBezTo>
+                  <a:cubicBezTo>
+                    <a:pt x="4860" y="21357"/>
+                    <a:pt x="82" y="16579"/>
+                    <a:pt x="82" y="10684"/>
+                  </a:cubicBezTo>
+                  <a:close/>
+                  <a:moveTo>
+                    <a:pt x="4810" y="10684"/>
+                  </a:moveTo>
+                  <a:cubicBezTo>
+                    <a:pt x="4810" y="13967"/>
+                    <a:pt x="7472" y="16629"/>
+                    <a:pt x="10755" y="16629"/>
+                  </a:cubicBezTo>
+                  <a:cubicBezTo>
+                    <a:pt x="14038" y="16629"/>
+                    <a:pt x="16700" y="13967"/>
+                    <a:pt x="16700" y="10684"/>
+                  </a:cubicBezTo>
+                  <a:cubicBezTo>
+                    <a:pt x="16700" y="7401"/>
+                    <a:pt x="14038" y="4739"/>
+                    <a:pt x="10755" y="4739"/>
+                  </a:cubicBezTo>
+                  <a:cubicBezTo>
+                    <a:pt x="7472" y="4739"/>
+                    <a:pt x="4810" y="7401"/>
+                    <a:pt x="4810" y="10684"/>
                   </a:cubicBezTo>
                   <a:close/>
                 </a:path>
               </a:pathLst>
             </a:custGeom>
             <a:solidFill>
-              <a:srgbClr val="F2F4F6"/>
-            </a:solidFill>
-            <a:ln>
-              <a:noFill/>
-            </a:ln>
-          </p:spPr>
-        </p:sp>
-        <p:sp>
-          <p:nvSpPr>
-            <p:cNvPr id="47" name="t-mark-c3"/>
-            <p:cNvSpPr/>
-            <p:nvPr/>
-          </p:nvSpPr>
-          <p:spPr>
-            <a:xfrm>
-              <a:off x="0" y="0"/>
-              <a:ext cx="3556000" cy="3556000"/>
+              <a:srgbClr val="D3A32E"/>
+            </a:solidFill>
+            <a:ln>
+              <a:noFill/>
+            </a:ln>
+          </p:spPr>
+        </p:sp>
+        <p:sp>
+          <p:nvSpPr>
+            <p:cNvPr id="47" name="t-mark-highlight"/>
+            <p:cNvSpPr/>
+            <p:nvPr/>
+          </p:nvSpPr>
+          <p:spPr>
+            <a:xfrm>
+              <a:off x="1600200" y="1308100"/>
+              <a:ext cx="222250" cy="228600"/>
             </a:xfrm>
             <a:custGeom>
               <a:avLst/>
@@ -2195,174 +2257,46 @@
               <a:cxnLst/>
               <a:rect l="0" t="0" r="r" b="b"/>
               <a:pathLst>
-                <a:path w="56000" h="56000">
+                <a:path w="3500" h="3600">
                   <a:moveTo>
-                    <a:pt x="25900" y="22575"/>
+                    <a:pt x="29" y="1791"/>
                   </a:moveTo>
                   <a:cubicBezTo>
-                    <a:pt x="25900" y="23445"/>
-                    <a:pt x="26605" y="24150"/>
-                    <a:pt x="27475" y="24150"/>
-                  </a:cubicBezTo>
-                  <a:cubicBezTo>
-                    <a:pt x="28345" y="24150"/>
-                    <a:pt x="29050" y="23445"/>
-                    <a:pt x="29050" y="22575"/>
-                  </a:cubicBezTo>
-                  <a:cubicBezTo>
-                    <a:pt x="29050" y="21705"/>
-                    <a:pt x="28345" y="21000"/>
-                    <a:pt x="27475" y="21000"/>
-                  </a:cubicBezTo>
-                  <a:cubicBezTo>
-                    <a:pt x="26605" y="21000"/>
-                    <a:pt x="25900" y="21705"/>
-                    <a:pt x="25900" y="22575"/>
+                    <a:pt x="29" y="837"/>
+                    <a:pt x="802" y="65"/>
+                    <a:pt x="1755" y="65"/>
+                  </a:cubicBezTo>
+                  <a:cubicBezTo>
+                    <a:pt x="2709" y="65"/>
+                    <a:pt x="3482" y="837"/>
+                    <a:pt x="3482" y="1791"/>
+                  </a:cubicBezTo>
+                  <a:cubicBezTo>
+                    <a:pt x="3482" y="2745"/>
+                    <a:pt x="2709" y="3517"/>
+                    <a:pt x="1755" y="3517"/>
+                  </a:cubicBezTo>
+                  <a:cubicBezTo>
+                    <a:pt x="802" y="3517"/>
+                    <a:pt x="29" y="2745"/>
+                    <a:pt x="29" y="1791"/>
                   </a:cubicBezTo>
                   <a:close/>
                 </a:path>
               </a:pathLst>
             </a:custGeom>
             <a:solidFill>
-              <a:srgbClr val="0F1114"/>
-            </a:solidFill>
-            <a:ln>
-              <a:noFill/>
-            </a:ln>
-          </p:spPr>
-        </p:sp>
-        <p:sp>
-          <p:nvSpPr>
-            <p:cNvPr id="48" name="t-mark-s0"/>
-            <p:cNvSpPr/>
-            <p:nvPr/>
-          </p:nvSpPr>
-          <p:spPr>
-            <a:xfrm>
-              <a:off x="0" y="0"/>
-              <a:ext cx="3556000" cy="3556000"/>
-            </a:xfrm>
-            <a:custGeom>
-              <a:avLst/>
-              <a:gdLst/>
-              <a:ahLst/>
-              <a:cxnLst/>
-              <a:rect l="0" t="0" r="r" b="b"/>
-              <a:pathLst>
-                <a:path w="56000" h="56000">
-                  <a:moveTo>
-                    <a:pt x="44275" y="23371"/>
-                  </a:moveTo>
-                  <a:cubicBezTo>
-                    <a:pt x="44803" y="33437"/>
-                    <a:pt x="37718" y="42307"/>
-                    <a:pt x="27783" y="44015"/>
-                  </a:cubicBezTo>
-                  <a:cubicBezTo>
-                    <a:pt x="17849" y="45723"/>
-                    <a:pt x="8208" y="39729"/>
-                    <a:pt x="5344" y="30064"/>
-                  </a:cubicBezTo>
-                  <a:cubicBezTo>
-                    <a:pt x="2480" y="20399"/>
-                    <a:pt x="7300" y="10120"/>
-                    <a:pt x="16561" y="6141"/>
-                  </a:cubicBezTo>
-                  <a:cubicBezTo>
-                    <a:pt x="25822" y="2161"/>
-                    <a:pt x="36596" y="5739"/>
-                    <a:pt x="41637" y="14468"/>
-                  </a:cubicBezTo>
-                </a:path>
-              </a:pathLst>
-            </a:custGeom>
-            <a:noFill/>
-            <a:ln w="342900" cap="rnd">
-              <a:solidFill>
-                <a:srgbClr val="F2F4F6"/>
-              </a:solidFill>
-              <a:round/>
-            </a:ln>
-          </p:spPr>
-        </p:sp>
-        <p:sp>
-          <p:nvSpPr>
-            <p:cNvPr id="49" name="t-mark-s1"/>
-            <p:cNvSpPr/>
-            <p:nvPr/>
-          </p:nvSpPr>
-          <p:spPr>
-            <a:xfrm>
-              <a:off x="0" y="0"/>
-              <a:ext cx="3556000" cy="3556000"/>
-            </a:xfrm>
-            <a:custGeom>
-              <a:avLst/>
-              <a:gdLst/>
-              <a:ahLst/>
-              <a:cxnLst/>
-              <a:rect l="0" t="0" r="r" b="b"/>
-              <a:pathLst>
-                <a:path w="56000" h="56000">
-                  <a:moveTo>
-                    <a:pt x="38894" y="25729"/>
-                  </a:moveTo>
-                  <a:lnTo>
-                    <a:pt x="44450" y="25729"/>
-                  </a:lnTo>
-                </a:path>
-              </a:pathLst>
-            </a:custGeom>
-            <a:noFill/>
-            <a:ln w="317500" cap="rnd">
-              <a:solidFill>
-                <a:srgbClr val="F2F4F6"/>
-              </a:solidFill>
-              <a:round/>
-            </a:ln>
-          </p:spPr>
-        </p:sp>
-        <p:sp>
-          <p:nvSpPr>
-            <p:cNvPr id="50" name="t-mark-s2"/>
-            <p:cNvSpPr/>
-            <p:nvPr/>
-          </p:nvSpPr>
-          <p:spPr>
-            <a:xfrm>
-              <a:off x="0" y="0"/>
-              <a:ext cx="3556000" cy="3556000"/>
-            </a:xfrm>
-            <a:custGeom>
-              <a:avLst/>
-              <a:gdLst/>
-              <a:ahLst/>
-              <a:cxnLst/>
-              <a:rect l="0" t="0" r="r" b="b"/>
-              <a:pathLst>
-                <a:path w="56000" h="56000">
-                  <a:moveTo>
-                    <a:pt x="41326" y="41396"/>
-                  </a:moveTo>
-                  <a:lnTo>
-                    <a:pt x="50562" y="50697"/>
-                  </a:lnTo>
-                </a:path>
-              </a:pathLst>
-            </a:custGeom>
-            <a:noFill/>
-            <a:ln w="450850" cap="rnd">
-              <a:solidFill>
-                <a:srgbClr val="F2F4F6"/>
-              </a:solidFill>
-              <a:round/>
+              <a:srgbClr val="FFFFFF"/>
+            </a:solidFill>
+            <a:ln>
+              <a:noFill/>
             </a:ln>
           </p:spPr>
         </p:sp>
       </p:grpSp>
       <p:grpSp>
         <p:nvGrpSpPr>
-          <p:cNvPr id="61" name="t-logo"/>
+          <p:cNvPr id="55" name="t-logo"/>
           <p:cNvGrpSpPr/>
           <p:nvPr/>
         </p:nvGrpSpPr>
@@ -2376,7 +2310,7 @@
         </p:grpSpPr>
         <p:grpSp>
           <p:nvGrpSpPr>
-            <p:cNvPr id="59" name="t-logo-mark"/>
+            <p:cNvPr id="53" name="t-logo-mark"/>
             <p:cNvGrpSpPr/>
             <p:nvPr/>
           </p:nvGrpSpPr>
@@ -2390,14 +2324,14 @@
           </p:grpSpPr>
           <p:sp>
             <p:nvSpPr>
-              <p:cNvPr id="52" name="t-logo-mark-c0"/>
+              <p:cNvPr id="49" name="t-logo-mark-g"/>
               <p:cNvSpPr/>
               <p:nvPr/>
             </p:nvSpPr>
             <p:spPr>
               <a:xfrm>
                 <a:off x="0" y="0"/>
-                <a:ext cx="533400" cy="533400"/>
+                <a:ext cx="469900" cy="463550"/>
               </a:xfrm>
               <a:custGeom>
                 <a:avLst/>
@@ -2406,36 +2340,68 @@
                 <a:cxnLst/>
                 <a:rect l="0" t="0" r="r" b="b"/>
                 <a:pathLst>
-                  <a:path w="8400" h="8400">
+                  <a:path w="7400" h="7300">
                     <a:moveTo>
-                      <a:pt x="1070" y="3662"/>
+                      <a:pt x="6775" y="1639"/>
                     </a:moveTo>
                     <a:cubicBezTo>
-                      <a:pt x="1070" y="5094"/>
-                      <a:pt x="2230" y="6254"/>
-                      <a:pt x="3662" y="6254"/>
+                      <a:pt x="5769" y="115"/>
+                      <a:pt x="3791" y="-431"/>
+                      <a:pt x="2147" y="363"/>
                     </a:cubicBezTo>
                     <a:cubicBezTo>
-                      <a:pt x="5094" y="6254"/>
-                      <a:pt x="6254" y="5094"/>
-                      <a:pt x="6254" y="3662"/>
+                      <a:pt x="502" y="1157"/>
+                      <a:pt x="-302" y="3045"/>
+                      <a:pt x="266" y="4781"/>
                     </a:cubicBezTo>
                     <a:cubicBezTo>
-                      <a:pt x="6254" y="2230"/>
-                      <a:pt x="5094" y="1070"/>
-                      <a:pt x="3662" y="1070"/>
+                      <a:pt x="834" y="6516"/>
+                      <a:pt x="2599" y="7564"/>
+                      <a:pt x="4395" y="7232"/>
                     </a:cubicBezTo>
                     <a:cubicBezTo>
-                      <a:pt x="2230" y="1070"/>
-                      <a:pt x="1070" y="2230"/>
-                      <a:pt x="1070" y="3662"/>
+                      <a:pt x="6190" y="6900"/>
+                      <a:pt x="7463" y="5290"/>
+                      <a:pt x="7373" y="3466"/>
                     </a:cubicBezTo>
+                    <a:lnTo>
+                      <a:pt x="5514" y="3466"/>
+                    </a:lnTo>
+                    <a:lnTo>
+                      <a:pt x="5514" y="4268"/>
+                    </a:lnTo>
+                    <a:lnTo>
+                      <a:pt x="6424" y="4268"/>
+                    </a:lnTo>
+                    <a:cubicBezTo>
+                      <a:pt x="6128" y="5546"/>
+                      <a:pt x="4975" y="6440"/>
+                      <a:pt x="3663" y="6407"/>
+                    </a:cubicBezTo>
+                    <a:cubicBezTo>
+                      <a:pt x="2352" y="6374"/>
+                      <a:pt x="1245" y="5424"/>
+                      <a:pt x="1013" y="4133"/>
+                    </a:cubicBezTo>
+                    <a:cubicBezTo>
+                      <a:pt x="781" y="2842"/>
+                      <a:pt x="1489" y="1566"/>
+                      <a:pt x="2707" y="1079"/>
+                    </a:cubicBezTo>
+                    <a:cubicBezTo>
+                      <a:pt x="3925" y="592"/>
+                      <a:pt x="5317" y="1029"/>
+                      <a:pt x="6039" y="2124"/>
+                    </a:cubicBezTo>
+                    <a:lnTo>
+                      <a:pt x="6775" y="1639"/>
+                    </a:lnTo>
                     <a:close/>
                   </a:path>
                 </a:pathLst>
               </a:custGeom>
               <a:solidFill>
-                <a:srgbClr val="1B1E24"/>
+                <a:srgbClr val="FFFFFF"/>
               </a:solidFill>
               <a:ln>
                 <a:noFill/>
@@ -2444,14 +2410,14 @@
           </p:sp>
           <p:sp>
             <p:nvSpPr>
-              <p:cNvPr id="53" name="t-logo-mark-c1"/>
+              <p:cNvPr id="50" name="t-logo-mark-handle"/>
               <p:cNvSpPr/>
               <p:nvPr/>
             </p:nvSpPr>
             <p:spPr>
               <a:xfrm>
-                <a:off x="0" y="0"/>
-                <a:ext cx="533400" cy="533400"/>
+                <a:off x="361950" y="361950"/>
+                <a:ext cx="171450" cy="171450"/>
               </a:xfrm>
               <a:custGeom>
                 <a:avLst/>
@@ -2460,39 +2426,113 @@
                 <a:cxnLst/>
                 <a:rect l="0" t="0" r="r" b="b"/>
                 <a:pathLst>
-                  <a:path w="8400" h="8400">
+                  <a:path w="2700" h="2700">
                     <a:moveTo>
-                      <a:pt x="2225" y="3701"/>
+                      <a:pt x="61" y="799"/>
+                    </a:moveTo>
+                    <a:lnTo>
+                      <a:pt x="1562" y="2497"/>
+                    </a:lnTo>
+                    <a:cubicBezTo>
+                      <a:pt x="1786" y="2729"/>
+                      <a:pt x="2153" y="2744"/>
+                      <a:pt x="2394" y="2530"/>
+                    </a:cubicBezTo>
+                    <a:cubicBezTo>
+                      <a:pt x="2636" y="2317"/>
+                      <a:pt x="2666" y="1950"/>
+                      <a:pt x="2463" y="1700"/>
+                    </a:cubicBezTo>
+                    <a:lnTo>
+                      <a:pt x="962" y="2"/>
+                    </a:lnTo>
+                    <a:cubicBezTo>
+                      <a:pt x="738" y="-230"/>
+                      <a:pt x="371" y="-245"/>
+                      <a:pt x="130" y="-31"/>
+                    </a:cubicBezTo>
+                    <a:cubicBezTo>
+                      <a:pt x="-112" y="182"/>
+                      <a:pt x="-142" y="549"/>
+                      <a:pt x="61" y="799"/>
+                    </a:cubicBezTo>
+                    <a:close/>
+                  </a:path>
+                </a:pathLst>
+              </a:custGeom>
+              <a:solidFill>
+                <a:srgbClr val="FFFFFF"/>
+              </a:solidFill>
+              <a:ln>
+                <a:noFill/>
+              </a:ln>
+            </p:spPr>
+          </p:sp>
+          <p:sp>
+            <p:nvSpPr>
+              <p:cNvPr id="51" name="t-logo-mark-iris"/>
+              <p:cNvSpPr/>
+              <p:nvPr/>
+            </p:nvSpPr>
+            <p:spPr>
+              <a:xfrm>
+                <a:off x="127000" y="133350"/>
+                <a:ext cx="209550" cy="209550"/>
+              </a:xfrm>
+              <a:custGeom>
+                <a:avLst/>
+                <a:gdLst/>
+                <a:ahLst/>
+                <a:cxnLst/>
+                <a:rect l="0" t="0" r="r" b="b"/>
+                <a:pathLst>
+                  <a:path w="3300" h="3300">
+                    <a:moveTo>
+                      <a:pt x="97" y="1603"/>
                     </a:moveTo>
                     <a:cubicBezTo>
-                      <a:pt x="2211" y="4247"/>
-                      <a:pt x="2494" y="4758"/>
-                      <a:pt x="2965" y="5035"/>
+                      <a:pt x="97" y="719"/>
+                      <a:pt x="814" y="2"/>
+                      <a:pt x="1698" y="2"/>
                     </a:cubicBezTo>
                     <a:cubicBezTo>
-                      <a:pt x="3436" y="5312"/>
-                      <a:pt x="4019" y="5312"/>
-                      <a:pt x="4490" y="5035"/>
+                      <a:pt x="2582" y="2"/>
+                      <a:pt x="3299" y="719"/>
+                      <a:pt x="3299" y="1603"/>
                     </a:cubicBezTo>
                     <a:cubicBezTo>
-                      <a:pt x="4961" y="4758"/>
-                      <a:pt x="5244" y="4247"/>
-                      <a:pt x="5230" y="3701"/>
+                      <a:pt x="3299" y="2487"/>
+                      <a:pt x="2582" y="3204"/>
+                      <a:pt x="1698" y="3204"/>
                     </a:cubicBezTo>
                     <a:cubicBezTo>
-                      <a:pt x="5244" y="3155"/>
-                      <a:pt x="4961" y="2644"/>
-                      <a:pt x="4490" y="2367"/>
+                      <a:pt x="814" y="3204"/>
+                      <a:pt x="97" y="2487"/>
+                      <a:pt x="97" y="1603"/>
+                    </a:cubicBezTo>
+                    <a:close/>
+                    <a:moveTo>
+                      <a:pt x="806" y="1603"/>
+                    </a:moveTo>
+                    <a:cubicBezTo>
+                      <a:pt x="806" y="2096"/>
+                      <a:pt x="1205" y="2495"/>
+                      <a:pt x="1698" y="2495"/>
                     </a:cubicBezTo>
                     <a:cubicBezTo>
-                      <a:pt x="4019" y="2090"/>
-                      <a:pt x="3436" y="2090"/>
-                      <a:pt x="2965" y="2367"/>
+                      <a:pt x="2191" y="2495"/>
+                      <a:pt x="2590" y="2096"/>
+                      <a:pt x="2590" y="1603"/>
                     </a:cubicBezTo>
                     <a:cubicBezTo>
-                      <a:pt x="2494" y="2644"/>
-                      <a:pt x="2211" y="3155"/>
-                      <a:pt x="2225" y="3701"/>
+                      <a:pt x="2590" y="1110"/>
+                      <a:pt x="2191" y="711"/>
+                      <a:pt x="1698" y="711"/>
+                    </a:cubicBezTo>
+                    <a:cubicBezTo>
+                      <a:pt x="1205" y="711"/>
+                      <a:pt x="806" y="1110"/>
+                      <a:pt x="806" y="1603"/>
                     </a:cubicBezTo>
                     <a:close/>
                   </a:path>
@@ -2508,14 +2548,14 @@
           </p:sp>
           <p:sp>
             <p:nvSpPr>
-              <p:cNvPr id="54" name="t-logo-mark-c2"/>
+              <p:cNvPr id="52" name="t-logo-mark-highlight"/>
               <p:cNvSpPr/>
               <p:nvPr/>
             </p:nvSpPr>
             <p:spPr>
               <a:xfrm>
-                <a:off x="0" y="0"/>
-                <a:ext cx="533400" cy="533400"/>
+                <a:off x="241300" y="190500"/>
+                <a:ext cx="38100" cy="44450"/>
               </a:xfrm>
               <a:custGeom>
                 <a:avLst/>
@@ -2524,228 +2564,46 @@
                 <a:cxnLst/>
                 <a:rect l="0" t="0" r="r" b="b"/>
                 <a:pathLst>
-                  <a:path w="8400" h="8400">
+                  <a:path w="600" h="700">
                     <a:moveTo>
-                      <a:pt x="2901" y="3734"/>
+                      <a:pt x="59" y="359"/>
                     </a:moveTo>
                     <a:cubicBezTo>
-                      <a:pt x="2901" y="4194"/>
-                      <a:pt x="3274" y="4567"/>
-                      <a:pt x="3734" y="4567"/>
+                      <a:pt x="59" y="216"/>
+                      <a:pt x="175" y="100"/>
+                      <a:pt x="318" y="100"/>
                     </a:cubicBezTo>
                     <a:cubicBezTo>
-                      <a:pt x="4194" y="4567"/>
-                      <a:pt x="4567" y="4194"/>
-                      <a:pt x="4567" y="3734"/>
+                      <a:pt x="461" y="100"/>
+                      <a:pt x="577" y="216"/>
+                      <a:pt x="577" y="359"/>
                     </a:cubicBezTo>
                     <a:cubicBezTo>
-                      <a:pt x="4567" y="3274"/>
-                      <a:pt x="4194" y="2901"/>
-                      <a:pt x="3734" y="2901"/>
+                      <a:pt x="577" y="502"/>
+                      <a:pt x="461" y="618"/>
+                      <a:pt x="318" y="618"/>
                     </a:cubicBezTo>
                     <a:cubicBezTo>
-                      <a:pt x="3274" y="2901"/>
-                      <a:pt x="2901" y="3274"/>
-                      <a:pt x="2901" y="3734"/>
+                      <a:pt x="175" y="618"/>
+                      <a:pt x="59" y="502"/>
+                      <a:pt x="59" y="359"/>
                     </a:cubicBezTo>
                     <a:close/>
                   </a:path>
                 </a:pathLst>
               </a:custGeom>
               <a:solidFill>
-                <a:srgbClr val="F2F4F6"/>
+                <a:srgbClr val="FFFFFF"/>
               </a:solidFill>
               <a:ln>
                 <a:noFill/>
               </a:ln>
             </p:spPr>
           </p:sp>
-          <p:sp>
-            <p:nvSpPr>
-              <p:cNvPr id="55" name="t-logo-mark-c3"/>
-              <p:cNvSpPr/>
-              <p:nvPr/>
-            </p:nvSpPr>
-            <p:spPr>
-              <a:xfrm>
-                <a:off x="0" y="0"/>
-                <a:ext cx="533400" cy="533400"/>
-              </a:xfrm>
-              <a:custGeom>
-                <a:avLst/>
-                <a:gdLst/>
-                <a:ahLst/>
-                <a:cxnLst/>
-                <a:rect l="0" t="0" r="r" b="b"/>
-                <a:pathLst>
-                  <a:path w="8400" h="8400">
-                    <a:moveTo>
-                      <a:pt x="3885" y="3386"/>
-                    </a:moveTo>
-                    <a:cubicBezTo>
-                      <a:pt x="3885" y="3516"/>
-                      <a:pt x="3991" y="3622"/>
-                      <a:pt x="4121" y="3622"/>
-                    </a:cubicBezTo>
-                    <a:cubicBezTo>
-                      <a:pt x="4251" y="3622"/>
-                      <a:pt x="4357" y="3516"/>
-                      <a:pt x="4357" y="3386"/>
-                    </a:cubicBezTo>
-                    <a:cubicBezTo>
-                      <a:pt x="4357" y="3256"/>
-                      <a:pt x="4251" y="3150"/>
-                      <a:pt x="4121" y="3150"/>
-                    </a:cubicBezTo>
-                    <a:cubicBezTo>
-                      <a:pt x="3991" y="3150"/>
-                      <a:pt x="3885" y="3256"/>
-                      <a:pt x="3885" y="3386"/>
-                    </a:cubicBezTo>
-                    <a:close/>
-                  </a:path>
-                </a:pathLst>
-              </a:custGeom>
-              <a:solidFill>
-                <a:srgbClr val="0F1114"/>
-              </a:solidFill>
-              <a:ln>
-                <a:noFill/>
-              </a:ln>
-            </p:spPr>
-          </p:sp>
-          <p:sp>
-            <p:nvSpPr>
-              <p:cNvPr id="56" name="t-logo-mark-s0"/>
-              <p:cNvSpPr/>
-              <p:nvPr/>
-            </p:nvSpPr>
-            <p:spPr>
-              <a:xfrm>
-                <a:off x="0" y="0"/>
-                <a:ext cx="533400" cy="533400"/>
-              </a:xfrm>
-              <a:custGeom>
-                <a:avLst/>
-                <a:gdLst/>
-                <a:ahLst/>
-                <a:cxnLst/>
-                <a:rect l="0" t="0" r="r" b="b"/>
-                <a:pathLst>
-                  <a:path w="8400" h="8400">
-                    <a:moveTo>
-                      <a:pt x="6641" y="3506"/>
-                    </a:moveTo>
-                    <a:cubicBezTo>
-                      <a:pt x="6719" y="5016"/>
-                      <a:pt x="5656" y="6345"/>
-                      <a:pt x="4166" y="6601"/>
-                    </a:cubicBezTo>
-                    <a:cubicBezTo>
-                      <a:pt x="2675" y="6856"/>
-                      <a:pt x="1230" y="5956"/>
-                      <a:pt x="801" y="4506"/>
-                    </a:cubicBezTo>
-                    <a:cubicBezTo>
-                      <a:pt x="373" y="3056"/>
-                      <a:pt x="1096" y="1515"/>
-                      <a:pt x="2486" y="919"/>
-                    </a:cubicBezTo>
-                    <a:cubicBezTo>
-                      <a:pt x="3875" y="323"/>
-                      <a:pt x="5491" y="860"/>
-                      <a:pt x="6246" y="2170"/>
-                    </a:cubicBezTo>
-                  </a:path>
-                </a:pathLst>
-              </a:custGeom>
-              <a:noFill/>
-              <a:ln w="50800" cap="rnd">
-                <a:solidFill>
-                  <a:srgbClr val="F2F4F6"/>
-                </a:solidFill>
-                <a:round/>
-              </a:ln>
-            </p:spPr>
-          </p:sp>
-          <p:sp>
-            <p:nvSpPr>
-              <p:cNvPr id="57" name="t-logo-mark-s1"/>
-              <p:cNvSpPr/>
-              <p:nvPr/>
-            </p:nvSpPr>
-            <p:spPr>
-              <a:xfrm>
-                <a:off x="0" y="0"/>
-                <a:ext cx="533400" cy="533400"/>
-              </a:xfrm>
-              <a:custGeom>
-                <a:avLst/>
-                <a:gdLst/>
-                <a:ahLst/>
-                <a:cxnLst/>
-                <a:rect l="0" t="0" r="r" b="b"/>
-                <a:pathLst>
-                  <a:path w="8400" h="8400">
-                    <a:moveTo>
-                      <a:pt x="5834" y="3859"/>
-                    </a:moveTo>
-                    <a:lnTo>
-                      <a:pt x="6667" y="3859"/>
-                    </a:lnTo>
-                  </a:path>
-                </a:pathLst>
-              </a:custGeom>
-              <a:noFill/>
-              <a:ln w="50800" cap="rnd">
-                <a:solidFill>
-                  <a:srgbClr val="F2F4F6"/>
-                </a:solidFill>
-                <a:round/>
-              </a:ln>
-            </p:spPr>
-          </p:sp>
-          <p:sp>
-            <p:nvSpPr>
-              <p:cNvPr id="58" name="t-logo-mark-s2"/>
-              <p:cNvSpPr/>
-              <p:nvPr/>
-            </p:nvSpPr>
-            <p:spPr>
-              <a:xfrm>
-                <a:off x="0" y="0"/>
-                <a:ext cx="533400" cy="533400"/>
-              </a:xfrm>
-              <a:custGeom>
-                <a:avLst/>
-                <a:gdLst/>
-                <a:ahLst/>
-                <a:cxnLst/>
-                <a:rect l="0" t="0" r="r" b="b"/>
-                <a:pathLst>
-                  <a:path w="8400" h="8400">
-                    <a:moveTo>
-                      <a:pt x="6199" y="6209"/>
-                    </a:moveTo>
-                    <a:lnTo>
-                      <a:pt x="7584" y="7605"/>
-                    </a:lnTo>
-                  </a:path>
-                </a:pathLst>
-              </a:custGeom>
-              <a:noFill/>
-              <a:ln w="69850" cap="rnd">
-                <a:solidFill>
-                  <a:srgbClr val="F2F4F6"/>
-                </a:solidFill>
-                <a:round/>
-              </a:ln>
-            </p:spPr>
-          </p:sp>
         </p:grpSp>
         <p:sp>
           <p:nvSpPr>
-            <p:cNvPr id="60" name="t-logo-word"/>
+            <p:cNvPr id="54" name="t-logo-word"/>
             <p:cNvSpPr txBox="1"/>
             <p:nvPr/>
           </p:nvSpPr>
@@ -2789,7 +2647,7 @@
       </p:grpSp>
       <p:sp>
         <p:nvSpPr>
-          <p:cNvPr id="62" name="t-title"/>
+          <p:cNvPr id="56" name="t-title"/>
           <p:cNvSpPr>
             <a:spLocks noGrp="1"/>
           </p:cNvSpPr>
@@ -2868,7 +2726,7 @@
       </p:sp>
       <p:grpSp>
         <p:nvGrpSpPr>
-          <p:cNvPr id="65" name="t-badge"/>
+          <p:cNvPr id="59" name="t-badge"/>
           <p:cNvGrpSpPr/>
           <p:nvPr/>
         </p:nvGrpSpPr>
@@ -2882,7 +2740,7 @@
         </p:grpSpPr>
         <p:sp>
           <p:nvSpPr>
-            <p:cNvPr id="63" name="t-badge-bg"/>
+            <p:cNvPr id="57" name="t-badge-bg"/>
             <p:cNvSpPr/>
             <p:nvPr/>
           </p:nvSpPr>
@@ -2906,7 +2764,7 @@
         </p:sp>
         <p:sp>
           <p:nvSpPr>
-            <p:cNvPr id="64" name="t-badge-label"/>
+            <p:cNvPr id="58" name="t-badge-label"/>
             <p:cNvSpPr txBox="1"/>
             <p:nvPr/>
           </p:nvSpPr>
@@ -2935,7 +2793,7 @@
               <a:r>
                 <a:rPr lang="en-US" sz="1500" dirty="0">
                   <a:solidFill>
-                    <a:srgbClr val="061B3B"/>
+                    <a:srgbClr val="061A3A"/>
                   </a:solidFill>
                   <a:latin typeface="Kode Mono"/>
                   <a:ea typeface="Kode Mono"/>
@@ -2950,7 +2808,7 @@
       </p:grpSp>
       <p:sp>
         <p:nvSpPr>
-          <p:cNvPr id="66" name="t-sub"/>
+          <p:cNvPr id="60" name="t-sub"/>
           <p:cNvSpPr txBox="1"/>
           <p:nvPr/>
         </p:nvSpPr>
@@ -4219,7 +4077,7 @@
       </p:sp>
       <p:grpSp>
         <p:nvGrpSpPr>
-          <p:cNvPr id="51" name="m-mark"/>
+          <p:cNvPr id="48" name="m-mark"/>
           <p:cNvGrpSpPr/>
           <p:nvPr/>
         </p:nvGrpSpPr>
@@ -4233,14 +4091,14 @@
         </p:grpSpPr>
         <p:sp>
           <p:nvSpPr>
-            <p:cNvPr id="44" name="m-mark-c0"/>
+            <p:cNvPr id="44" name="m-mark-g"/>
             <p:cNvSpPr/>
             <p:nvPr/>
           </p:nvSpPr>
           <p:spPr>
             <a:xfrm>
               <a:off x="0" y="0"/>
-              <a:ext cx="304800" cy="304800"/>
+              <a:ext cx="273050" cy="266700"/>
             </a:xfrm>
             <a:custGeom>
               <a:avLst/>
@@ -4249,52 +4107,84 @@
               <a:cxnLst/>
               <a:rect l="0" t="0" r="r" b="b"/>
               <a:pathLst>
-                <a:path w="4800" h="4800">
+                <a:path w="4300" h="4200">
                   <a:moveTo>
-                    <a:pt x="611" y="2092"/>
+                    <a:pt x="3871" y="936"/>
                   </a:moveTo>
                   <a:cubicBezTo>
-                    <a:pt x="611" y="2910"/>
-                    <a:pt x="1274" y="3574"/>
-                    <a:pt x="2092" y="3574"/>
-                  </a:cubicBezTo>
-                  <a:cubicBezTo>
-                    <a:pt x="2911" y="3574"/>
-                    <a:pt x="3574" y="2910"/>
-                    <a:pt x="3574" y="2092"/>
-                  </a:cubicBezTo>
-                  <a:cubicBezTo>
-                    <a:pt x="3574" y="1274"/>
-                    <a:pt x="2911" y="610"/>
-                    <a:pt x="2093" y="610"/>
-                  </a:cubicBezTo>
-                  <a:cubicBezTo>
-                    <a:pt x="1274" y="610"/>
-                    <a:pt x="611" y="1274"/>
-                    <a:pt x="611" y="2092"/>
-                  </a:cubicBezTo>
+                    <a:pt x="3296" y="65"/>
+                    <a:pt x="2166" y="-246"/>
+                    <a:pt x="1227" y="208"/>
+                  </a:cubicBezTo>
+                  <a:cubicBezTo>
+                    <a:pt x="287" y="661"/>
+                    <a:pt x="-172" y="1740"/>
+                    <a:pt x="153" y="2731"/>
+                  </a:cubicBezTo>
+                  <a:cubicBezTo>
+                    <a:pt x="477" y="3723"/>
+                    <a:pt x="1485" y="4321"/>
+                    <a:pt x="2511" y="4132"/>
+                  </a:cubicBezTo>
+                  <a:cubicBezTo>
+                    <a:pt x="3537" y="3942"/>
+                    <a:pt x="4264" y="3023"/>
+                    <a:pt x="4213" y="1981"/>
+                  </a:cubicBezTo>
+                  <a:lnTo>
+                    <a:pt x="3151" y="1981"/>
+                  </a:lnTo>
+                  <a:lnTo>
+                    <a:pt x="3151" y="2439"/>
+                  </a:lnTo>
+                  <a:lnTo>
+                    <a:pt x="3671" y="2439"/>
+                  </a:lnTo>
+                  <a:cubicBezTo>
+                    <a:pt x="3502" y="3169"/>
+                    <a:pt x="2843" y="3680"/>
+                    <a:pt x="2093" y="3662"/>
+                  </a:cubicBezTo>
+                  <a:cubicBezTo>
+                    <a:pt x="1344" y="3643"/>
+                    <a:pt x="711" y="3100"/>
+                    <a:pt x="579" y="2362"/>
+                  </a:cubicBezTo>
+                  <a:cubicBezTo>
+                    <a:pt x="446" y="1624"/>
+                    <a:pt x="851" y="895"/>
+                    <a:pt x="1547" y="617"/>
+                  </a:cubicBezTo>
+                  <a:cubicBezTo>
+                    <a:pt x="2243" y="339"/>
+                    <a:pt x="3038" y="588"/>
+                    <a:pt x="3451" y="1214"/>
+                  </a:cubicBezTo>
+                  <a:lnTo>
+                    <a:pt x="3871" y="936"/>
+                  </a:lnTo>
                   <a:close/>
                 </a:path>
               </a:pathLst>
             </a:custGeom>
             <a:solidFill>
-              <a:srgbClr val="1B1E24"/>
-            </a:solidFill>
-            <a:ln>
-              <a:noFill/>
-            </a:ln>
-          </p:spPr>
-        </p:sp>
-        <p:sp>
-          <p:nvSpPr>
-            <p:cNvPr id="45" name="m-mark-c1"/>
-            <p:cNvSpPr/>
-            <p:nvPr/>
-          </p:nvSpPr>
-          <p:spPr>
-            <a:xfrm>
-              <a:off x="0" y="0"/>
-              <a:ext cx="304800" cy="304800"/>
+              <a:srgbClr val="FFFFFF"/>
+            </a:solidFill>
+            <a:ln>
+              <a:noFill/>
+            </a:ln>
+          </p:spPr>
+        </p:sp>
+        <p:sp>
+          <p:nvSpPr>
+            <p:cNvPr id="45" name="m-mark-handle"/>
+            <p:cNvSpPr/>
+            <p:nvPr/>
+          </p:nvSpPr>
+          <p:spPr>
+            <a:xfrm>
+              <a:off x="203200" y="203200"/>
+              <a:ext cx="101600" cy="101600"/>
             </a:xfrm>
             <a:custGeom>
               <a:avLst/>
@@ -4303,52 +4193,58 @@
               <a:cxnLst/>
               <a:rect l="0" t="0" r="r" b="b"/>
               <a:pathLst>
-                <a:path w="4800" h="4800">
+                <a:path w="1600" h="1600">
                   <a:moveTo>
-                    <a:pt x="1271" y="2115"/>
+                    <a:pt x="92" y="514"/>
                   </a:moveTo>
-                  <a:cubicBezTo>
-                    <a:pt x="1271" y="2589"/>
-                    <a:pt x="1656" y="2974"/>
-                    <a:pt x="2130" y="2974"/>
-                  </a:cubicBezTo>
-                  <a:cubicBezTo>
-                    <a:pt x="2604" y="2974"/>
-                    <a:pt x="2989" y="2589"/>
-                    <a:pt x="2989" y="2115"/>
-                  </a:cubicBezTo>
-                  <a:cubicBezTo>
-                    <a:pt x="2989" y="1641"/>
-                    <a:pt x="2604" y="1256"/>
-                    <a:pt x="2130" y="1256"/>
-                  </a:cubicBezTo>
-                  <a:cubicBezTo>
-                    <a:pt x="1656" y="1256"/>
-                    <a:pt x="1271" y="1641"/>
-                    <a:pt x="1271" y="2115"/>
+                  <a:lnTo>
+                    <a:pt x="949" y="1484"/>
+                  </a:lnTo>
+                  <a:cubicBezTo>
+                    <a:pt x="1075" y="1626"/>
+                    <a:pt x="1293" y="1640"/>
+                    <a:pt x="1435" y="1514"/>
+                  </a:cubicBezTo>
+                  <a:cubicBezTo>
+                    <a:pt x="1577" y="1388"/>
+                    <a:pt x="1591" y="1170"/>
+                    <a:pt x="1465" y="1028"/>
+                  </a:cubicBezTo>
+                  <a:lnTo>
+                    <a:pt x="607" y="58"/>
+                  </a:lnTo>
+                  <a:cubicBezTo>
+                    <a:pt x="480" y="-80"/>
+                    <a:pt x="266" y="-91"/>
+                    <a:pt x="126" y="34"/>
+                  </a:cubicBezTo>
+                  <a:cubicBezTo>
+                    <a:pt x="-14" y="158"/>
+                    <a:pt x="-29" y="371"/>
+                    <a:pt x="92" y="514"/>
                   </a:cubicBezTo>
                   <a:close/>
                 </a:path>
               </a:pathLst>
             </a:custGeom>
             <a:solidFill>
-              <a:srgbClr val="D3A32E"/>
-            </a:solidFill>
-            <a:ln>
-              <a:noFill/>
-            </a:ln>
-          </p:spPr>
-        </p:sp>
-        <p:sp>
-          <p:nvSpPr>
-            <p:cNvPr id="46" name="m-mark-c2"/>
-            <p:cNvSpPr/>
-            <p:nvPr/>
-          </p:nvSpPr>
-          <p:spPr>
-            <a:xfrm>
-              <a:off x="0" y="0"/>
-              <a:ext cx="304800" cy="304800"/>
+              <a:srgbClr val="FFFFFF"/>
+            </a:solidFill>
+            <a:ln>
+              <a:noFill/>
+            </a:ln>
+          </p:spPr>
+        </p:sp>
+        <p:sp>
+          <p:nvSpPr>
+            <p:cNvPr id="46" name="m-mark-iris"/>
+            <p:cNvSpPr/>
+            <p:nvPr/>
+          </p:nvSpPr>
+          <p:spPr>
+            <a:xfrm>
+              <a:off x="69850" y="76200"/>
+              <a:ext cx="127000" cy="120650"/>
             </a:xfrm>
             <a:custGeom>
               <a:avLst/>
@@ -4357,52 +4253,76 @@
               <a:cxnLst/>
               <a:rect l="0" t="0" r="r" b="b"/>
               <a:pathLst>
-                <a:path w="4800" h="4800">
+                <a:path w="2000" h="1900">
                   <a:moveTo>
-                    <a:pt x="1658" y="2134"/>
+                    <a:pt x="98" y="916"/>
                   </a:moveTo>
                   <a:cubicBezTo>
-                    <a:pt x="1658" y="2397"/>
-                    <a:pt x="1871" y="2610"/>
-                    <a:pt x="2134" y="2610"/>
-                  </a:cubicBezTo>
-                  <a:cubicBezTo>
-                    <a:pt x="2397" y="2610"/>
-                    <a:pt x="2610" y="2397"/>
-                    <a:pt x="2610" y="2134"/>
-                  </a:cubicBezTo>
-                  <a:cubicBezTo>
-                    <a:pt x="2610" y="1871"/>
-                    <a:pt x="2397" y="1658"/>
-                    <a:pt x="2134" y="1658"/>
-                  </a:cubicBezTo>
-                  <a:cubicBezTo>
-                    <a:pt x="1871" y="1658"/>
-                    <a:pt x="1658" y="1871"/>
-                    <a:pt x="1658" y="2134"/>
+                    <a:pt x="98" y="411"/>
+                    <a:pt x="508" y="1"/>
+                    <a:pt x="1013" y="1"/>
+                  </a:cubicBezTo>
+                  <a:cubicBezTo>
+                    <a:pt x="1518" y="1"/>
+                    <a:pt x="1928" y="411"/>
+                    <a:pt x="1928" y="916"/>
+                  </a:cubicBezTo>
+                  <a:cubicBezTo>
+                    <a:pt x="1928" y="1421"/>
+                    <a:pt x="1518" y="1831"/>
+                    <a:pt x="1013" y="1831"/>
+                  </a:cubicBezTo>
+                  <a:cubicBezTo>
+                    <a:pt x="508" y="1831"/>
+                    <a:pt x="98" y="1421"/>
+                    <a:pt x="98" y="916"/>
+                  </a:cubicBezTo>
+                  <a:close/>
+                  <a:moveTo>
+                    <a:pt x="504" y="916"/>
+                  </a:moveTo>
+                  <a:cubicBezTo>
+                    <a:pt x="516" y="1189"/>
+                    <a:pt x="741" y="1403"/>
+                    <a:pt x="1014" y="1403"/>
+                  </a:cubicBezTo>
+                  <a:cubicBezTo>
+                    <a:pt x="1286" y="1403"/>
+                    <a:pt x="1511" y="1189"/>
+                    <a:pt x="1523" y="916"/>
+                  </a:cubicBezTo>
+                  <a:cubicBezTo>
+                    <a:pt x="1511" y="643"/>
+                    <a:pt x="1286" y="429"/>
+                    <a:pt x="1014" y="429"/>
+                  </a:cubicBezTo>
+                  <a:cubicBezTo>
+                    <a:pt x="741" y="429"/>
+                    <a:pt x="516" y="643"/>
+                    <a:pt x="504" y="916"/>
                   </a:cubicBezTo>
                   <a:close/>
                 </a:path>
               </a:pathLst>
             </a:custGeom>
             <a:solidFill>
-              <a:srgbClr val="F2F4F6"/>
-            </a:solidFill>
-            <a:ln>
-              <a:noFill/>
-            </a:ln>
-          </p:spPr>
-        </p:sp>
-        <p:sp>
-          <p:nvSpPr>
-            <p:cNvPr id="47" name="m-mark-c3"/>
-            <p:cNvSpPr/>
-            <p:nvPr/>
-          </p:nvSpPr>
-          <p:spPr>
-            <a:xfrm>
-              <a:off x="0" y="0"/>
-              <a:ext cx="304800" cy="304800"/>
+              <a:srgbClr val="D3A32E"/>
+            </a:solidFill>
+            <a:ln>
+              <a:noFill/>
+            </a:ln>
+          </p:spPr>
+        </p:sp>
+        <p:sp>
+          <p:nvSpPr>
+            <p:cNvPr id="47" name="m-mark-highlight"/>
+            <p:cNvSpPr/>
+            <p:nvPr/>
+          </p:nvSpPr>
+          <p:spPr>
+            <a:xfrm>
+              <a:off x="139700" y="107950"/>
+              <a:ext cx="25400" cy="25400"/>
             </a:xfrm>
             <a:custGeom>
               <a:avLst/>
@@ -4411,174 +4331,46 @@
               <a:cxnLst/>
               <a:rect l="0" t="0" r="r" b="b"/>
               <a:pathLst>
-                <a:path w="4800" h="4800">
+                <a:path w="400" h="400">
                   <a:moveTo>
-                    <a:pt x="2220" y="1935"/>
+                    <a:pt x="5" y="219"/>
                   </a:moveTo>
                   <a:cubicBezTo>
-                    <a:pt x="2220" y="2010"/>
-                    <a:pt x="2280" y="2070"/>
-                    <a:pt x="2355" y="2070"/>
-                  </a:cubicBezTo>
-                  <a:cubicBezTo>
-                    <a:pt x="2430" y="2070"/>
-                    <a:pt x="2490" y="2010"/>
-                    <a:pt x="2490" y="1935"/>
-                  </a:cubicBezTo>
-                  <a:cubicBezTo>
-                    <a:pt x="2490" y="1860"/>
-                    <a:pt x="2430" y="1800"/>
-                    <a:pt x="2355" y="1800"/>
-                  </a:cubicBezTo>
-                  <a:cubicBezTo>
-                    <a:pt x="2280" y="1800"/>
-                    <a:pt x="2220" y="1860"/>
-                    <a:pt x="2220" y="1935"/>
+                    <a:pt x="5" y="137"/>
+                    <a:pt x="71" y="71"/>
+                    <a:pt x="153" y="71"/>
+                  </a:cubicBezTo>
+                  <a:cubicBezTo>
+                    <a:pt x="235" y="71"/>
+                    <a:pt x="301" y="137"/>
+                    <a:pt x="301" y="219"/>
+                  </a:cubicBezTo>
+                  <a:cubicBezTo>
+                    <a:pt x="301" y="301"/>
+                    <a:pt x="235" y="367"/>
+                    <a:pt x="153" y="367"/>
+                  </a:cubicBezTo>
+                  <a:cubicBezTo>
+                    <a:pt x="71" y="367"/>
+                    <a:pt x="5" y="301"/>
+                    <a:pt x="5" y="219"/>
                   </a:cubicBezTo>
                   <a:close/>
                 </a:path>
               </a:pathLst>
             </a:custGeom>
             <a:solidFill>
-              <a:srgbClr val="0F1114"/>
-            </a:solidFill>
-            <a:ln>
-              <a:noFill/>
-            </a:ln>
-          </p:spPr>
-        </p:sp>
-        <p:sp>
-          <p:nvSpPr>
-            <p:cNvPr id="48" name="m-mark-s0"/>
-            <p:cNvSpPr/>
-            <p:nvPr/>
-          </p:nvSpPr>
-          <p:spPr>
-            <a:xfrm>
-              <a:off x="0" y="0"/>
-              <a:ext cx="304800" cy="304800"/>
-            </a:xfrm>
-            <a:custGeom>
-              <a:avLst/>
-              <a:gdLst/>
-              <a:ahLst/>
-              <a:cxnLst/>
-              <a:rect l="0" t="0" r="r" b="b"/>
-              <a:pathLst>
-                <a:path w="4800" h="4800">
-                  <a:moveTo>
-                    <a:pt x="3795" y="2003"/>
-                  </a:moveTo>
-                  <a:cubicBezTo>
-                    <a:pt x="3840" y="2866"/>
-                    <a:pt x="3233" y="3626"/>
-                    <a:pt x="2381" y="3773"/>
-                  </a:cubicBezTo>
-                  <a:cubicBezTo>
-                    <a:pt x="1529" y="3919"/>
-                    <a:pt x="703" y="3405"/>
-                    <a:pt x="458" y="2577"/>
-                  </a:cubicBezTo>
-                  <a:cubicBezTo>
-                    <a:pt x="212" y="1748"/>
-                    <a:pt x="625" y="867"/>
-                    <a:pt x="1419" y="526"/>
-                  </a:cubicBezTo>
-                  <a:cubicBezTo>
-                    <a:pt x="2213" y="185"/>
-                    <a:pt x="3137" y="492"/>
-                    <a:pt x="3569" y="1240"/>
-                  </a:cubicBezTo>
-                </a:path>
-              </a:pathLst>
-            </a:custGeom>
-            <a:noFill/>
-            <a:ln w="31750" cap="rnd">
-              <a:solidFill>
-                <a:srgbClr val="F2F4F6"/>
-              </a:solidFill>
-              <a:round/>
-            </a:ln>
-          </p:spPr>
-        </p:sp>
-        <p:sp>
-          <p:nvSpPr>
-            <p:cNvPr id="49" name="m-mark-s1"/>
-            <p:cNvSpPr/>
-            <p:nvPr/>
-          </p:nvSpPr>
-          <p:spPr>
-            <a:xfrm>
-              <a:off x="0" y="0"/>
-              <a:ext cx="304800" cy="304800"/>
-            </a:xfrm>
-            <a:custGeom>
-              <a:avLst/>
-              <a:gdLst/>
-              <a:ahLst/>
-              <a:cxnLst/>
-              <a:rect l="0" t="0" r="r" b="b"/>
-              <a:pathLst>
-                <a:path w="4800" h="4800">
-                  <a:moveTo>
-                    <a:pt x="3334" y="2205"/>
-                  </a:moveTo>
-                  <a:lnTo>
-                    <a:pt x="3810" y="2205"/>
-                  </a:lnTo>
-                </a:path>
-              </a:pathLst>
-            </a:custGeom>
-            <a:noFill/>
-            <a:ln w="25400" cap="rnd">
-              <a:solidFill>
-                <a:srgbClr val="F2F4F6"/>
-              </a:solidFill>
-              <a:round/>
-            </a:ln>
-          </p:spPr>
-        </p:sp>
-        <p:sp>
-          <p:nvSpPr>
-            <p:cNvPr id="50" name="m-mark-s2"/>
-            <p:cNvSpPr/>
-            <p:nvPr/>
-          </p:nvSpPr>
-          <p:spPr>
-            <a:xfrm>
-              <a:off x="0" y="0"/>
-              <a:ext cx="304800" cy="304800"/>
-            </a:xfrm>
-            <a:custGeom>
-              <a:avLst/>
-              <a:gdLst/>
-              <a:ahLst/>
-              <a:cxnLst/>
-              <a:rect l="0" t="0" r="r" b="b"/>
-              <a:pathLst>
-                <a:path w="4800" h="4800">
-                  <a:moveTo>
-                    <a:pt x="3542" y="3548"/>
-                  </a:moveTo>
-                  <a:lnTo>
-                    <a:pt x="4334" y="4345"/>
-                  </a:lnTo>
-                </a:path>
-              </a:pathLst>
-            </a:custGeom>
-            <a:noFill/>
-            <a:ln w="38100" cap="rnd">
-              <a:solidFill>
-                <a:srgbClr val="F2F4F6"/>
-              </a:solidFill>
-              <a:round/>
+              <a:srgbClr val="FFFFFF"/>
+            </a:solidFill>
+            <a:ln>
+              <a:noFill/>
             </a:ln>
           </p:spPr>
         </p:sp>
       </p:grpSp>
       <p:sp>
         <p:nvSpPr>
-          <p:cNvPr id="52" name="wh-kicker"/>
+          <p:cNvPr id="49" name="wh-kicker"/>
           <p:cNvSpPr txBox="1"/>
           <p:nvPr/>
         </p:nvSpPr>
@@ -4621,7 +4413,7 @@
       </p:sp>
       <p:sp>
         <p:nvSpPr>
-          <p:cNvPr id="53" name="wh-title"/>
+          <p:cNvPr id="50" name="wh-title"/>
           <p:cNvSpPr>
             <a:spLocks noGrp="1"/>
           </p:cNvSpPr>
@@ -4700,7 +4492,7 @@
       </p:sp>
       <p:sp>
         <p:nvSpPr>
-          <p:cNvPr id="54" name="wh-body"/>
+          <p:cNvPr id="51" name="wh-body"/>
           <p:cNvSpPr txBox="1"/>
           <p:nvPr/>
         </p:nvSpPr>
@@ -4749,7 +4541,7 @@
       </p:sp>
       <p:grpSp>
         <p:nvGrpSpPr>
-          <p:cNvPr id="58" name="wh-chk-0"/>
+          <p:cNvPr id="55" name="wh-chk-0"/>
           <p:cNvGrpSpPr/>
           <p:nvPr/>
         </p:nvGrpSpPr>
@@ -4763,7 +4555,7 @@
         </p:grpSpPr>
         <p:sp>
           <p:nvSpPr>
-            <p:cNvPr id="55" name="wh-chk-0-bg"/>
+            <p:cNvPr id="52" name="wh-chk-0-bg"/>
             <p:cNvSpPr/>
             <p:nvPr/>
           </p:nvSpPr>
@@ -4787,7 +4579,7 @@
         </p:sp>
         <p:sp>
           <p:nvSpPr>
-            <p:cNvPr id="56" name="wh-chk-0-label"/>
+            <p:cNvPr id="53" name="wh-chk-0-label"/>
             <p:cNvSpPr txBox="1"/>
             <p:nvPr/>
           </p:nvSpPr>
@@ -4830,7 +4622,7 @@
         </p:sp>
         <p:sp>
           <p:nvSpPr>
-            <p:cNvPr id="57" name="wh-chk-0-dot"/>
+            <p:cNvPr id="54" name="wh-chk-0-dot"/>
             <p:cNvSpPr/>
             <p:nvPr/>
           </p:nvSpPr>
@@ -4853,7 +4645,7 @@
       </p:grpSp>
       <p:grpSp>
         <p:nvGrpSpPr>
-          <p:cNvPr id="62" name="wh-chk-1"/>
+          <p:cNvPr id="59" name="wh-chk-1"/>
           <p:cNvGrpSpPr/>
           <p:nvPr/>
         </p:nvGrpSpPr>
@@ -4867,7 +4659,7 @@
         </p:grpSpPr>
         <p:sp>
           <p:nvSpPr>
-            <p:cNvPr id="59" name="wh-chk-1-bg"/>
+            <p:cNvPr id="56" name="wh-chk-1-bg"/>
             <p:cNvSpPr/>
             <p:nvPr/>
           </p:nvSpPr>
@@ -4891,7 +4683,7 @@
         </p:sp>
         <p:sp>
           <p:nvSpPr>
-            <p:cNvPr id="60" name="wh-chk-1-label"/>
+            <p:cNvPr id="57" name="wh-chk-1-label"/>
             <p:cNvSpPr txBox="1"/>
             <p:nvPr/>
           </p:nvSpPr>
@@ -4934,7 +4726,7 @@
         </p:sp>
         <p:sp>
           <p:nvSpPr>
-            <p:cNvPr id="61" name="wh-chk-1-dot"/>
+            <p:cNvPr id="58" name="wh-chk-1-dot"/>
             <p:cNvSpPr/>
             <p:nvPr/>
           </p:nvSpPr>
@@ -4957,7 +4749,7 @@
       </p:grpSp>
       <p:grpSp>
         <p:nvGrpSpPr>
-          <p:cNvPr id="66" name="wh-chk-2"/>
+          <p:cNvPr id="63" name="wh-chk-2"/>
           <p:cNvGrpSpPr/>
           <p:nvPr/>
         </p:nvGrpSpPr>
@@ -4971,7 +4763,7 @@
         </p:grpSpPr>
         <p:sp>
           <p:nvSpPr>
-            <p:cNvPr id="63" name="wh-chk-2-bg"/>
+            <p:cNvPr id="60" name="wh-chk-2-bg"/>
             <p:cNvSpPr/>
             <p:nvPr/>
           </p:nvSpPr>
@@ -4995,7 +4787,7 @@
         </p:sp>
         <p:sp>
           <p:nvSpPr>
-            <p:cNvPr id="64" name="wh-chk-2-label"/>
+            <p:cNvPr id="61" name="wh-chk-2-label"/>
             <p:cNvSpPr txBox="1"/>
             <p:nvPr/>
           </p:nvSpPr>
@@ -5038,7 +4830,7 @@
         </p:sp>
         <p:sp>
           <p:nvSpPr>
-            <p:cNvPr id="65" name="wh-chk-2-dot"/>
+            <p:cNvPr id="62" name="wh-chk-2-dot"/>
             <p:cNvSpPr/>
             <p:nvPr/>
           </p:nvSpPr>
@@ -5061,7 +4853,7 @@
       </p:grpSp>
       <p:grpSp>
         <p:nvGrpSpPr>
-          <p:cNvPr id="70" name="wh-chk-3"/>
+          <p:cNvPr id="67" name="wh-chk-3"/>
           <p:cNvGrpSpPr/>
           <p:nvPr/>
         </p:nvGrpSpPr>
@@ -5075,7 +4867,7 @@
         </p:grpSpPr>
         <p:sp>
           <p:nvSpPr>
-            <p:cNvPr id="67" name="wh-chk-3-bg"/>
+            <p:cNvPr id="64" name="wh-chk-3-bg"/>
             <p:cNvSpPr/>
             <p:nvPr/>
           </p:nvSpPr>
@@ -5099,7 +4891,7 @@
         </p:sp>
         <p:sp>
           <p:nvSpPr>
-            <p:cNvPr id="68" name="wh-chk-3-label"/>
+            <p:cNvPr id="65" name="wh-chk-3-label"/>
             <p:cNvSpPr txBox="1"/>
             <p:nvPr/>
           </p:nvSpPr>
@@ -5142,7 +4934,7 @@
         </p:sp>
         <p:sp>
           <p:nvSpPr>
-            <p:cNvPr id="69" name="wh-chk-3-dot"/>
+            <p:cNvPr id="66" name="wh-chk-3-dot"/>
             <p:cNvSpPr/>
             <p:nvPr/>
           </p:nvSpPr>
@@ -5165,7 +4957,7 @@
       </p:grpSp>
       <p:grpSp>
         <p:nvGrpSpPr>
-          <p:cNvPr id="74" name="wh-chk-4"/>
+          <p:cNvPr id="71" name="wh-chk-4"/>
           <p:cNvGrpSpPr/>
           <p:nvPr/>
         </p:nvGrpSpPr>
@@ -5179,7 +4971,7 @@
         </p:grpSpPr>
         <p:sp>
           <p:nvSpPr>
-            <p:cNvPr id="71" name="wh-chk-4-bg"/>
+            <p:cNvPr id="68" name="wh-chk-4-bg"/>
             <p:cNvSpPr/>
             <p:nvPr/>
           </p:nvSpPr>
@@ -5203,7 +4995,7 @@
         </p:sp>
         <p:sp>
           <p:nvSpPr>
-            <p:cNvPr id="72" name="wh-chk-4-label"/>
+            <p:cNvPr id="69" name="wh-chk-4-label"/>
             <p:cNvSpPr txBox="1"/>
             <p:nvPr/>
           </p:nvSpPr>
@@ -5246,7 +5038,7 @@
         </p:sp>
         <p:sp>
           <p:nvSpPr>
-            <p:cNvPr id="73" name="wh-chk-4-dot"/>
+            <p:cNvPr id="70" name="wh-chk-4-dot"/>
             <p:cNvSpPr/>
             <p:nvPr/>
           </p:nvSpPr>
@@ -5269,7 +5061,7 @@
       </p:grpSp>
       <p:grpSp>
         <p:nvGrpSpPr>
-          <p:cNvPr id="78" name="wh-chk-5"/>
+          <p:cNvPr id="75" name="wh-chk-5"/>
           <p:cNvGrpSpPr/>
           <p:nvPr/>
         </p:nvGrpSpPr>
@@ -5283,7 +5075,7 @@
         </p:grpSpPr>
         <p:sp>
           <p:nvSpPr>
-            <p:cNvPr id="75" name="wh-chk-5-bg"/>
+            <p:cNvPr id="72" name="wh-chk-5-bg"/>
             <p:cNvSpPr/>
             <p:nvPr/>
           </p:nvSpPr>
@@ -5307,7 +5099,7 @@
         </p:sp>
         <p:sp>
           <p:nvSpPr>
-            <p:cNvPr id="76" name="wh-chk-5-label"/>
+            <p:cNvPr id="73" name="wh-chk-5-label"/>
             <p:cNvSpPr txBox="1"/>
             <p:nvPr/>
           </p:nvSpPr>
@@ -5350,7 +5142,7 @@
         </p:sp>
         <p:sp>
           <p:nvSpPr>
-            <p:cNvPr id="77" name="wh-chk-5-dot"/>
+            <p:cNvPr id="74" name="wh-chk-5-dot"/>
             <p:cNvSpPr/>
             <p:nvPr/>
           </p:nvSpPr>
@@ -5373,7 +5165,7 @@
       </p:grpSp>
       <p:grpSp>
         <p:nvGrpSpPr>
-          <p:cNvPr id="82" name="wh-chk-6"/>
+          <p:cNvPr id="79" name="wh-chk-6"/>
           <p:cNvGrpSpPr/>
           <p:nvPr/>
         </p:nvGrpSpPr>
@@ -5387,7 +5179,7 @@
         </p:grpSpPr>
         <p:sp>
           <p:nvSpPr>
-            <p:cNvPr id="79" name="wh-chk-6-bg"/>
+            <p:cNvPr id="76" name="wh-chk-6-bg"/>
             <p:cNvSpPr/>
             <p:nvPr/>
           </p:nvSpPr>
@@ -5411,7 +5203,7 @@
         </p:sp>
         <p:sp>
           <p:nvSpPr>
-            <p:cNvPr id="80" name="wh-chk-6-label"/>
+            <p:cNvPr id="77" name="wh-chk-6-label"/>
             <p:cNvSpPr txBox="1"/>
             <p:nvPr/>
           </p:nvSpPr>
@@ -5454,7 +5246,7 @@
         </p:sp>
         <p:sp>
           <p:nvSpPr>
-            <p:cNvPr id="81" name="wh-chk-6-dot"/>
+            <p:cNvPr id="78" name="wh-chk-6-dot"/>
             <p:cNvSpPr/>
             <p:nvPr/>
           </p:nvSpPr>
@@ -5477,7 +5269,7 @@
       </p:grpSp>
       <p:grpSp>
         <p:nvGrpSpPr>
-          <p:cNvPr id="86" name="wh-chk-7"/>
+          <p:cNvPr id="83" name="wh-chk-7"/>
           <p:cNvGrpSpPr/>
           <p:nvPr/>
         </p:nvGrpSpPr>
@@ -5491,7 +5283,7 @@
         </p:grpSpPr>
         <p:sp>
           <p:nvSpPr>
-            <p:cNvPr id="83" name="wh-chk-7-bg"/>
+            <p:cNvPr id="80" name="wh-chk-7-bg"/>
             <p:cNvSpPr/>
             <p:nvPr/>
           </p:nvSpPr>
@@ -5515,7 +5307,7 @@
         </p:sp>
         <p:sp>
           <p:nvSpPr>
-            <p:cNvPr id="84" name="wh-chk-7-label"/>
+            <p:cNvPr id="81" name="wh-chk-7-label"/>
             <p:cNvSpPr txBox="1"/>
             <p:nvPr/>
           </p:nvSpPr>
@@ -5558,7 +5350,7 @@
         </p:sp>
         <p:sp>
           <p:nvSpPr>
-            <p:cNvPr id="85" name="wh-chk-7-dot"/>
+            <p:cNvPr id="82" name="wh-chk-7-dot"/>
             <p:cNvSpPr/>
             <p:nvPr/>
           </p:nvSpPr>
@@ -5581,7 +5373,7 @@
       </p:grpSp>
       <p:grpSp>
         <p:nvGrpSpPr>
-          <p:cNvPr id="90" name="wh-chk-8"/>
+          <p:cNvPr id="87" name="wh-chk-8"/>
           <p:cNvGrpSpPr/>
           <p:nvPr/>
         </p:nvGrpSpPr>
@@ -5595,7 +5387,7 @@
         </p:grpSpPr>
         <p:sp>
           <p:nvSpPr>
-            <p:cNvPr id="87" name="wh-chk-8-bg"/>
+            <p:cNvPr id="84" name="wh-chk-8-bg"/>
             <p:cNvSpPr/>
             <p:nvPr/>
           </p:nvSpPr>
@@ -5619,7 +5411,7 @@
         </p:sp>
         <p:sp>
           <p:nvSpPr>
-            <p:cNvPr id="88" name="wh-chk-8-label"/>
+            <p:cNvPr id="85" name="wh-chk-8-label"/>
             <p:cNvSpPr txBox="1"/>
             <p:nvPr/>
           </p:nvSpPr>
@@ -5662,7 +5454,7 @@
         </p:sp>
         <p:sp>
           <p:nvSpPr>
-            <p:cNvPr id="89" name="wh-chk-8-dot"/>
+            <p:cNvPr id="86" name="wh-chk-8-dot"/>
             <p:cNvSpPr/>
             <p:nvPr/>
           </p:nvSpPr>
@@ -5685,7 +5477,7 @@
       </p:grpSp>
       <p:grpSp>
         <p:nvGrpSpPr>
-          <p:cNvPr id="94" name="wh-chk-9"/>
+          <p:cNvPr id="91" name="wh-chk-9"/>
           <p:cNvGrpSpPr/>
           <p:nvPr/>
         </p:nvGrpSpPr>
@@ -5699,7 +5491,7 @@
         </p:grpSpPr>
         <p:sp>
           <p:nvSpPr>
-            <p:cNvPr id="91" name="wh-chk-9-bg"/>
+            <p:cNvPr id="88" name="wh-chk-9-bg"/>
             <p:cNvSpPr/>
             <p:nvPr/>
           </p:nvSpPr>
@@ -5723,7 +5515,7 @@
         </p:sp>
         <p:sp>
           <p:nvSpPr>
-            <p:cNvPr id="92" name="wh-chk-9-label"/>
+            <p:cNvPr id="89" name="wh-chk-9-label"/>
             <p:cNvSpPr txBox="1"/>
             <p:nvPr/>
           </p:nvSpPr>
@@ -5766,7 +5558,7 @@
         </p:sp>
         <p:sp>
           <p:nvSpPr>
-            <p:cNvPr id="93" name="wh-chk-9-dot"/>
+            <p:cNvPr id="90" name="wh-chk-9-dot"/>
             <p:cNvSpPr/>
             <p:nvPr/>
           </p:nvSpPr>
@@ -5789,7 +5581,7 @@
       </p:grpSp>
       <p:grpSp>
         <p:nvGrpSpPr>
-          <p:cNvPr id="101" name="wh-shot"/>
+          <p:cNvPr id="98" name="wh-shot"/>
           <p:cNvGrpSpPr/>
           <p:nvPr/>
         </p:nvGrpSpPr>
@@ -5803,7 +5595,7 @@
         </p:grpSpPr>
         <p:pic>
           <p:nvPicPr>
-            <p:cNvPr id="95" name="wh-shot-base" descr="wh-shot-base"/>
+            <p:cNvPr id="92" name="wh-shot-base" descr="wh-shot-base"/>
             <p:cNvPicPr>
               <a:picLocks noChangeAspect="1"/>
             </p:cNvPicPr>
@@ -5827,7 +5619,7 @@
         </p:pic>
         <p:sp>
           <p:nvSpPr>
-            <p:cNvPr id="96" name="wh-shot-tl0"/>
+            <p:cNvPr id="93" name="wh-shot-tl0"/>
             <p:cNvSpPr/>
             <p:nvPr/>
           </p:nvSpPr>
@@ -5849,7 +5641,7 @@
         </p:sp>
         <p:sp>
           <p:nvSpPr>
-            <p:cNvPr id="97" name="wh-shot-tl1"/>
+            <p:cNvPr id="94" name="wh-shot-tl1"/>
             <p:cNvSpPr/>
             <p:nvPr/>
           </p:nvSpPr>
@@ -5871,7 +5663,7 @@
         </p:sp>
         <p:sp>
           <p:nvSpPr>
-            <p:cNvPr id="98" name="wh-shot-tl2"/>
+            <p:cNvPr id="95" name="wh-shot-tl2"/>
             <p:cNvSpPr/>
             <p:nvPr/>
           </p:nvSpPr>
@@ -5893,7 +5685,7 @@
         </p:sp>
         <p:sp>
           <p:nvSpPr>
-            <p:cNvPr id="99" name="wh-shot-win"/>
+            <p:cNvPr id="96" name="wh-shot-win"/>
             <p:cNvSpPr/>
             <p:nvPr/>
           </p:nvSpPr>
@@ -5915,7 +5707,7 @@
         </p:sp>
         <p:pic>
           <p:nvPicPr>
-            <p:cNvPr id="100" name="wh-shot-img" descr="wh-shot-img"/>
+            <p:cNvPr id="97" name="wh-shot-img" descr="wh-shot-img"/>
             <p:cNvPicPr>
               <a:picLocks noChangeAspect="1"/>
             </p:cNvPicPr>
@@ -7166,7 +6958,7 @@
       </p:sp>
       <p:grpSp>
         <p:nvGrpSpPr>
-          <p:cNvPr id="51" name="m-mark"/>
+          <p:cNvPr id="48" name="m-mark"/>
           <p:cNvGrpSpPr/>
           <p:nvPr/>
         </p:nvGrpSpPr>
@@ -7180,14 +6972,14 @@
         </p:grpSpPr>
         <p:sp>
           <p:nvSpPr>
-            <p:cNvPr id="44" name="m-mark-c0"/>
+            <p:cNvPr id="44" name="m-mark-g"/>
             <p:cNvSpPr/>
             <p:nvPr/>
           </p:nvSpPr>
           <p:spPr>
             <a:xfrm>
               <a:off x="0" y="0"/>
-              <a:ext cx="304800" cy="304800"/>
+              <a:ext cx="273050" cy="266700"/>
             </a:xfrm>
             <a:custGeom>
               <a:avLst/>
@@ -7196,52 +6988,84 @@
               <a:cxnLst/>
               <a:rect l="0" t="0" r="r" b="b"/>
               <a:pathLst>
-                <a:path w="4800" h="4800">
+                <a:path w="4300" h="4200">
                   <a:moveTo>
-                    <a:pt x="611" y="2092"/>
+                    <a:pt x="3871" y="936"/>
                   </a:moveTo>
                   <a:cubicBezTo>
-                    <a:pt x="611" y="2910"/>
-                    <a:pt x="1274" y="3574"/>
-                    <a:pt x="2092" y="3574"/>
-                  </a:cubicBezTo>
-                  <a:cubicBezTo>
-                    <a:pt x="2911" y="3574"/>
-                    <a:pt x="3574" y="2910"/>
-                    <a:pt x="3574" y="2092"/>
-                  </a:cubicBezTo>
-                  <a:cubicBezTo>
-                    <a:pt x="3574" y="1274"/>
-                    <a:pt x="2911" y="610"/>
-                    <a:pt x="2093" y="610"/>
-                  </a:cubicBezTo>
-                  <a:cubicBezTo>
-                    <a:pt x="1274" y="610"/>
-                    <a:pt x="611" y="1274"/>
-                    <a:pt x="611" y="2092"/>
-                  </a:cubicBezTo>
+                    <a:pt x="3296" y="65"/>
+                    <a:pt x="2166" y="-246"/>
+                    <a:pt x="1227" y="208"/>
+                  </a:cubicBezTo>
+                  <a:cubicBezTo>
+                    <a:pt x="287" y="661"/>
+                    <a:pt x="-172" y="1740"/>
+                    <a:pt x="153" y="2731"/>
+                  </a:cubicBezTo>
+                  <a:cubicBezTo>
+                    <a:pt x="477" y="3723"/>
+                    <a:pt x="1485" y="4321"/>
+                    <a:pt x="2511" y="4132"/>
+                  </a:cubicBezTo>
+                  <a:cubicBezTo>
+                    <a:pt x="3537" y="3942"/>
+                    <a:pt x="4264" y="3023"/>
+                    <a:pt x="4213" y="1981"/>
+                  </a:cubicBezTo>
+                  <a:lnTo>
+                    <a:pt x="3151" y="1981"/>
+                  </a:lnTo>
+                  <a:lnTo>
+                    <a:pt x="3151" y="2439"/>
+                  </a:lnTo>
+                  <a:lnTo>
+                    <a:pt x="3671" y="2439"/>
+                  </a:lnTo>
+                  <a:cubicBezTo>
+                    <a:pt x="3502" y="3169"/>
+                    <a:pt x="2843" y="3680"/>
+                    <a:pt x="2093" y="3662"/>
+                  </a:cubicBezTo>
+                  <a:cubicBezTo>
+                    <a:pt x="1344" y="3643"/>
+                    <a:pt x="711" y="3100"/>
+                    <a:pt x="579" y="2362"/>
+                  </a:cubicBezTo>
+                  <a:cubicBezTo>
+                    <a:pt x="446" y="1624"/>
+                    <a:pt x="851" y="895"/>
+                    <a:pt x="1547" y="617"/>
+                  </a:cubicBezTo>
+                  <a:cubicBezTo>
+                    <a:pt x="2243" y="339"/>
+                    <a:pt x="3038" y="588"/>
+                    <a:pt x="3451" y="1214"/>
+                  </a:cubicBezTo>
+                  <a:lnTo>
+                    <a:pt x="3871" y="936"/>
+                  </a:lnTo>
                   <a:close/>
                 </a:path>
               </a:pathLst>
             </a:custGeom>
             <a:solidFill>
-              <a:srgbClr val="1B1E24"/>
-            </a:solidFill>
-            <a:ln>
-              <a:noFill/>
-            </a:ln>
-          </p:spPr>
-        </p:sp>
-        <p:sp>
-          <p:nvSpPr>
-            <p:cNvPr id="45" name="m-mark-c1"/>
-            <p:cNvSpPr/>
-            <p:nvPr/>
-          </p:nvSpPr>
-          <p:spPr>
-            <a:xfrm>
-              <a:off x="0" y="0"/>
-              <a:ext cx="304800" cy="304800"/>
+              <a:srgbClr val="FFFFFF"/>
+            </a:solidFill>
+            <a:ln>
+              <a:noFill/>
+            </a:ln>
+          </p:spPr>
+        </p:sp>
+        <p:sp>
+          <p:nvSpPr>
+            <p:cNvPr id="45" name="m-mark-handle"/>
+            <p:cNvSpPr/>
+            <p:nvPr/>
+          </p:nvSpPr>
+          <p:spPr>
+            <a:xfrm>
+              <a:off x="203200" y="203200"/>
+              <a:ext cx="101600" cy="101600"/>
             </a:xfrm>
             <a:custGeom>
               <a:avLst/>
@@ -7250,52 +7074,58 @@
               <a:cxnLst/>
               <a:rect l="0" t="0" r="r" b="b"/>
               <a:pathLst>
-                <a:path w="4800" h="4800">
+                <a:path w="1600" h="1600">
                   <a:moveTo>
-                    <a:pt x="1271" y="2115"/>
+                    <a:pt x="92" y="514"/>
                   </a:moveTo>
-                  <a:cubicBezTo>
-                    <a:pt x="1271" y="2589"/>
-                    <a:pt x="1656" y="2974"/>
-                    <a:pt x="2130" y="2974"/>
-                  </a:cubicBezTo>
-                  <a:cubicBezTo>
-                    <a:pt x="2604" y="2974"/>
-                    <a:pt x="2989" y="2589"/>
-                    <a:pt x="2989" y="2115"/>
-                  </a:cubicBezTo>
-                  <a:cubicBezTo>
-                    <a:pt x="2989" y="1641"/>
-                    <a:pt x="2604" y="1256"/>
-                    <a:pt x="2130" y="1256"/>
-                  </a:cubicBezTo>
-                  <a:cubicBezTo>
-                    <a:pt x="1656" y="1256"/>
-                    <a:pt x="1271" y="1641"/>
-                    <a:pt x="1271" y="2115"/>
+                  <a:lnTo>
+                    <a:pt x="949" y="1484"/>
+                  </a:lnTo>
+                  <a:cubicBezTo>
+                    <a:pt x="1075" y="1626"/>
+                    <a:pt x="1293" y="1640"/>
+                    <a:pt x="1435" y="1514"/>
+                  </a:cubicBezTo>
+                  <a:cubicBezTo>
+                    <a:pt x="1577" y="1388"/>
+                    <a:pt x="1591" y="1170"/>
+                    <a:pt x="1465" y="1028"/>
+                  </a:cubicBezTo>
+                  <a:lnTo>
+                    <a:pt x="607" y="58"/>
+                  </a:lnTo>
+                  <a:cubicBezTo>
+                    <a:pt x="480" y="-80"/>
+                    <a:pt x="266" y="-91"/>
+                    <a:pt x="126" y="34"/>
+                  </a:cubicBezTo>
+                  <a:cubicBezTo>
+                    <a:pt x="-14" y="158"/>
+                    <a:pt x="-29" y="371"/>
+                    <a:pt x="92" y="514"/>
                   </a:cubicBezTo>
                   <a:close/>
                 </a:path>
               </a:pathLst>
             </a:custGeom>
             <a:solidFill>
-              <a:srgbClr val="D3A32E"/>
-            </a:solidFill>
-            <a:ln>
-              <a:noFill/>
-            </a:ln>
-          </p:spPr>
-        </p:sp>
-        <p:sp>
-          <p:nvSpPr>
-            <p:cNvPr id="46" name="m-mark-c2"/>
-            <p:cNvSpPr/>
-            <p:nvPr/>
-          </p:nvSpPr>
-          <p:spPr>
-            <a:xfrm>
-              <a:off x="0" y="0"/>
-              <a:ext cx="304800" cy="304800"/>
+              <a:srgbClr val="FFFFFF"/>
+            </a:solidFill>
+            <a:ln>
+              <a:noFill/>
+            </a:ln>
+          </p:spPr>
+        </p:sp>
+        <p:sp>
+          <p:nvSpPr>
+            <p:cNvPr id="46" name="m-mark-iris"/>
+            <p:cNvSpPr/>
+            <p:nvPr/>
+          </p:nvSpPr>
+          <p:spPr>
+            <a:xfrm>
+              <a:off x="69850" y="76200"/>
+              <a:ext cx="127000" cy="120650"/>
             </a:xfrm>
             <a:custGeom>
               <a:avLst/>
@@ -7304,52 +7134,76 @@
               <a:cxnLst/>
               <a:rect l="0" t="0" r="r" b="b"/>
               <a:pathLst>
-                <a:path w="4800" h="4800">
+                <a:path w="2000" h="1900">
                   <a:moveTo>
-                    <a:pt x="1658" y="2134"/>
+                    <a:pt x="98" y="916"/>
                   </a:moveTo>
                   <a:cubicBezTo>
-                    <a:pt x="1658" y="2397"/>
-                    <a:pt x="1871" y="2610"/>
-                    <a:pt x="2134" y="2610"/>
-                  </a:cubicBezTo>
-                  <a:cubicBezTo>
-                    <a:pt x="2397" y="2610"/>
-                    <a:pt x="2610" y="2397"/>
-                    <a:pt x="2610" y="2134"/>
-                  </a:cubicBezTo>
-                  <a:cubicBezTo>
-                    <a:pt x="2610" y="1871"/>
-                    <a:pt x="2397" y="1658"/>
-                    <a:pt x="2134" y="1658"/>
-                  </a:cubicBezTo>
-                  <a:cubicBezTo>
-                    <a:pt x="1871" y="1658"/>
-                    <a:pt x="1658" y="1871"/>
-                    <a:pt x="1658" y="2134"/>
+                    <a:pt x="98" y="411"/>
+                    <a:pt x="508" y="1"/>
+                    <a:pt x="1013" y="1"/>
+                  </a:cubicBezTo>
+                  <a:cubicBezTo>
+                    <a:pt x="1518" y="1"/>
+                    <a:pt x="1928" y="411"/>
+                    <a:pt x="1928" y="916"/>
+                  </a:cubicBezTo>
+                  <a:cubicBezTo>
+                    <a:pt x="1928" y="1421"/>
+                    <a:pt x="1518" y="1831"/>
+                    <a:pt x="1013" y="1831"/>
+                  </a:cubicBezTo>
+                  <a:cubicBezTo>
+                    <a:pt x="508" y="1831"/>
+                    <a:pt x="98" y="1421"/>
+                    <a:pt x="98" y="916"/>
+                  </a:cubicBezTo>
+                  <a:close/>
+                  <a:moveTo>
+                    <a:pt x="504" y="916"/>
+                  </a:moveTo>
+                  <a:cubicBezTo>
+                    <a:pt x="516" y="1189"/>
+                    <a:pt x="741" y="1403"/>
+                    <a:pt x="1014" y="1403"/>
+                  </a:cubicBezTo>
+                  <a:cubicBezTo>
+                    <a:pt x="1286" y="1403"/>
+                    <a:pt x="1511" y="1189"/>
+                    <a:pt x="1523" y="916"/>
+                  </a:cubicBezTo>
+                  <a:cubicBezTo>
+                    <a:pt x="1511" y="643"/>
+                    <a:pt x="1286" y="429"/>
+                    <a:pt x="1014" y="429"/>
+                  </a:cubicBezTo>
+                  <a:cubicBezTo>
+                    <a:pt x="741" y="429"/>
+                    <a:pt x="516" y="643"/>
+                    <a:pt x="504" y="916"/>
                   </a:cubicBezTo>
                   <a:close/>
                 </a:path>
               </a:pathLst>
             </a:custGeom>
             <a:solidFill>
-              <a:srgbClr val="F2F4F6"/>
-            </a:solidFill>
-            <a:ln>
-              <a:noFill/>
-            </a:ln>
-          </p:spPr>
-        </p:sp>
-        <p:sp>
-          <p:nvSpPr>
-            <p:cNvPr id="47" name="m-mark-c3"/>
-            <p:cNvSpPr/>
-            <p:nvPr/>
-          </p:nvSpPr>
-          <p:spPr>
-            <a:xfrm>
-              <a:off x="0" y="0"/>
-              <a:ext cx="304800" cy="304800"/>
+              <a:srgbClr val="D3A32E"/>
+            </a:solidFill>
+            <a:ln>
+              <a:noFill/>
+            </a:ln>
+          </p:spPr>
+        </p:sp>
+        <p:sp>
+          <p:nvSpPr>
+            <p:cNvPr id="47" name="m-mark-highlight"/>
+            <p:cNvSpPr/>
+            <p:nvPr/>
+          </p:nvSpPr>
+          <p:spPr>
+            <a:xfrm>
+              <a:off x="139700" y="107950"/>
+              <a:ext cx="25400" cy="25400"/>
             </a:xfrm>
             <a:custGeom>
               <a:avLst/>
@@ -7358,174 +7212,46 @@
               <a:cxnLst/>
               <a:rect l="0" t="0" r="r" b="b"/>
               <a:pathLst>
-                <a:path w="4800" h="4800">
+                <a:path w="400" h="400">
                   <a:moveTo>
-                    <a:pt x="2220" y="1935"/>
+                    <a:pt x="5" y="219"/>
                   </a:moveTo>
                   <a:cubicBezTo>
-                    <a:pt x="2220" y="2010"/>
-                    <a:pt x="2280" y="2070"/>
-                    <a:pt x="2355" y="2070"/>
-                  </a:cubicBezTo>
-                  <a:cubicBezTo>
-                    <a:pt x="2430" y="2070"/>
-                    <a:pt x="2490" y="2010"/>
-                    <a:pt x="2490" y="1935"/>
-                  </a:cubicBezTo>
-                  <a:cubicBezTo>
-                    <a:pt x="2490" y="1860"/>
-                    <a:pt x="2430" y="1800"/>
-                    <a:pt x="2355" y="1800"/>
-                  </a:cubicBezTo>
-                  <a:cubicBezTo>
-                    <a:pt x="2280" y="1800"/>
-                    <a:pt x="2220" y="1860"/>
-                    <a:pt x="2220" y="1935"/>
+                    <a:pt x="5" y="137"/>
+                    <a:pt x="71" y="71"/>
+                    <a:pt x="153" y="71"/>
+                  </a:cubicBezTo>
+                  <a:cubicBezTo>
+                    <a:pt x="235" y="71"/>
+                    <a:pt x="301" y="137"/>
+                    <a:pt x="301" y="219"/>
+                  </a:cubicBezTo>
+                  <a:cubicBezTo>
+                    <a:pt x="301" y="301"/>
+                    <a:pt x="235" y="367"/>
+                    <a:pt x="153" y="367"/>
+                  </a:cubicBezTo>
+                  <a:cubicBezTo>
+                    <a:pt x="71" y="367"/>
+                    <a:pt x="5" y="301"/>
+                    <a:pt x="5" y="219"/>
                   </a:cubicBezTo>
                   <a:close/>
                 </a:path>
               </a:pathLst>
             </a:custGeom>
             <a:solidFill>
-              <a:srgbClr val="0F1114"/>
-            </a:solidFill>
-            <a:ln>
-              <a:noFill/>
-            </a:ln>
-          </p:spPr>
-        </p:sp>
-        <p:sp>
-          <p:nvSpPr>
-            <p:cNvPr id="48" name="m-mark-s0"/>
-            <p:cNvSpPr/>
-            <p:nvPr/>
-          </p:nvSpPr>
-          <p:spPr>
-            <a:xfrm>
-              <a:off x="0" y="0"/>
-              <a:ext cx="304800" cy="304800"/>
-            </a:xfrm>
-            <a:custGeom>
-              <a:avLst/>
-              <a:gdLst/>
-              <a:ahLst/>
-              <a:cxnLst/>
-              <a:rect l="0" t="0" r="r" b="b"/>
-              <a:pathLst>
-                <a:path w="4800" h="4800">
-                  <a:moveTo>
-                    <a:pt x="3795" y="2003"/>
-                  </a:moveTo>
-                  <a:cubicBezTo>
-                    <a:pt x="3840" y="2866"/>
-                    <a:pt x="3233" y="3626"/>
-                    <a:pt x="2381" y="3773"/>
-                  </a:cubicBezTo>
-                  <a:cubicBezTo>
-                    <a:pt x="1529" y="3919"/>
-                    <a:pt x="703" y="3405"/>
-                    <a:pt x="458" y="2577"/>
-                  </a:cubicBezTo>
-                  <a:cubicBezTo>
-                    <a:pt x="212" y="1748"/>
-                    <a:pt x="625" y="867"/>
-                    <a:pt x="1419" y="526"/>
-                  </a:cubicBezTo>
-                  <a:cubicBezTo>
-                    <a:pt x="2213" y="185"/>
-                    <a:pt x="3137" y="492"/>
-                    <a:pt x="3569" y="1240"/>
-                  </a:cubicBezTo>
-                </a:path>
-              </a:pathLst>
-            </a:custGeom>
-            <a:noFill/>
-            <a:ln w="31750" cap="rnd">
-              <a:solidFill>
-                <a:srgbClr val="F2F4F6"/>
-              </a:solidFill>
-              <a:round/>
-            </a:ln>
-          </p:spPr>
-        </p:sp>
-        <p:sp>
-          <p:nvSpPr>
-            <p:cNvPr id="49" name="m-mark-s1"/>
-            <p:cNvSpPr/>
-            <p:nvPr/>
-          </p:nvSpPr>
-          <p:spPr>
-            <a:xfrm>
-              <a:off x="0" y="0"/>
-              <a:ext cx="304800" cy="304800"/>
-            </a:xfrm>
-            <a:custGeom>
-              <a:avLst/>
-              <a:gdLst/>
-              <a:ahLst/>
-              <a:cxnLst/>
-              <a:rect l="0" t="0" r="r" b="b"/>
-              <a:pathLst>
-                <a:path w="4800" h="4800">
-                  <a:moveTo>
-                    <a:pt x="3334" y="2205"/>
-                  </a:moveTo>
-                  <a:lnTo>
-                    <a:pt x="3810" y="2205"/>
-                  </a:lnTo>
-                </a:path>
-              </a:pathLst>
-            </a:custGeom>
-            <a:noFill/>
-            <a:ln w="25400" cap="rnd">
-              <a:solidFill>
-                <a:srgbClr val="F2F4F6"/>
-              </a:solidFill>
-              <a:round/>
-            </a:ln>
-          </p:spPr>
-        </p:sp>
-        <p:sp>
-          <p:nvSpPr>
-            <p:cNvPr id="50" name="m-mark-s2"/>
-            <p:cNvSpPr/>
-            <p:nvPr/>
-          </p:nvSpPr>
-          <p:spPr>
-            <a:xfrm>
-              <a:off x="0" y="0"/>
-              <a:ext cx="304800" cy="304800"/>
-            </a:xfrm>
-            <a:custGeom>
-              <a:avLst/>
-              <a:gdLst/>
-              <a:ahLst/>
-              <a:cxnLst/>
-              <a:rect l="0" t="0" r="r" b="b"/>
-              <a:pathLst>
-                <a:path w="4800" h="4800">
-                  <a:moveTo>
-                    <a:pt x="3542" y="3548"/>
-                  </a:moveTo>
-                  <a:lnTo>
-                    <a:pt x="4334" y="4345"/>
-                  </a:lnTo>
-                </a:path>
-              </a:pathLst>
-            </a:custGeom>
-            <a:noFill/>
-            <a:ln w="38100" cap="rnd">
-              <a:solidFill>
-                <a:srgbClr val="F2F4F6"/>
-              </a:solidFill>
-              <a:round/>
+              <a:srgbClr val="FFFFFF"/>
+            </a:solidFill>
+            <a:ln>
+              <a:noFill/>
             </a:ln>
           </p:spPr>
         </p:sp>
       </p:grpSp>
       <p:sp>
         <p:nvSpPr>
-          <p:cNvPr id="52" name="to-kicker"/>
+          <p:cNvPr id="49" name="to-kicker"/>
           <p:cNvSpPr txBox="1"/>
           <p:nvPr/>
         </p:nvSpPr>
@@ -7568,7 +7294,7 @@
       </p:sp>
       <p:sp>
         <p:nvSpPr>
-          <p:cNvPr id="53" name="to-title"/>
+          <p:cNvPr id="50" name="to-title"/>
           <p:cNvSpPr>
             <a:spLocks noGrp="1"/>
           </p:cNvSpPr>
@@ -7632,7 +7358,7 @@
       </p:sp>
       <p:grpSp>
         <p:nvGrpSpPr>
-          <p:cNvPr id="60" name="to-shot"/>
+          <p:cNvPr id="57" name="to-shot"/>
           <p:cNvGrpSpPr/>
           <p:nvPr/>
         </p:nvGrpSpPr>
@@ -7646,7 +7372,7 @@
         </p:grpSpPr>
         <p:pic>
           <p:nvPicPr>
-            <p:cNvPr id="54" name="to-shot-base" descr="to-shot-base"/>
+            <p:cNvPr id="51" name="to-shot-base" descr="to-shot-base"/>
             <p:cNvPicPr>
               <a:picLocks noChangeAspect="1"/>
             </p:cNvPicPr>
@@ -7670,7 +7396,7 @@
         </p:pic>
         <p:sp>
           <p:nvSpPr>
-            <p:cNvPr id="55" name="to-shot-tl0"/>
+            <p:cNvPr id="52" name="to-shot-tl0"/>
             <p:cNvSpPr/>
             <p:nvPr/>
           </p:nvSpPr>
@@ -7692,7 +7418,7 @@
         </p:sp>
         <p:sp>
           <p:nvSpPr>
-            <p:cNvPr id="56" name="to-shot-tl1"/>
+            <p:cNvPr id="53" name="to-shot-tl1"/>
             <p:cNvSpPr/>
             <p:nvPr/>
           </p:nvSpPr>
@@ -7714,7 +7440,7 @@
         </p:sp>
         <p:sp>
           <p:nvSpPr>
-            <p:cNvPr id="57" name="to-shot-tl2"/>
+            <p:cNvPr id="54" name="to-shot-tl2"/>
             <p:cNvSpPr/>
             <p:nvPr/>
           </p:nvSpPr>
@@ -7736,7 +7462,7 @@
         </p:sp>
         <p:sp>
           <p:nvSpPr>
-            <p:cNvPr id="58" name="to-shot-win"/>
+            <p:cNvPr id="55" name="to-shot-win"/>
             <p:cNvSpPr/>
             <p:nvPr/>
           </p:nvSpPr>
@@ -7758,7 +7484,7 @@
         </p:sp>
         <p:pic>
           <p:nvPicPr>
-            <p:cNvPr id="59" name="to-shot-img" descr="to-shot-img"/>
+            <p:cNvPr id="56" name="to-shot-img" descr="to-shot-img"/>
             <p:cNvPicPr>
               <a:picLocks noChangeAspect="1"/>
             </p:cNvPicPr>
@@ -9009,7 +8735,7 @@
       </p:sp>
       <p:grpSp>
         <p:nvGrpSpPr>
-          <p:cNvPr id="51" name="m-mark"/>
+          <p:cNvPr id="48" name="m-mark"/>
           <p:cNvGrpSpPr/>
           <p:nvPr/>
         </p:nvGrpSpPr>
@@ -9023,14 +8749,14 @@
         </p:grpSpPr>
         <p:sp>
           <p:nvSpPr>
-            <p:cNvPr id="44" name="m-mark-c0"/>
+            <p:cNvPr id="44" name="m-mark-g"/>
             <p:cNvSpPr/>
             <p:nvPr/>
           </p:nvSpPr>
           <p:spPr>
             <a:xfrm>
               <a:off x="0" y="0"/>
-              <a:ext cx="304800" cy="304800"/>
+              <a:ext cx="273050" cy="266700"/>
             </a:xfrm>
             <a:custGeom>
               <a:avLst/>
@@ -9039,52 +8765,84 @@
               <a:cxnLst/>
               <a:rect l="0" t="0" r="r" b="b"/>
               <a:pathLst>
-                <a:path w="4800" h="4800">
+                <a:path w="4300" h="4200">
                   <a:moveTo>
-                    <a:pt x="611" y="2092"/>
+                    <a:pt x="3871" y="936"/>
                   </a:moveTo>
                   <a:cubicBezTo>
-                    <a:pt x="611" y="2910"/>
-                    <a:pt x="1274" y="3574"/>
-                    <a:pt x="2092" y="3574"/>
-                  </a:cubicBezTo>
-                  <a:cubicBezTo>
-                    <a:pt x="2911" y="3574"/>
-                    <a:pt x="3574" y="2910"/>
-                    <a:pt x="3574" y="2092"/>
-                  </a:cubicBezTo>
-                  <a:cubicBezTo>
-                    <a:pt x="3574" y="1274"/>
-                    <a:pt x="2911" y="610"/>
-                    <a:pt x="2093" y="610"/>
-                  </a:cubicBezTo>
-                  <a:cubicBezTo>
-                    <a:pt x="1274" y="610"/>
-                    <a:pt x="611" y="1274"/>
-                    <a:pt x="611" y="2092"/>
-                  </a:cubicBezTo>
+                    <a:pt x="3296" y="65"/>
+                    <a:pt x="2166" y="-246"/>
+                    <a:pt x="1227" y="208"/>
+                  </a:cubicBezTo>
+                  <a:cubicBezTo>
+                    <a:pt x="287" y="661"/>
+                    <a:pt x="-172" y="1740"/>
+                    <a:pt x="153" y="2731"/>
+                  </a:cubicBezTo>
+                  <a:cubicBezTo>
+                    <a:pt x="477" y="3723"/>
+                    <a:pt x="1485" y="4321"/>
+                    <a:pt x="2511" y="4132"/>
+                  </a:cubicBezTo>
+                  <a:cubicBezTo>
+                    <a:pt x="3537" y="3942"/>
+                    <a:pt x="4264" y="3023"/>
+                    <a:pt x="4213" y="1981"/>
+                  </a:cubicBezTo>
+                  <a:lnTo>
+                    <a:pt x="3151" y="1981"/>
+                  </a:lnTo>
+                  <a:lnTo>
+                    <a:pt x="3151" y="2439"/>
+                  </a:lnTo>
+                  <a:lnTo>
+                    <a:pt x="3671" y="2439"/>
+                  </a:lnTo>
+                  <a:cubicBezTo>
+                    <a:pt x="3502" y="3169"/>
+                    <a:pt x="2843" y="3680"/>
+                    <a:pt x="2093" y="3662"/>
+                  </a:cubicBezTo>
+                  <a:cubicBezTo>
+                    <a:pt x="1344" y="3643"/>
+                    <a:pt x="711" y="3100"/>
+                    <a:pt x="579" y="2362"/>
+                  </a:cubicBezTo>
+                  <a:cubicBezTo>
+                    <a:pt x="446" y="1624"/>
+                    <a:pt x="851" y="895"/>
+                    <a:pt x="1547" y="617"/>
+                  </a:cubicBezTo>
+                  <a:cubicBezTo>
+                    <a:pt x="2243" y="339"/>
+                    <a:pt x="3038" y="588"/>
+                    <a:pt x="3451" y="1214"/>
+                  </a:cubicBezTo>
+                  <a:lnTo>
+                    <a:pt x="3871" y="936"/>
+                  </a:lnTo>
                   <a:close/>
                 </a:path>
               </a:pathLst>
             </a:custGeom>
             <a:solidFill>
-              <a:srgbClr val="1B1E24"/>
-            </a:solidFill>
-            <a:ln>
-              <a:noFill/>
-            </a:ln>
-          </p:spPr>
-        </p:sp>
-        <p:sp>
-          <p:nvSpPr>
-            <p:cNvPr id="45" name="m-mark-c1"/>
-            <p:cNvSpPr/>
-            <p:nvPr/>
-          </p:nvSpPr>
-          <p:spPr>
-            <a:xfrm>
-              <a:off x="0" y="0"/>
-              <a:ext cx="304800" cy="304800"/>
+              <a:srgbClr val="FFFFFF"/>
+            </a:solidFill>
+            <a:ln>
+              <a:noFill/>
+            </a:ln>
+          </p:spPr>
+        </p:sp>
+        <p:sp>
+          <p:nvSpPr>
+            <p:cNvPr id="45" name="m-mark-handle"/>
+            <p:cNvSpPr/>
+            <p:nvPr/>
+          </p:nvSpPr>
+          <p:spPr>
+            <a:xfrm>
+              <a:off x="203200" y="203200"/>
+              <a:ext cx="101600" cy="101600"/>
             </a:xfrm>
             <a:custGeom>
               <a:avLst/>
@@ -9093,52 +8851,58 @@
               <a:cxnLst/>
               <a:rect l="0" t="0" r="r" b="b"/>
               <a:pathLst>
-                <a:path w="4800" h="4800">
+                <a:path w="1600" h="1600">
                   <a:moveTo>
-                    <a:pt x="1271" y="2115"/>
+                    <a:pt x="92" y="514"/>
                   </a:moveTo>
-                  <a:cubicBezTo>
-                    <a:pt x="1271" y="2589"/>
-                    <a:pt x="1656" y="2974"/>
-                    <a:pt x="2130" y="2974"/>
-                  </a:cubicBezTo>
-                  <a:cubicBezTo>
-                    <a:pt x="2604" y="2974"/>
-                    <a:pt x="2989" y="2589"/>
-                    <a:pt x="2989" y="2115"/>
-                  </a:cubicBezTo>
-                  <a:cubicBezTo>
-                    <a:pt x="2989" y="1641"/>
-                    <a:pt x="2604" y="1256"/>
-                    <a:pt x="2130" y="1256"/>
-                  </a:cubicBezTo>
-                  <a:cubicBezTo>
-                    <a:pt x="1656" y="1256"/>
-                    <a:pt x="1271" y="1641"/>
-                    <a:pt x="1271" y="2115"/>
+                  <a:lnTo>
+                    <a:pt x="949" y="1484"/>
+                  </a:lnTo>
+                  <a:cubicBezTo>
+                    <a:pt x="1075" y="1626"/>
+                    <a:pt x="1293" y="1640"/>
+                    <a:pt x="1435" y="1514"/>
+                  </a:cubicBezTo>
+                  <a:cubicBezTo>
+                    <a:pt x="1577" y="1388"/>
+                    <a:pt x="1591" y="1170"/>
+                    <a:pt x="1465" y="1028"/>
+                  </a:cubicBezTo>
+                  <a:lnTo>
+                    <a:pt x="607" y="58"/>
+                  </a:lnTo>
+                  <a:cubicBezTo>
+                    <a:pt x="480" y="-80"/>
+                    <a:pt x="266" y="-91"/>
+                    <a:pt x="126" y="34"/>
+                  </a:cubicBezTo>
+                  <a:cubicBezTo>
+                    <a:pt x="-14" y="158"/>
+                    <a:pt x="-29" y="371"/>
+                    <a:pt x="92" y="514"/>
                   </a:cubicBezTo>
                   <a:close/>
                 </a:path>
               </a:pathLst>
             </a:custGeom>
             <a:solidFill>
-              <a:srgbClr val="D3A32E"/>
-            </a:solidFill>
-            <a:ln>
-              <a:noFill/>
-            </a:ln>
-          </p:spPr>
-        </p:sp>
-        <p:sp>
-          <p:nvSpPr>
-            <p:cNvPr id="46" name="m-mark-c2"/>
-            <p:cNvSpPr/>
-            <p:nvPr/>
-          </p:nvSpPr>
-          <p:spPr>
-            <a:xfrm>
-              <a:off x="0" y="0"/>
-              <a:ext cx="304800" cy="304800"/>
+              <a:srgbClr val="FFFFFF"/>
+            </a:solidFill>
+            <a:ln>
+              <a:noFill/>
+            </a:ln>
+          </p:spPr>
+        </p:sp>
+        <p:sp>
+          <p:nvSpPr>
+            <p:cNvPr id="46" name="m-mark-iris"/>
+            <p:cNvSpPr/>
+            <p:nvPr/>
+          </p:nvSpPr>
+          <p:spPr>
+            <a:xfrm>
+              <a:off x="69850" y="76200"/>
+              <a:ext cx="127000" cy="120650"/>
             </a:xfrm>
             <a:custGeom>
               <a:avLst/>
@@ -9147,52 +8911,76 @@
               <a:cxnLst/>
               <a:rect l="0" t="0" r="r" b="b"/>
               <a:pathLst>
-                <a:path w="4800" h="4800">
+                <a:path w="2000" h="1900">
                   <a:moveTo>
-                    <a:pt x="1658" y="2134"/>
+                    <a:pt x="98" y="916"/>
                   </a:moveTo>
                   <a:cubicBezTo>
-                    <a:pt x="1658" y="2397"/>
-                    <a:pt x="1871" y="2610"/>
-                    <a:pt x="2134" y="2610"/>
-                  </a:cubicBezTo>
-                  <a:cubicBezTo>
-                    <a:pt x="2397" y="2610"/>
-                    <a:pt x="2610" y="2397"/>
-                    <a:pt x="2610" y="2134"/>
-                  </a:cubicBezTo>
-                  <a:cubicBezTo>
-                    <a:pt x="2610" y="1871"/>
-                    <a:pt x="2397" y="1658"/>
-                    <a:pt x="2134" y="1658"/>
-                  </a:cubicBezTo>
-                  <a:cubicBezTo>
-                    <a:pt x="1871" y="1658"/>
-                    <a:pt x="1658" y="1871"/>
-                    <a:pt x="1658" y="2134"/>
+                    <a:pt x="98" y="411"/>
+                    <a:pt x="508" y="1"/>
+                    <a:pt x="1013" y="1"/>
+                  </a:cubicBezTo>
+                  <a:cubicBezTo>
+                    <a:pt x="1518" y="1"/>
+                    <a:pt x="1928" y="411"/>
+                    <a:pt x="1928" y="916"/>
+                  </a:cubicBezTo>
+                  <a:cubicBezTo>
+                    <a:pt x="1928" y="1421"/>
+                    <a:pt x="1518" y="1831"/>
+                    <a:pt x="1013" y="1831"/>
+                  </a:cubicBezTo>
+                  <a:cubicBezTo>
+                    <a:pt x="508" y="1831"/>
+                    <a:pt x="98" y="1421"/>
+                    <a:pt x="98" y="916"/>
+                  </a:cubicBezTo>
+                  <a:close/>
+                  <a:moveTo>
+                    <a:pt x="504" y="916"/>
+                  </a:moveTo>
+                  <a:cubicBezTo>
+                    <a:pt x="516" y="1189"/>
+                    <a:pt x="741" y="1403"/>
+                    <a:pt x="1014" y="1403"/>
+                  </a:cubicBezTo>
+                  <a:cubicBezTo>
+                    <a:pt x="1286" y="1403"/>
+                    <a:pt x="1511" y="1189"/>
+                    <a:pt x="1523" y="916"/>
+                  </a:cubicBezTo>
+                  <a:cubicBezTo>
+                    <a:pt x="1511" y="643"/>
+                    <a:pt x="1286" y="429"/>
+                    <a:pt x="1014" y="429"/>
+                  </a:cubicBezTo>
+                  <a:cubicBezTo>
+                    <a:pt x="741" y="429"/>
+                    <a:pt x="516" y="643"/>
+                    <a:pt x="504" y="916"/>
                   </a:cubicBezTo>
                   <a:close/>
                 </a:path>
               </a:pathLst>
             </a:custGeom>
             <a:solidFill>
-              <a:srgbClr val="F2F4F6"/>
-            </a:solidFill>
-            <a:ln>
-              <a:noFill/>
-            </a:ln>
-          </p:spPr>
-        </p:sp>
-        <p:sp>
-          <p:nvSpPr>
-            <p:cNvPr id="47" name="m-mark-c3"/>
-            <p:cNvSpPr/>
-            <p:nvPr/>
-          </p:nvSpPr>
-          <p:spPr>
-            <a:xfrm>
-              <a:off x="0" y="0"/>
-              <a:ext cx="304800" cy="304800"/>
+              <a:srgbClr val="D3A32E"/>
+            </a:solidFill>
+            <a:ln>
+              <a:noFill/>
+            </a:ln>
+          </p:spPr>
+        </p:sp>
+        <p:sp>
+          <p:nvSpPr>
+            <p:cNvPr id="47" name="m-mark-highlight"/>
+            <p:cNvSpPr/>
+            <p:nvPr/>
+          </p:nvSpPr>
+          <p:spPr>
+            <a:xfrm>
+              <a:off x="139700" y="107950"/>
+              <a:ext cx="25400" cy="25400"/>
             </a:xfrm>
             <a:custGeom>
               <a:avLst/>
@@ -9201,174 +8989,46 @@
               <a:cxnLst/>
               <a:rect l="0" t="0" r="r" b="b"/>
               <a:pathLst>
-                <a:path w="4800" h="4800">
+                <a:path w="400" h="400">
                   <a:moveTo>
-                    <a:pt x="2220" y="1935"/>
+                    <a:pt x="5" y="219"/>
                   </a:moveTo>
                   <a:cubicBezTo>
-                    <a:pt x="2220" y="2010"/>
-                    <a:pt x="2280" y="2070"/>
-                    <a:pt x="2355" y="2070"/>
-                  </a:cubicBezTo>
-                  <a:cubicBezTo>
-                    <a:pt x="2430" y="2070"/>
-                    <a:pt x="2490" y="2010"/>
-                    <a:pt x="2490" y="1935"/>
-                  </a:cubicBezTo>
-                  <a:cubicBezTo>
-                    <a:pt x="2490" y="1860"/>
-                    <a:pt x="2430" y="1800"/>
-                    <a:pt x="2355" y="1800"/>
-                  </a:cubicBezTo>
-                  <a:cubicBezTo>
-                    <a:pt x="2280" y="1800"/>
-                    <a:pt x="2220" y="1860"/>
-                    <a:pt x="2220" y="1935"/>
+                    <a:pt x="5" y="137"/>
+                    <a:pt x="71" y="71"/>
+                    <a:pt x="153" y="71"/>
+                  </a:cubicBezTo>
+                  <a:cubicBezTo>
+                    <a:pt x="235" y="71"/>
+                    <a:pt x="301" y="137"/>
+                    <a:pt x="301" y="219"/>
+                  </a:cubicBezTo>
+                  <a:cubicBezTo>
+                    <a:pt x="301" y="301"/>
+                    <a:pt x="235" y="367"/>
+                    <a:pt x="153" y="367"/>
+                  </a:cubicBezTo>
+                  <a:cubicBezTo>
+                    <a:pt x="71" y="367"/>
+                    <a:pt x="5" y="301"/>
+                    <a:pt x="5" y="219"/>
                   </a:cubicBezTo>
                   <a:close/>
                 </a:path>
               </a:pathLst>
             </a:custGeom>
             <a:solidFill>
-              <a:srgbClr val="0F1114"/>
-            </a:solidFill>
-            <a:ln>
-              <a:noFill/>
-            </a:ln>
-          </p:spPr>
-        </p:sp>
-        <p:sp>
-          <p:nvSpPr>
-            <p:cNvPr id="48" name="m-mark-s0"/>
-            <p:cNvSpPr/>
-            <p:nvPr/>
-          </p:nvSpPr>
-          <p:spPr>
-            <a:xfrm>
-              <a:off x="0" y="0"/>
-              <a:ext cx="304800" cy="304800"/>
-            </a:xfrm>
-            <a:custGeom>
-              <a:avLst/>
-              <a:gdLst/>
-              <a:ahLst/>
-              <a:cxnLst/>
-              <a:rect l="0" t="0" r="r" b="b"/>
-              <a:pathLst>
-                <a:path w="4800" h="4800">
-                  <a:moveTo>
-                    <a:pt x="3795" y="2003"/>
-                  </a:moveTo>
-                  <a:cubicBezTo>
-                    <a:pt x="3840" y="2866"/>
-                    <a:pt x="3233" y="3626"/>
-                    <a:pt x="2381" y="3773"/>
-                  </a:cubicBezTo>
-                  <a:cubicBezTo>
-                    <a:pt x="1529" y="3919"/>
-                    <a:pt x="703" y="3405"/>
-                    <a:pt x="458" y="2577"/>
-                  </a:cubicBezTo>
-                  <a:cubicBezTo>
-                    <a:pt x="212" y="1748"/>
-                    <a:pt x="625" y="867"/>
-                    <a:pt x="1419" y="526"/>
-                  </a:cubicBezTo>
-                  <a:cubicBezTo>
-                    <a:pt x="2213" y="185"/>
-                    <a:pt x="3137" y="492"/>
-                    <a:pt x="3569" y="1240"/>
-                  </a:cubicBezTo>
-                </a:path>
-              </a:pathLst>
-            </a:custGeom>
-            <a:noFill/>
-            <a:ln w="31750" cap="rnd">
-              <a:solidFill>
-                <a:srgbClr val="F2F4F6"/>
-              </a:solidFill>
-              <a:round/>
-            </a:ln>
-          </p:spPr>
-        </p:sp>
-        <p:sp>
-          <p:nvSpPr>
-            <p:cNvPr id="49" name="m-mark-s1"/>
-            <p:cNvSpPr/>
-            <p:nvPr/>
-          </p:nvSpPr>
-          <p:spPr>
-            <a:xfrm>
-              <a:off x="0" y="0"/>
-              <a:ext cx="304800" cy="304800"/>
-            </a:xfrm>
-            <a:custGeom>
-              <a:avLst/>
-              <a:gdLst/>
-              <a:ahLst/>
-              <a:cxnLst/>
-              <a:rect l="0" t="0" r="r" b="b"/>
-              <a:pathLst>
-                <a:path w="4800" h="4800">
-                  <a:moveTo>
-                    <a:pt x="3334" y="2205"/>
-                  </a:moveTo>
-                  <a:lnTo>
-                    <a:pt x="3810" y="2205"/>
-                  </a:lnTo>
-                </a:path>
-              </a:pathLst>
-            </a:custGeom>
-            <a:noFill/>
-            <a:ln w="25400" cap="rnd">
-              <a:solidFill>
-                <a:srgbClr val="F2F4F6"/>
-              </a:solidFill>
-              <a:round/>
-            </a:ln>
-          </p:spPr>
-        </p:sp>
-        <p:sp>
-          <p:nvSpPr>
-            <p:cNvPr id="50" name="m-mark-s2"/>
-            <p:cNvSpPr/>
-            <p:nvPr/>
-          </p:nvSpPr>
-          <p:spPr>
-            <a:xfrm>
-              <a:off x="0" y="0"/>
-              <a:ext cx="304800" cy="304800"/>
-            </a:xfrm>
-            <a:custGeom>
-              <a:avLst/>
-              <a:gdLst/>
-              <a:ahLst/>
-              <a:cxnLst/>
-              <a:rect l="0" t="0" r="r" b="b"/>
-              <a:pathLst>
-                <a:path w="4800" h="4800">
-                  <a:moveTo>
-                    <a:pt x="3542" y="3548"/>
-                  </a:moveTo>
-                  <a:lnTo>
-                    <a:pt x="4334" y="4345"/>
-                  </a:lnTo>
-                </a:path>
-              </a:pathLst>
-            </a:custGeom>
-            <a:noFill/>
-            <a:ln w="38100" cap="rnd">
-              <a:solidFill>
-                <a:srgbClr val="F2F4F6"/>
-              </a:solidFill>
-              <a:round/>
+              <a:srgbClr val="FFFFFF"/>
+            </a:solidFill>
+            <a:ln>
+              <a:noFill/>
             </a:ln>
           </p:spPr>
         </p:sp>
       </p:grpSp>
       <p:sp>
         <p:nvSpPr>
-          <p:cNvPr id="52" name="ma-kicker"/>
+          <p:cNvPr id="49" name="ma-kicker"/>
           <p:cNvSpPr txBox="1"/>
           <p:nvPr/>
         </p:nvSpPr>
@@ -9411,7 +9071,7 @@
       </p:sp>
       <p:sp>
         <p:nvSpPr>
-          <p:cNvPr id="53" name="ma-title"/>
+          <p:cNvPr id="50" name="ma-title"/>
           <p:cNvSpPr>
             <a:spLocks noGrp="1"/>
           </p:cNvSpPr>
@@ -9475,7 +9135,7 @@
       </p:sp>
       <p:grpSp>
         <p:nvGrpSpPr>
-          <p:cNvPr id="60" name="ma-shot"/>
+          <p:cNvPr id="57" name="ma-shot"/>
           <p:cNvGrpSpPr/>
           <p:nvPr/>
         </p:nvGrpSpPr>
@@ -9489,7 +9149,7 @@
         </p:grpSpPr>
         <p:pic>
           <p:nvPicPr>
-            <p:cNvPr id="54" name="ma-shot-base" descr="ma-shot-base"/>
+            <p:cNvPr id="51" name="ma-shot-base" descr="ma-shot-base"/>
             <p:cNvPicPr>
               <a:picLocks noChangeAspect="1"/>
             </p:cNvPicPr>
@@ -9513,7 +9173,7 @@
         </p:pic>
         <p:sp>
           <p:nvSpPr>
-            <p:cNvPr id="55" name="ma-shot-tl0"/>
+            <p:cNvPr id="52" name="ma-shot-tl0"/>
             <p:cNvSpPr/>
             <p:nvPr/>
           </p:nvSpPr>
@@ -9535,7 +9195,7 @@
         </p:sp>
         <p:sp>
           <p:nvSpPr>
-            <p:cNvPr id="56" name="ma-shot-tl1"/>
+            <p:cNvPr id="53" name="ma-shot-tl1"/>
             <p:cNvSpPr/>
             <p:nvPr/>
           </p:nvSpPr>
@@ -9557,7 +9217,7 @@
         </p:sp>
         <p:sp>
           <p:nvSpPr>
-            <p:cNvPr id="57" name="ma-shot-tl2"/>
+            <p:cNvPr id="54" name="ma-shot-tl2"/>
             <p:cNvSpPr/>
             <p:nvPr/>
           </p:nvSpPr>
@@ -9579,7 +9239,7 @@
         </p:sp>
         <p:sp>
           <p:nvSpPr>
-            <p:cNvPr id="58" name="ma-shot-win"/>
+            <p:cNvPr id="55" name="ma-shot-win"/>
             <p:cNvSpPr/>
             <p:nvPr/>
           </p:nvSpPr>
@@ -9601,7 +9261,7 @@
         </p:sp>
         <p:pic>
           <p:nvPicPr>
-            <p:cNvPr id="59" name="ma-shot-img" descr="ma-shot-img"/>
+            <p:cNvPr id="56" name="ma-shot-img" descr="ma-shot-img"/>
             <p:cNvPicPr>
               <a:picLocks noChangeAspect="1"/>
             </p:cNvPicPr>
@@ -9626,7 +9286,7 @@
       </p:grpSp>
       <p:sp>
         <p:nvSpPr>
-          <p:cNvPr id="61" name="ma-dot0"/>
+          <p:cNvPr id="58" name="ma-dot0"/>
           <p:cNvSpPr/>
           <p:nvPr/>
         </p:nvSpPr>
@@ -9648,7 +9308,7 @@
       </p:sp>
       <p:sp>
         <p:nvSpPr>
-          <p:cNvPr id="62" name="ma-t0"/>
+          <p:cNvPr id="59" name="ma-t0"/>
           <p:cNvSpPr txBox="1"/>
           <p:nvPr/>
         </p:nvSpPr>
@@ -9691,7 +9351,7 @@
       </p:sp>
       <p:sp>
         <p:nvSpPr>
-          <p:cNvPr id="63" name="ma-d0"/>
+          <p:cNvPr id="60" name="ma-d0"/>
           <p:cNvSpPr txBox="1"/>
           <p:nvPr/>
         </p:nvSpPr>
@@ -9740,7 +9400,7 @@
       </p:sp>
       <p:sp>
         <p:nvSpPr>
-          <p:cNvPr id="64" name="ma-dot1"/>
+          <p:cNvPr id="61" name="ma-dot1"/>
           <p:cNvSpPr/>
           <p:nvPr/>
         </p:nvSpPr>
@@ -9762,7 +9422,7 @@
       </p:sp>
       <p:sp>
         <p:nvSpPr>
-          <p:cNvPr id="65" name="ma-t1"/>
+          <p:cNvPr id="62" name="ma-t1"/>
           <p:cNvSpPr txBox="1"/>
           <p:nvPr/>
         </p:nvSpPr>
@@ -9805,7 +9465,7 @@
       </p:sp>
       <p:sp>
         <p:nvSpPr>
-          <p:cNvPr id="66" name="ma-d1"/>
+          <p:cNvPr id="63" name="ma-d1"/>
           <p:cNvSpPr txBox="1"/>
           <p:nvPr/>
         </p:nvSpPr>
@@ -9854,7 +9514,7 @@
       </p:sp>
       <p:sp>
         <p:nvSpPr>
-          <p:cNvPr id="67" name="ma-dot2"/>
+          <p:cNvPr id="64" name="ma-dot2"/>
           <p:cNvSpPr/>
           <p:nvPr/>
         </p:nvSpPr>
@@ -9876,7 +9536,7 @@
       </p:sp>
       <p:sp>
         <p:nvSpPr>
-          <p:cNvPr id="68" name="ma-t2"/>
+          <p:cNvPr id="65" name="ma-t2"/>
           <p:cNvSpPr txBox="1"/>
           <p:nvPr/>
         </p:nvSpPr>
@@ -9919,7 +9579,7 @@
       </p:sp>
       <p:sp>
         <p:nvSpPr>
-          <p:cNvPr id="69" name="ma-d2"/>
+          <p:cNvPr id="66" name="ma-d2"/>
           <p:cNvSpPr txBox="1"/>
           <p:nvPr/>
         </p:nvSpPr>
@@ -11194,7 +10854,7 @@
       </p:sp>
       <p:grpSp>
         <p:nvGrpSpPr>
-          <p:cNvPr id="51" name="m-mark"/>
+          <p:cNvPr id="48" name="m-mark"/>
           <p:cNvGrpSpPr/>
           <p:nvPr/>
         </p:nvGrpSpPr>
@@ -11208,14 +10868,14 @@
         </p:grpSpPr>
         <p:sp>
           <p:nvSpPr>
-            <p:cNvPr id="44" name="m-mark-c0"/>
+            <p:cNvPr id="44" name="m-mark-g"/>
             <p:cNvSpPr/>
             <p:nvPr/>
           </p:nvSpPr>
           <p:spPr>
             <a:xfrm>
               <a:off x="0" y="0"/>
-              <a:ext cx="304800" cy="304800"/>
+              <a:ext cx="273050" cy="266700"/>
             </a:xfrm>
             <a:custGeom>
               <a:avLst/>
@@ -11224,52 +10884,84 @@
               <a:cxnLst/>
               <a:rect l="0" t="0" r="r" b="b"/>
               <a:pathLst>
-                <a:path w="4800" h="4800">
+                <a:path w="4300" h="4200">
                   <a:moveTo>
-                    <a:pt x="611" y="2092"/>
+                    <a:pt x="3871" y="936"/>
                   </a:moveTo>
                   <a:cubicBezTo>
-                    <a:pt x="611" y="2910"/>
-                    <a:pt x="1274" y="3574"/>
-                    <a:pt x="2092" y="3574"/>
-                  </a:cubicBezTo>
-                  <a:cubicBezTo>
-                    <a:pt x="2911" y="3574"/>
-                    <a:pt x="3574" y="2910"/>
-                    <a:pt x="3574" y="2092"/>
-                  </a:cubicBezTo>
-                  <a:cubicBezTo>
-                    <a:pt x="3574" y="1274"/>
-                    <a:pt x="2911" y="610"/>
-                    <a:pt x="2093" y="610"/>
-                  </a:cubicBezTo>
-                  <a:cubicBezTo>
-                    <a:pt x="1274" y="610"/>
-                    <a:pt x="611" y="1274"/>
-                    <a:pt x="611" y="2092"/>
-                  </a:cubicBezTo>
+                    <a:pt x="3296" y="65"/>
+                    <a:pt x="2166" y="-246"/>
+                    <a:pt x="1227" y="208"/>
+                  </a:cubicBezTo>
+                  <a:cubicBezTo>
+                    <a:pt x="287" y="661"/>
+                    <a:pt x="-172" y="1740"/>
+                    <a:pt x="153" y="2731"/>
+                  </a:cubicBezTo>
+                  <a:cubicBezTo>
+                    <a:pt x="477" y="3723"/>
+                    <a:pt x="1485" y="4321"/>
+                    <a:pt x="2511" y="4132"/>
+                  </a:cubicBezTo>
+                  <a:cubicBezTo>
+                    <a:pt x="3537" y="3942"/>
+                    <a:pt x="4264" y="3023"/>
+                    <a:pt x="4213" y="1981"/>
+                  </a:cubicBezTo>
+                  <a:lnTo>
+                    <a:pt x="3151" y="1981"/>
+                  </a:lnTo>
+                  <a:lnTo>
+                    <a:pt x="3151" y="2439"/>
+                  </a:lnTo>
+                  <a:lnTo>
+                    <a:pt x="3671" y="2439"/>
+                  </a:lnTo>
+                  <a:cubicBezTo>
+                    <a:pt x="3502" y="3169"/>
+                    <a:pt x="2843" y="3680"/>
+                    <a:pt x="2093" y="3662"/>
+                  </a:cubicBezTo>
+                  <a:cubicBezTo>
+                    <a:pt x="1344" y="3643"/>
+                    <a:pt x="711" y="3100"/>
+                    <a:pt x="579" y="2362"/>
+                  </a:cubicBezTo>
+                  <a:cubicBezTo>
+                    <a:pt x="446" y="1624"/>
+                    <a:pt x="851" y="895"/>
+                    <a:pt x="1547" y="617"/>
+                  </a:cubicBezTo>
+                  <a:cubicBezTo>
+                    <a:pt x="2243" y="339"/>
+                    <a:pt x="3038" y="588"/>
+                    <a:pt x="3451" y="1214"/>
+                  </a:cubicBezTo>
+                  <a:lnTo>
+                    <a:pt x="3871" y="936"/>
+                  </a:lnTo>
                   <a:close/>
                 </a:path>
               </a:pathLst>
             </a:custGeom>
             <a:solidFill>
-              <a:srgbClr val="1B1E24"/>
-            </a:solidFill>
-            <a:ln>
-              <a:noFill/>
-            </a:ln>
-          </p:spPr>
-        </p:sp>
-        <p:sp>
-          <p:nvSpPr>
-            <p:cNvPr id="45" name="m-mark-c1"/>
-            <p:cNvSpPr/>
-            <p:nvPr/>
-          </p:nvSpPr>
-          <p:spPr>
-            <a:xfrm>
-              <a:off x="0" y="0"/>
-              <a:ext cx="304800" cy="304800"/>
+              <a:srgbClr val="FFFFFF"/>
+            </a:solidFill>
+            <a:ln>
+              <a:noFill/>
+            </a:ln>
+          </p:spPr>
+        </p:sp>
+        <p:sp>
+          <p:nvSpPr>
+            <p:cNvPr id="45" name="m-mark-handle"/>
+            <p:cNvSpPr/>
+            <p:nvPr/>
+          </p:nvSpPr>
+          <p:spPr>
+            <a:xfrm>
+              <a:off x="203200" y="203200"/>
+              <a:ext cx="101600" cy="101600"/>
             </a:xfrm>
             <a:custGeom>
               <a:avLst/>
@@ -11278,52 +10970,58 @@
               <a:cxnLst/>
               <a:rect l="0" t="0" r="r" b="b"/>
               <a:pathLst>
-                <a:path w="4800" h="4800">
+                <a:path w="1600" h="1600">
                   <a:moveTo>
-                    <a:pt x="1271" y="2115"/>
+                    <a:pt x="92" y="514"/>
                   </a:moveTo>
-                  <a:cubicBezTo>
-                    <a:pt x="1271" y="2589"/>
-                    <a:pt x="1656" y="2974"/>
-                    <a:pt x="2130" y="2974"/>
-                  </a:cubicBezTo>
-                  <a:cubicBezTo>
-                    <a:pt x="2604" y="2974"/>
-                    <a:pt x="2989" y="2589"/>
-                    <a:pt x="2989" y="2115"/>
-                  </a:cubicBezTo>
-                  <a:cubicBezTo>
-                    <a:pt x="2989" y="1641"/>
-                    <a:pt x="2604" y="1256"/>
-                    <a:pt x="2130" y="1256"/>
-                  </a:cubicBezTo>
-                  <a:cubicBezTo>
-                    <a:pt x="1656" y="1256"/>
-                    <a:pt x="1271" y="1641"/>
-                    <a:pt x="1271" y="2115"/>
+                  <a:lnTo>
+                    <a:pt x="949" y="1484"/>
+                  </a:lnTo>
+                  <a:cubicBezTo>
+                    <a:pt x="1075" y="1626"/>
+                    <a:pt x="1293" y="1640"/>
+                    <a:pt x="1435" y="1514"/>
+                  </a:cubicBezTo>
+                  <a:cubicBezTo>
+                    <a:pt x="1577" y="1388"/>
+                    <a:pt x="1591" y="1170"/>
+                    <a:pt x="1465" y="1028"/>
+                  </a:cubicBezTo>
+                  <a:lnTo>
+                    <a:pt x="607" y="58"/>
+                  </a:lnTo>
+                  <a:cubicBezTo>
+                    <a:pt x="480" y="-80"/>
+                    <a:pt x="266" y="-91"/>
+                    <a:pt x="126" y="34"/>
+                  </a:cubicBezTo>
+                  <a:cubicBezTo>
+                    <a:pt x="-14" y="158"/>
+                    <a:pt x="-29" y="371"/>
+                    <a:pt x="92" y="514"/>
                   </a:cubicBezTo>
                   <a:close/>
                 </a:path>
               </a:pathLst>
             </a:custGeom>
             <a:solidFill>
-              <a:srgbClr val="D3A32E"/>
-            </a:solidFill>
-            <a:ln>
-              <a:noFill/>
-            </a:ln>
-          </p:spPr>
-        </p:sp>
-        <p:sp>
-          <p:nvSpPr>
-            <p:cNvPr id="46" name="m-mark-c2"/>
-            <p:cNvSpPr/>
-            <p:nvPr/>
-          </p:nvSpPr>
-          <p:spPr>
-            <a:xfrm>
-              <a:off x="0" y="0"/>
-              <a:ext cx="304800" cy="304800"/>
+              <a:srgbClr val="FFFFFF"/>
+            </a:solidFill>
+            <a:ln>
+              <a:noFill/>
+            </a:ln>
+          </p:spPr>
+        </p:sp>
+        <p:sp>
+          <p:nvSpPr>
+            <p:cNvPr id="46" name="m-mark-iris"/>
+            <p:cNvSpPr/>
+            <p:nvPr/>
+          </p:nvSpPr>
+          <p:spPr>
+            <a:xfrm>
+              <a:off x="69850" y="76200"/>
+              <a:ext cx="127000" cy="120650"/>
             </a:xfrm>
             <a:custGeom>
               <a:avLst/>
@@ -11332,52 +11030,76 @@
               <a:cxnLst/>
               <a:rect l="0" t="0" r="r" b="b"/>
               <a:pathLst>
-                <a:path w="4800" h="4800">
+                <a:path w="2000" h="1900">
                   <a:moveTo>
-                    <a:pt x="1658" y="2134"/>
+                    <a:pt x="98" y="916"/>
                   </a:moveTo>
                   <a:cubicBezTo>
-                    <a:pt x="1658" y="2397"/>
-                    <a:pt x="1871" y="2610"/>
-                    <a:pt x="2134" y="2610"/>
-                  </a:cubicBezTo>
-                  <a:cubicBezTo>
-                    <a:pt x="2397" y="2610"/>
-                    <a:pt x="2610" y="2397"/>
-                    <a:pt x="2610" y="2134"/>
-                  </a:cubicBezTo>
-                  <a:cubicBezTo>
-                    <a:pt x="2610" y="1871"/>
-                    <a:pt x="2397" y="1658"/>
-                    <a:pt x="2134" y="1658"/>
-                  </a:cubicBezTo>
-                  <a:cubicBezTo>
-                    <a:pt x="1871" y="1658"/>
-                    <a:pt x="1658" y="1871"/>
-                    <a:pt x="1658" y="2134"/>
+                    <a:pt x="98" y="411"/>
+                    <a:pt x="508" y="1"/>
+                    <a:pt x="1013" y="1"/>
+                  </a:cubicBezTo>
+                  <a:cubicBezTo>
+                    <a:pt x="1518" y="1"/>
+                    <a:pt x="1928" y="411"/>
+                    <a:pt x="1928" y="916"/>
+                  </a:cubicBezTo>
+                  <a:cubicBezTo>
+                    <a:pt x="1928" y="1421"/>
+                    <a:pt x="1518" y="1831"/>
+                    <a:pt x="1013" y="1831"/>
+                  </a:cubicBezTo>
+                  <a:cubicBezTo>
+                    <a:pt x="508" y="1831"/>
+                    <a:pt x="98" y="1421"/>
+                    <a:pt x="98" y="916"/>
+                  </a:cubicBezTo>
+                  <a:close/>
+                  <a:moveTo>
+                    <a:pt x="504" y="916"/>
+                  </a:moveTo>
+                  <a:cubicBezTo>
+                    <a:pt x="516" y="1189"/>
+                    <a:pt x="741" y="1403"/>
+                    <a:pt x="1014" y="1403"/>
+                  </a:cubicBezTo>
+                  <a:cubicBezTo>
+                    <a:pt x="1286" y="1403"/>
+                    <a:pt x="1511" y="1189"/>
+                    <a:pt x="1523" y="916"/>
+                  </a:cubicBezTo>
+                  <a:cubicBezTo>
+                    <a:pt x="1511" y="643"/>
+                    <a:pt x="1286" y="429"/>
+                    <a:pt x="1014" y="429"/>
+                  </a:cubicBezTo>
+                  <a:cubicBezTo>
+                    <a:pt x="741" y="429"/>
+                    <a:pt x="516" y="643"/>
+                    <a:pt x="504" y="916"/>
                   </a:cubicBezTo>
                   <a:close/>
                 </a:path>
               </a:pathLst>
             </a:custGeom>
             <a:solidFill>
-              <a:srgbClr val="F2F4F6"/>
-            </a:solidFill>
-            <a:ln>
-              <a:noFill/>
-            </a:ln>
-          </p:spPr>
-        </p:sp>
-        <p:sp>
-          <p:nvSpPr>
-            <p:cNvPr id="47" name="m-mark-c3"/>
-            <p:cNvSpPr/>
-            <p:nvPr/>
-          </p:nvSpPr>
-          <p:spPr>
-            <a:xfrm>
-              <a:off x="0" y="0"/>
-              <a:ext cx="304800" cy="304800"/>
+              <a:srgbClr val="D3A32E"/>
+            </a:solidFill>
+            <a:ln>
+              <a:noFill/>
+            </a:ln>
+          </p:spPr>
+        </p:sp>
+        <p:sp>
+          <p:nvSpPr>
+            <p:cNvPr id="47" name="m-mark-highlight"/>
+            <p:cNvSpPr/>
+            <p:nvPr/>
+          </p:nvSpPr>
+          <p:spPr>
+            <a:xfrm>
+              <a:off x="139700" y="107950"/>
+              <a:ext cx="25400" cy="25400"/>
             </a:xfrm>
             <a:custGeom>
               <a:avLst/>
@@ -11386,174 +11108,46 @@
               <a:cxnLst/>
               <a:rect l="0" t="0" r="r" b="b"/>
               <a:pathLst>
-                <a:path w="4800" h="4800">
+                <a:path w="400" h="400">
                   <a:moveTo>
-                    <a:pt x="2220" y="1935"/>
+                    <a:pt x="5" y="219"/>
                   </a:moveTo>
                   <a:cubicBezTo>
-                    <a:pt x="2220" y="2010"/>
-                    <a:pt x="2280" y="2070"/>
-                    <a:pt x="2355" y="2070"/>
-                  </a:cubicBezTo>
-                  <a:cubicBezTo>
-                    <a:pt x="2430" y="2070"/>
-                    <a:pt x="2490" y="2010"/>
-                    <a:pt x="2490" y="1935"/>
-                  </a:cubicBezTo>
-                  <a:cubicBezTo>
-                    <a:pt x="2490" y="1860"/>
-                    <a:pt x="2430" y="1800"/>
-                    <a:pt x="2355" y="1800"/>
-                  </a:cubicBezTo>
-                  <a:cubicBezTo>
-                    <a:pt x="2280" y="1800"/>
-                    <a:pt x="2220" y="1860"/>
-                    <a:pt x="2220" y="1935"/>
+                    <a:pt x="5" y="137"/>
+                    <a:pt x="71" y="71"/>
+                    <a:pt x="153" y="71"/>
+                  </a:cubicBezTo>
+                  <a:cubicBezTo>
+                    <a:pt x="235" y="71"/>
+                    <a:pt x="301" y="137"/>
+                    <a:pt x="301" y="219"/>
+                  </a:cubicBezTo>
+                  <a:cubicBezTo>
+                    <a:pt x="301" y="301"/>
+                    <a:pt x="235" y="367"/>
+                    <a:pt x="153" y="367"/>
+                  </a:cubicBezTo>
+                  <a:cubicBezTo>
+                    <a:pt x="71" y="367"/>
+                    <a:pt x="5" y="301"/>
+                    <a:pt x="5" y="219"/>
                   </a:cubicBezTo>
                   <a:close/>
                 </a:path>
               </a:pathLst>
             </a:custGeom>
             <a:solidFill>
-              <a:srgbClr val="0F1114"/>
-            </a:solidFill>
-            <a:ln>
-              <a:noFill/>
-            </a:ln>
-          </p:spPr>
-        </p:sp>
-        <p:sp>
-          <p:nvSpPr>
-            <p:cNvPr id="48" name="m-mark-s0"/>
-            <p:cNvSpPr/>
-            <p:nvPr/>
-          </p:nvSpPr>
-          <p:spPr>
-            <a:xfrm>
-              <a:off x="0" y="0"/>
-              <a:ext cx="304800" cy="304800"/>
-            </a:xfrm>
-            <a:custGeom>
-              <a:avLst/>
-              <a:gdLst/>
-              <a:ahLst/>
-              <a:cxnLst/>
-              <a:rect l="0" t="0" r="r" b="b"/>
-              <a:pathLst>
-                <a:path w="4800" h="4800">
-                  <a:moveTo>
-                    <a:pt x="3795" y="2003"/>
-                  </a:moveTo>
-                  <a:cubicBezTo>
-                    <a:pt x="3840" y="2866"/>
-                    <a:pt x="3233" y="3626"/>
-                    <a:pt x="2381" y="3773"/>
-                  </a:cubicBezTo>
-                  <a:cubicBezTo>
-                    <a:pt x="1529" y="3919"/>
-                    <a:pt x="703" y="3405"/>
-                    <a:pt x="458" y="2577"/>
-                  </a:cubicBezTo>
-                  <a:cubicBezTo>
-                    <a:pt x="212" y="1748"/>
-                    <a:pt x="625" y="867"/>
-                    <a:pt x="1419" y="526"/>
-                  </a:cubicBezTo>
-                  <a:cubicBezTo>
-                    <a:pt x="2213" y="185"/>
-                    <a:pt x="3137" y="492"/>
-                    <a:pt x="3569" y="1240"/>
-                  </a:cubicBezTo>
-                </a:path>
-              </a:pathLst>
-            </a:custGeom>
-            <a:noFill/>
-            <a:ln w="31750" cap="rnd">
-              <a:solidFill>
-                <a:srgbClr val="F2F4F6"/>
-              </a:solidFill>
-              <a:round/>
-            </a:ln>
-          </p:spPr>
-        </p:sp>
-        <p:sp>
-          <p:nvSpPr>
-            <p:cNvPr id="49" name="m-mark-s1"/>
-            <p:cNvSpPr/>
-            <p:nvPr/>
-          </p:nvSpPr>
-          <p:spPr>
-            <a:xfrm>
-              <a:off x="0" y="0"/>
-              <a:ext cx="304800" cy="304800"/>
-            </a:xfrm>
-            <a:custGeom>
-              <a:avLst/>
-              <a:gdLst/>
-              <a:ahLst/>
-              <a:cxnLst/>
-              <a:rect l="0" t="0" r="r" b="b"/>
-              <a:pathLst>
-                <a:path w="4800" h="4800">
-                  <a:moveTo>
-                    <a:pt x="3334" y="2205"/>
-                  </a:moveTo>
-                  <a:lnTo>
-                    <a:pt x="3810" y="2205"/>
-                  </a:lnTo>
-                </a:path>
-              </a:pathLst>
-            </a:custGeom>
-            <a:noFill/>
-            <a:ln w="25400" cap="rnd">
-              <a:solidFill>
-                <a:srgbClr val="F2F4F6"/>
-              </a:solidFill>
-              <a:round/>
-            </a:ln>
-          </p:spPr>
-        </p:sp>
-        <p:sp>
-          <p:nvSpPr>
-            <p:cNvPr id="50" name="m-mark-s2"/>
-            <p:cNvSpPr/>
-            <p:nvPr/>
-          </p:nvSpPr>
-          <p:spPr>
-            <a:xfrm>
-              <a:off x="0" y="0"/>
-              <a:ext cx="304800" cy="304800"/>
-            </a:xfrm>
-            <a:custGeom>
-              <a:avLst/>
-              <a:gdLst/>
-              <a:ahLst/>
-              <a:cxnLst/>
-              <a:rect l="0" t="0" r="r" b="b"/>
-              <a:pathLst>
-                <a:path w="4800" h="4800">
-                  <a:moveTo>
-                    <a:pt x="3542" y="3548"/>
-                  </a:moveTo>
-                  <a:lnTo>
-                    <a:pt x="4334" y="4345"/>
-                  </a:lnTo>
-                </a:path>
-              </a:pathLst>
-            </a:custGeom>
-            <a:noFill/>
-            <a:ln w="38100" cap="rnd">
-              <a:solidFill>
-                <a:srgbClr val="F2F4F6"/>
-              </a:solidFill>
-              <a:round/>
+              <a:srgbClr val="FFFFFF"/>
+            </a:solidFill>
+            <a:ln>
+              <a:noFill/>
             </a:ln>
           </p:spPr>
         </p:sp>
       </p:grpSp>
       <p:sp>
         <p:nvSpPr>
-          <p:cNvPr id="52" name="fe-kicker"/>
+          <p:cNvPr id="49" name="fe-kicker"/>
           <p:cNvSpPr txBox="1"/>
           <p:nvPr/>
         </p:nvSpPr>
@@ -11596,7 +11190,7 @@
       </p:sp>
       <p:sp>
         <p:nvSpPr>
-          <p:cNvPr id="53" name="fe-title"/>
+          <p:cNvPr id="50" name="fe-title"/>
           <p:cNvSpPr>
             <a:spLocks noGrp="1"/>
           </p:cNvSpPr>
@@ -11675,7 +11269,7 @@
       </p:sp>
       <p:sp>
         <p:nvSpPr>
-          <p:cNvPr id="54" name="fe-card0"/>
+          <p:cNvPr id="51" name="fe-card0"/>
           <p:cNvSpPr/>
           <p:nvPr/>
         </p:nvSpPr>
@@ -11703,7 +11297,7 @@
       </p:sp>
       <p:sp>
         <p:nvSpPr>
-          <p:cNvPr id="55" name="fe-dot0"/>
+          <p:cNvPr id="52" name="fe-dot0"/>
           <p:cNvSpPr/>
           <p:nvPr/>
         </p:nvSpPr>
@@ -11725,7 +11319,7 @@
       </p:sp>
       <p:sp>
         <p:nvSpPr>
-          <p:cNvPr id="56" name="fe-t0"/>
+          <p:cNvPr id="53" name="fe-t0"/>
           <p:cNvSpPr txBox="1"/>
           <p:nvPr/>
         </p:nvSpPr>
@@ -11768,7 +11362,7 @@
       </p:sp>
       <p:sp>
         <p:nvSpPr>
-          <p:cNvPr id="57" name="fe-d0"/>
+          <p:cNvPr id="54" name="fe-d0"/>
           <p:cNvSpPr txBox="1"/>
           <p:nvPr/>
         </p:nvSpPr>
@@ -11817,7 +11411,7 @@
       </p:sp>
       <p:sp>
         <p:nvSpPr>
-          <p:cNvPr id="58" name="fe-card1"/>
+          <p:cNvPr id="55" name="fe-card1"/>
           <p:cNvSpPr/>
           <p:nvPr/>
         </p:nvSpPr>
@@ -11845,7 +11439,7 @@
       </p:sp>
       <p:sp>
         <p:nvSpPr>
-          <p:cNvPr id="59" name="fe-dot1"/>
+          <p:cNvPr id="56" name="fe-dot1"/>
           <p:cNvSpPr/>
           <p:nvPr/>
         </p:nvSpPr>
@@ -11867,7 +11461,7 @@
       </p:sp>
       <p:sp>
         <p:nvSpPr>
-          <p:cNvPr id="60" name="fe-t1"/>
+          <p:cNvPr id="57" name="fe-t1"/>
           <p:cNvSpPr txBox="1"/>
           <p:nvPr/>
         </p:nvSpPr>
@@ -11910,7 +11504,7 @@
       </p:sp>
       <p:sp>
         <p:nvSpPr>
-          <p:cNvPr id="61" name="fe-d1"/>
+          <p:cNvPr id="58" name="fe-d1"/>
           <p:cNvSpPr txBox="1"/>
           <p:nvPr/>
         </p:nvSpPr>
@@ -11959,7 +11553,7 @@
       </p:sp>
       <p:sp>
         <p:nvSpPr>
-          <p:cNvPr id="62" name="fe-card2"/>
+          <p:cNvPr id="59" name="fe-card2"/>
           <p:cNvSpPr/>
           <p:nvPr/>
         </p:nvSpPr>
@@ -11987,7 +11581,7 @@
       </p:sp>
       <p:sp>
         <p:nvSpPr>
-          <p:cNvPr id="63" name="fe-dot2"/>
+          <p:cNvPr id="60" name="fe-dot2"/>
           <p:cNvSpPr/>
           <p:nvPr/>
         </p:nvSpPr>
@@ -12009,7 +11603,7 @@
       </p:sp>
       <p:sp>
         <p:nvSpPr>
-          <p:cNvPr id="64" name="fe-t2"/>
+          <p:cNvPr id="61" name="fe-t2"/>
           <p:cNvSpPr txBox="1"/>
           <p:nvPr/>
         </p:nvSpPr>
@@ -12052,7 +11646,7 @@
       </p:sp>
       <p:sp>
         <p:nvSpPr>
-          <p:cNvPr id="65" name="fe-d2"/>
+          <p:cNvPr id="62" name="fe-d2"/>
           <p:cNvSpPr txBox="1"/>
           <p:nvPr/>
         </p:nvSpPr>
@@ -12101,7 +11695,7 @@
       </p:sp>
       <p:sp>
         <p:nvSpPr>
-          <p:cNvPr id="66" name="fe-card3"/>
+          <p:cNvPr id="63" name="fe-card3"/>
           <p:cNvSpPr/>
           <p:nvPr/>
         </p:nvSpPr>
@@ -12129,7 +11723,7 @@
       </p:sp>
       <p:sp>
         <p:nvSpPr>
-          <p:cNvPr id="67" name="fe-dot3"/>
+          <p:cNvPr id="64" name="fe-dot3"/>
           <p:cNvSpPr/>
           <p:nvPr/>
         </p:nvSpPr>
@@ -12151,7 +11745,7 @@
       </p:sp>
       <p:sp>
         <p:nvSpPr>
-          <p:cNvPr id="68" name="fe-t3"/>
+          <p:cNvPr id="65" name="fe-t3"/>
           <p:cNvSpPr txBox="1"/>
           <p:nvPr/>
         </p:nvSpPr>
@@ -12194,7 +11788,7 @@
       </p:sp>
       <p:sp>
         <p:nvSpPr>
-          <p:cNvPr id="69" name="fe-d3"/>
+          <p:cNvPr id="66" name="fe-d3"/>
           <p:cNvSpPr txBox="1"/>
           <p:nvPr/>
         </p:nvSpPr>
@@ -12243,7 +11837,7 @@
       </p:sp>
       <p:sp>
         <p:nvSpPr>
-          <p:cNvPr id="70" name="fe-card4"/>
+          <p:cNvPr id="67" name="fe-card4"/>
           <p:cNvSpPr/>
           <p:nvPr/>
         </p:nvSpPr>
@@ -12271,7 +11865,7 @@
       </p:sp>
       <p:sp>
         <p:nvSpPr>
-          <p:cNvPr id="71" name="fe-dot4"/>
+          <p:cNvPr id="68" name="fe-dot4"/>
           <p:cNvSpPr/>
           <p:nvPr/>
         </p:nvSpPr>
@@ -12293,7 +11887,7 @@
       </p:sp>
       <p:sp>
         <p:nvSpPr>
-          <p:cNvPr id="72" name="fe-t4"/>
+          <p:cNvPr id="69" name="fe-t4"/>
           <p:cNvSpPr txBox="1"/>
           <p:nvPr/>
         </p:nvSpPr>
@@ -12336,7 +11930,7 @@
       </p:sp>
       <p:sp>
         <p:nvSpPr>
-          <p:cNvPr id="73" name="fe-d4"/>
+          <p:cNvPr id="70" name="fe-d4"/>
           <p:cNvSpPr txBox="1"/>
           <p:nvPr/>
         </p:nvSpPr>
@@ -12385,7 +11979,7 @@
       </p:sp>
       <p:sp>
         <p:nvSpPr>
-          <p:cNvPr id="74" name="fe-card5"/>
+          <p:cNvPr id="71" name="fe-card5"/>
           <p:cNvSpPr/>
           <p:nvPr/>
         </p:nvSpPr>
@@ -12413,7 +12007,7 @@
       </p:sp>
       <p:sp>
         <p:nvSpPr>
-          <p:cNvPr id="75" name="fe-dot5"/>
+          <p:cNvPr id="72" name="fe-dot5"/>
           <p:cNvSpPr/>
           <p:nvPr/>
         </p:nvSpPr>
@@ -12435,7 +12029,7 @@
       </p:sp>
       <p:sp>
         <p:nvSpPr>
-          <p:cNvPr id="76" name="fe-t5"/>
+          <p:cNvPr id="73" name="fe-t5"/>
           <p:cNvSpPr txBox="1"/>
           <p:nvPr/>
         </p:nvSpPr>
@@ -12478,7 +12072,7 @@
       </p:sp>
       <p:sp>
         <p:nvSpPr>
-          <p:cNvPr id="77" name="fe-d5"/>
+          <p:cNvPr id="74" name="fe-d5"/>
           <p:cNvSpPr txBox="1"/>
           <p:nvPr/>
         </p:nvSpPr>
@@ -13753,7 +13347,7 @@
       </p:sp>
       <p:grpSp>
         <p:nvGrpSpPr>
-          <p:cNvPr id="51" name="m-mark"/>
+          <p:cNvPr id="48" name="m-mark"/>
           <p:cNvGrpSpPr/>
           <p:nvPr/>
         </p:nvGrpSpPr>
@@ -13767,14 +13361,14 @@
         </p:grpSpPr>
         <p:sp>
           <p:nvSpPr>
-            <p:cNvPr id="44" name="m-mark-c0"/>
+            <p:cNvPr id="44" name="m-mark-g"/>
             <p:cNvSpPr/>
             <p:nvPr/>
           </p:nvSpPr>
           <p:spPr>
             <a:xfrm>
               <a:off x="0" y="0"/>
-              <a:ext cx="304800" cy="304800"/>
+              <a:ext cx="273050" cy="266700"/>
             </a:xfrm>
             <a:custGeom>
               <a:avLst/>
@@ -13783,52 +13377,84 @@
               <a:cxnLst/>
               <a:rect l="0" t="0" r="r" b="b"/>
               <a:pathLst>
-                <a:path w="4800" h="4800">
+                <a:path w="4300" h="4200">
                   <a:moveTo>
-                    <a:pt x="611" y="2092"/>
+                    <a:pt x="3871" y="936"/>
                   </a:moveTo>
                   <a:cubicBezTo>
-                    <a:pt x="611" y="2910"/>
-                    <a:pt x="1274" y="3574"/>
-                    <a:pt x="2092" y="3574"/>
-                  </a:cubicBezTo>
-                  <a:cubicBezTo>
-                    <a:pt x="2911" y="3574"/>
-                    <a:pt x="3574" y="2910"/>
-                    <a:pt x="3574" y="2092"/>
-                  </a:cubicBezTo>
-                  <a:cubicBezTo>
-                    <a:pt x="3574" y="1274"/>
-                    <a:pt x="2911" y="610"/>
-                    <a:pt x="2093" y="610"/>
-                  </a:cubicBezTo>
-                  <a:cubicBezTo>
-                    <a:pt x="1274" y="610"/>
-                    <a:pt x="611" y="1274"/>
-                    <a:pt x="611" y="2092"/>
-                  </a:cubicBezTo>
+                    <a:pt x="3296" y="65"/>
+                    <a:pt x="2166" y="-246"/>
+                    <a:pt x="1227" y="208"/>
+                  </a:cubicBezTo>
+                  <a:cubicBezTo>
+                    <a:pt x="287" y="661"/>
+                    <a:pt x="-172" y="1740"/>
+                    <a:pt x="153" y="2731"/>
+                  </a:cubicBezTo>
+                  <a:cubicBezTo>
+                    <a:pt x="477" y="3723"/>
+                    <a:pt x="1485" y="4321"/>
+                    <a:pt x="2511" y="4132"/>
+                  </a:cubicBezTo>
+                  <a:cubicBezTo>
+                    <a:pt x="3537" y="3942"/>
+                    <a:pt x="4264" y="3023"/>
+                    <a:pt x="4213" y="1981"/>
+                  </a:cubicBezTo>
+                  <a:lnTo>
+                    <a:pt x="3151" y="1981"/>
+                  </a:lnTo>
+                  <a:lnTo>
+                    <a:pt x="3151" y="2439"/>
+                  </a:lnTo>
+                  <a:lnTo>
+                    <a:pt x="3671" y="2439"/>
+                  </a:lnTo>
+                  <a:cubicBezTo>
+                    <a:pt x="3502" y="3169"/>
+                    <a:pt x="2843" y="3680"/>
+                    <a:pt x="2093" y="3662"/>
+                  </a:cubicBezTo>
+                  <a:cubicBezTo>
+                    <a:pt x="1344" y="3643"/>
+                    <a:pt x="711" y="3100"/>
+                    <a:pt x="579" y="2362"/>
+                  </a:cubicBezTo>
+                  <a:cubicBezTo>
+                    <a:pt x="446" y="1624"/>
+                    <a:pt x="851" y="895"/>
+                    <a:pt x="1547" y="617"/>
+                  </a:cubicBezTo>
+                  <a:cubicBezTo>
+                    <a:pt x="2243" y="339"/>
+                    <a:pt x="3038" y="588"/>
+                    <a:pt x="3451" y="1214"/>
+                  </a:cubicBezTo>
+                  <a:lnTo>
+                    <a:pt x="3871" y="936"/>
+                  </a:lnTo>
                   <a:close/>
                 </a:path>
               </a:pathLst>
             </a:custGeom>
             <a:solidFill>
-              <a:srgbClr val="1B1E24"/>
-            </a:solidFill>
-            <a:ln>
-              <a:noFill/>
-            </a:ln>
-          </p:spPr>
-        </p:sp>
-        <p:sp>
-          <p:nvSpPr>
-            <p:cNvPr id="45" name="m-mark-c1"/>
-            <p:cNvSpPr/>
-            <p:nvPr/>
-          </p:nvSpPr>
-          <p:spPr>
-            <a:xfrm>
-              <a:off x="0" y="0"/>
-              <a:ext cx="304800" cy="304800"/>
+              <a:srgbClr val="FFFFFF"/>
+            </a:solidFill>
+            <a:ln>
+              <a:noFill/>
+            </a:ln>
+          </p:spPr>
+        </p:sp>
+        <p:sp>
+          <p:nvSpPr>
+            <p:cNvPr id="45" name="m-mark-handle"/>
+            <p:cNvSpPr/>
+            <p:nvPr/>
+          </p:nvSpPr>
+          <p:spPr>
+            <a:xfrm>
+              <a:off x="203200" y="203200"/>
+              <a:ext cx="101600" cy="101600"/>
             </a:xfrm>
             <a:custGeom>
               <a:avLst/>
@@ -13837,52 +13463,58 @@
               <a:cxnLst/>
               <a:rect l="0" t="0" r="r" b="b"/>
               <a:pathLst>
-                <a:path w="4800" h="4800">
+                <a:path w="1600" h="1600">
                   <a:moveTo>
-                    <a:pt x="1271" y="2115"/>
+                    <a:pt x="92" y="514"/>
                   </a:moveTo>
-                  <a:cubicBezTo>
-                    <a:pt x="1271" y="2589"/>
-                    <a:pt x="1656" y="2974"/>
-                    <a:pt x="2130" y="2974"/>
-                  </a:cubicBezTo>
-                  <a:cubicBezTo>
-                    <a:pt x="2604" y="2974"/>
-                    <a:pt x="2989" y="2589"/>
-                    <a:pt x="2989" y="2115"/>
-                  </a:cubicBezTo>
-                  <a:cubicBezTo>
-                    <a:pt x="2989" y="1641"/>
-                    <a:pt x="2604" y="1256"/>
-                    <a:pt x="2130" y="1256"/>
-                  </a:cubicBezTo>
-                  <a:cubicBezTo>
-                    <a:pt x="1656" y="1256"/>
-                    <a:pt x="1271" y="1641"/>
-                    <a:pt x="1271" y="2115"/>
+                  <a:lnTo>
+                    <a:pt x="949" y="1484"/>
+                  </a:lnTo>
+                  <a:cubicBezTo>
+                    <a:pt x="1075" y="1626"/>
+                    <a:pt x="1293" y="1640"/>
+                    <a:pt x="1435" y="1514"/>
+                  </a:cubicBezTo>
+                  <a:cubicBezTo>
+                    <a:pt x="1577" y="1388"/>
+                    <a:pt x="1591" y="1170"/>
+                    <a:pt x="1465" y="1028"/>
+                  </a:cubicBezTo>
+                  <a:lnTo>
+                    <a:pt x="607" y="58"/>
+                  </a:lnTo>
+                  <a:cubicBezTo>
+                    <a:pt x="480" y="-80"/>
+                    <a:pt x="266" y="-91"/>
+                    <a:pt x="126" y="34"/>
+                  </a:cubicBezTo>
+                  <a:cubicBezTo>
+                    <a:pt x="-14" y="158"/>
+                    <a:pt x="-29" y="371"/>
+                    <a:pt x="92" y="514"/>
                   </a:cubicBezTo>
                   <a:close/>
                 </a:path>
               </a:pathLst>
             </a:custGeom>
             <a:solidFill>
-              <a:srgbClr val="D3A32E"/>
-            </a:solidFill>
-            <a:ln>
-              <a:noFill/>
-            </a:ln>
-          </p:spPr>
-        </p:sp>
-        <p:sp>
-          <p:nvSpPr>
-            <p:cNvPr id="46" name="m-mark-c2"/>
-            <p:cNvSpPr/>
-            <p:nvPr/>
-          </p:nvSpPr>
-          <p:spPr>
-            <a:xfrm>
-              <a:off x="0" y="0"/>
-              <a:ext cx="304800" cy="304800"/>
+              <a:srgbClr val="FFFFFF"/>
+            </a:solidFill>
+            <a:ln>
+              <a:noFill/>
+            </a:ln>
+          </p:spPr>
+        </p:sp>
+        <p:sp>
+          <p:nvSpPr>
+            <p:cNvPr id="46" name="m-mark-iris"/>
+            <p:cNvSpPr/>
+            <p:nvPr/>
+          </p:nvSpPr>
+          <p:spPr>
+            <a:xfrm>
+              <a:off x="69850" y="76200"/>
+              <a:ext cx="127000" cy="120650"/>
             </a:xfrm>
             <a:custGeom>
               <a:avLst/>
@@ -13891,52 +13523,76 @@
               <a:cxnLst/>
               <a:rect l="0" t="0" r="r" b="b"/>
               <a:pathLst>
-                <a:path w="4800" h="4800">
+                <a:path w="2000" h="1900">
                   <a:moveTo>
-                    <a:pt x="1658" y="2134"/>
+                    <a:pt x="98" y="916"/>
                   </a:moveTo>
                   <a:cubicBezTo>
-                    <a:pt x="1658" y="2397"/>
-                    <a:pt x="1871" y="2610"/>
-                    <a:pt x="2134" y="2610"/>
-                  </a:cubicBezTo>
-                  <a:cubicBezTo>
-                    <a:pt x="2397" y="2610"/>
-                    <a:pt x="2610" y="2397"/>
-                    <a:pt x="2610" y="2134"/>
-                  </a:cubicBezTo>
-                  <a:cubicBezTo>
-                    <a:pt x="2610" y="1871"/>
-                    <a:pt x="2397" y="1658"/>
-                    <a:pt x="2134" y="1658"/>
-                  </a:cubicBezTo>
-                  <a:cubicBezTo>
-                    <a:pt x="1871" y="1658"/>
-                    <a:pt x="1658" y="1871"/>
-                    <a:pt x="1658" y="2134"/>
+                    <a:pt x="98" y="411"/>
+                    <a:pt x="508" y="1"/>
+                    <a:pt x="1013" y="1"/>
+                  </a:cubicBezTo>
+                  <a:cubicBezTo>
+                    <a:pt x="1518" y="1"/>
+                    <a:pt x="1928" y="411"/>
+                    <a:pt x="1928" y="916"/>
+                  </a:cubicBezTo>
+                  <a:cubicBezTo>
+                    <a:pt x="1928" y="1421"/>
+                    <a:pt x="1518" y="1831"/>
+                    <a:pt x="1013" y="1831"/>
+                  </a:cubicBezTo>
+                  <a:cubicBezTo>
+                    <a:pt x="508" y="1831"/>
+                    <a:pt x="98" y="1421"/>
+                    <a:pt x="98" y="916"/>
+                  </a:cubicBezTo>
+                  <a:close/>
+                  <a:moveTo>
+                    <a:pt x="504" y="916"/>
+                  </a:moveTo>
+                  <a:cubicBezTo>
+                    <a:pt x="516" y="1189"/>
+                    <a:pt x="741" y="1403"/>
+                    <a:pt x="1014" y="1403"/>
+                  </a:cubicBezTo>
+                  <a:cubicBezTo>
+                    <a:pt x="1286" y="1403"/>
+                    <a:pt x="1511" y="1189"/>
+                    <a:pt x="1523" y="916"/>
+                  </a:cubicBezTo>
+                  <a:cubicBezTo>
+                    <a:pt x="1511" y="643"/>
+                    <a:pt x="1286" y="429"/>
+                    <a:pt x="1014" y="429"/>
+                  </a:cubicBezTo>
+                  <a:cubicBezTo>
+                    <a:pt x="741" y="429"/>
+                    <a:pt x="516" y="643"/>
+                    <a:pt x="504" y="916"/>
                   </a:cubicBezTo>
                   <a:close/>
                 </a:path>
               </a:pathLst>
             </a:custGeom>
             <a:solidFill>
-              <a:srgbClr val="F2F4F6"/>
-            </a:solidFill>
-            <a:ln>
-              <a:noFill/>
-            </a:ln>
-          </p:spPr>
-        </p:sp>
-        <p:sp>
-          <p:nvSpPr>
-            <p:cNvPr id="47" name="m-mark-c3"/>
-            <p:cNvSpPr/>
-            <p:nvPr/>
-          </p:nvSpPr>
-          <p:spPr>
-            <a:xfrm>
-              <a:off x="0" y="0"/>
-              <a:ext cx="304800" cy="304800"/>
+              <a:srgbClr val="D3A32E"/>
+            </a:solidFill>
+            <a:ln>
+              <a:noFill/>
+            </a:ln>
+          </p:spPr>
+        </p:sp>
+        <p:sp>
+          <p:nvSpPr>
+            <p:cNvPr id="47" name="m-mark-highlight"/>
+            <p:cNvSpPr/>
+            <p:nvPr/>
+          </p:nvSpPr>
+          <p:spPr>
+            <a:xfrm>
+              <a:off x="139700" y="107950"/>
+              <a:ext cx="25400" cy="25400"/>
             </a:xfrm>
             <a:custGeom>
               <a:avLst/>
@@ -13945,174 +13601,46 @@
               <a:cxnLst/>
               <a:rect l="0" t="0" r="r" b="b"/>
               <a:pathLst>
-                <a:path w="4800" h="4800">
+                <a:path w="400" h="400">
                   <a:moveTo>
-                    <a:pt x="2220" y="1935"/>
+                    <a:pt x="5" y="219"/>
                   </a:moveTo>
                   <a:cubicBezTo>
-                    <a:pt x="2220" y="2010"/>
-                    <a:pt x="2280" y="2070"/>
-                    <a:pt x="2355" y="2070"/>
-                  </a:cubicBezTo>
-                  <a:cubicBezTo>
-                    <a:pt x="2430" y="2070"/>
-                    <a:pt x="2490" y="2010"/>
-                    <a:pt x="2490" y="1935"/>
-                  </a:cubicBezTo>
-                  <a:cubicBezTo>
-                    <a:pt x="2490" y="1860"/>
-                    <a:pt x="2430" y="1800"/>
-                    <a:pt x="2355" y="1800"/>
-                  </a:cubicBezTo>
-                  <a:cubicBezTo>
-                    <a:pt x="2280" y="1800"/>
-                    <a:pt x="2220" y="1860"/>
-                    <a:pt x="2220" y="1935"/>
+                    <a:pt x="5" y="137"/>
+                    <a:pt x="71" y="71"/>
+                    <a:pt x="153" y="71"/>
+                  </a:cubicBezTo>
+                  <a:cubicBezTo>
+                    <a:pt x="235" y="71"/>
+                    <a:pt x="301" y="137"/>
+                    <a:pt x="301" y="219"/>
+                  </a:cubicBezTo>
+                  <a:cubicBezTo>
+                    <a:pt x="301" y="301"/>
+                    <a:pt x="235" y="367"/>
+                    <a:pt x="153" y="367"/>
+                  </a:cubicBezTo>
+                  <a:cubicBezTo>
+                    <a:pt x="71" y="367"/>
+                    <a:pt x="5" y="301"/>
+                    <a:pt x="5" y="219"/>
                   </a:cubicBezTo>
                   <a:close/>
                 </a:path>
               </a:pathLst>
             </a:custGeom>
             <a:solidFill>
-              <a:srgbClr val="0F1114"/>
-            </a:solidFill>
-            <a:ln>
-              <a:noFill/>
-            </a:ln>
-          </p:spPr>
-        </p:sp>
-        <p:sp>
-          <p:nvSpPr>
-            <p:cNvPr id="48" name="m-mark-s0"/>
-            <p:cNvSpPr/>
-            <p:nvPr/>
-          </p:nvSpPr>
-          <p:spPr>
-            <a:xfrm>
-              <a:off x="0" y="0"/>
-              <a:ext cx="304800" cy="304800"/>
-            </a:xfrm>
-            <a:custGeom>
-              <a:avLst/>
-              <a:gdLst/>
-              <a:ahLst/>
-              <a:cxnLst/>
-              <a:rect l="0" t="0" r="r" b="b"/>
-              <a:pathLst>
-                <a:path w="4800" h="4800">
-                  <a:moveTo>
-                    <a:pt x="3795" y="2003"/>
-                  </a:moveTo>
-                  <a:cubicBezTo>
-                    <a:pt x="3840" y="2866"/>
-                    <a:pt x="3233" y="3626"/>
-                    <a:pt x="2381" y="3773"/>
-                  </a:cubicBezTo>
-                  <a:cubicBezTo>
-                    <a:pt x="1529" y="3919"/>
-                    <a:pt x="703" y="3405"/>
-                    <a:pt x="458" y="2577"/>
-                  </a:cubicBezTo>
-                  <a:cubicBezTo>
-                    <a:pt x="212" y="1748"/>
-                    <a:pt x="625" y="867"/>
-                    <a:pt x="1419" y="526"/>
-                  </a:cubicBezTo>
-                  <a:cubicBezTo>
-                    <a:pt x="2213" y="185"/>
-                    <a:pt x="3137" y="492"/>
-                    <a:pt x="3569" y="1240"/>
-                  </a:cubicBezTo>
-                </a:path>
-              </a:pathLst>
-            </a:custGeom>
-            <a:noFill/>
-            <a:ln w="31750" cap="rnd">
-              <a:solidFill>
-                <a:srgbClr val="F2F4F6"/>
-              </a:solidFill>
-              <a:round/>
-            </a:ln>
-          </p:spPr>
-        </p:sp>
-        <p:sp>
-          <p:nvSpPr>
-            <p:cNvPr id="49" name="m-mark-s1"/>
-            <p:cNvSpPr/>
-            <p:nvPr/>
-          </p:nvSpPr>
-          <p:spPr>
-            <a:xfrm>
-              <a:off x="0" y="0"/>
-              <a:ext cx="304800" cy="304800"/>
-            </a:xfrm>
-            <a:custGeom>
-              <a:avLst/>
-              <a:gdLst/>
-              <a:ahLst/>
-              <a:cxnLst/>
-              <a:rect l="0" t="0" r="r" b="b"/>
-              <a:pathLst>
-                <a:path w="4800" h="4800">
-                  <a:moveTo>
-                    <a:pt x="3334" y="2205"/>
-                  </a:moveTo>
-                  <a:lnTo>
-                    <a:pt x="3810" y="2205"/>
-                  </a:lnTo>
-                </a:path>
-              </a:pathLst>
-            </a:custGeom>
-            <a:noFill/>
-            <a:ln w="25400" cap="rnd">
-              <a:solidFill>
-                <a:srgbClr val="F2F4F6"/>
-              </a:solidFill>
-              <a:round/>
-            </a:ln>
-          </p:spPr>
-        </p:sp>
-        <p:sp>
-          <p:nvSpPr>
-            <p:cNvPr id="50" name="m-mark-s2"/>
-            <p:cNvSpPr/>
-            <p:nvPr/>
-          </p:nvSpPr>
-          <p:spPr>
-            <a:xfrm>
-              <a:off x="0" y="0"/>
-              <a:ext cx="304800" cy="304800"/>
-            </a:xfrm>
-            <a:custGeom>
-              <a:avLst/>
-              <a:gdLst/>
-              <a:ahLst/>
-              <a:cxnLst/>
-              <a:rect l="0" t="0" r="r" b="b"/>
-              <a:pathLst>
-                <a:path w="4800" h="4800">
-                  <a:moveTo>
-                    <a:pt x="3542" y="3548"/>
-                  </a:moveTo>
-                  <a:lnTo>
-                    <a:pt x="4334" y="4345"/>
-                  </a:lnTo>
-                </a:path>
-              </a:pathLst>
-            </a:custGeom>
-            <a:noFill/>
-            <a:ln w="38100" cap="rnd">
-              <a:solidFill>
-                <a:srgbClr val="F2F4F6"/>
-              </a:solidFill>
-              <a:round/>
+              <a:srgbClr val="FFFFFF"/>
+            </a:solidFill>
+            <a:ln>
+              <a:noFill/>
             </a:ln>
           </p:spPr>
         </p:sp>
       </p:grpSp>
       <p:sp>
         <p:nvSpPr>
-          <p:cNvPr id="52" name="an-kicker"/>
+          <p:cNvPr id="49" name="an-kicker"/>
           <p:cNvSpPr txBox="1"/>
           <p:nvPr/>
         </p:nvSpPr>
@@ -14155,7 +13683,7 @@
       </p:sp>
       <p:sp>
         <p:nvSpPr>
-          <p:cNvPr id="53" name="an-title"/>
+          <p:cNvPr id="50" name="an-title"/>
           <p:cNvSpPr>
             <a:spLocks noGrp="1"/>
           </p:cNvSpPr>
@@ -14234,7 +13762,7 @@
       </p:sp>
       <p:sp>
         <p:nvSpPr>
-          <p:cNvPr id="54" name="an-rule0"/>
+          <p:cNvPr id="51" name="an-rule0"/>
           <p:cNvSpPr/>
           <p:nvPr/>
         </p:nvSpPr>
@@ -14256,7 +13784,7 @@
       </p:sp>
       <p:sp>
         <p:nvSpPr>
-          <p:cNvPr id="55" name="an-v0"/>
+          <p:cNvPr id="52" name="an-v0"/>
           <p:cNvSpPr txBox="1"/>
           <p:nvPr/>
         </p:nvSpPr>
@@ -14299,7 +13827,7 @@
       </p:sp>
       <p:sp>
         <p:nvSpPr>
-          <p:cNvPr id="56" name="an-l0"/>
+          <p:cNvPr id="53" name="an-l0"/>
           <p:cNvSpPr txBox="1"/>
           <p:nvPr/>
         </p:nvSpPr>
@@ -14342,7 +13870,7 @@
       </p:sp>
       <p:sp>
         <p:nvSpPr>
-          <p:cNvPr id="57" name="an-d0"/>
+          <p:cNvPr id="54" name="an-d0"/>
           <p:cNvSpPr txBox="1"/>
           <p:nvPr/>
         </p:nvSpPr>
@@ -14391,7 +13919,7 @@
       </p:sp>
       <p:sp>
         <p:nvSpPr>
-          <p:cNvPr id="58" name="an-rule1"/>
+          <p:cNvPr id="55" name="an-rule1"/>
           <p:cNvSpPr/>
           <p:nvPr/>
         </p:nvSpPr>
@@ -14413,7 +13941,7 @@
       </p:sp>
       <p:sp>
         <p:nvSpPr>
-          <p:cNvPr id="59" name="an-v1"/>
+          <p:cNvPr id="56" name="an-v1"/>
           <p:cNvSpPr txBox="1"/>
           <p:nvPr/>
         </p:nvSpPr>
@@ -14456,7 +13984,7 @@
       </p:sp>
       <p:sp>
         <p:nvSpPr>
-          <p:cNvPr id="60" name="an-l1"/>
+          <p:cNvPr id="57" name="an-l1"/>
           <p:cNvSpPr txBox="1"/>
           <p:nvPr/>
         </p:nvSpPr>
@@ -14499,7 +14027,7 @@
       </p:sp>
       <p:sp>
         <p:nvSpPr>
-          <p:cNvPr id="61" name="an-d1"/>
+          <p:cNvPr id="58" name="an-d1"/>
           <p:cNvSpPr txBox="1"/>
           <p:nvPr/>
         </p:nvSpPr>
@@ -14548,7 +14076,7 @@
       </p:sp>
       <p:sp>
         <p:nvSpPr>
-          <p:cNvPr id="62" name="an-rule2"/>
+          <p:cNvPr id="59" name="an-rule2"/>
           <p:cNvSpPr/>
           <p:nvPr/>
         </p:nvSpPr>
@@ -14570,7 +14098,7 @@
       </p:sp>
       <p:sp>
         <p:nvSpPr>
-          <p:cNvPr id="63" name="an-v2"/>
+          <p:cNvPr id="60" name="an-v2"/>
           <p:cNvSpPr txBox="1"/>
           <p:nvPr/>
         </p:nvSpPr>
@@ -14613,7 +14141,7 @@
       </p:sp>
       <p:sp>
         <p:nvSpPr>
-          <p:cNvPr id="64" name="an-l2"/>
+          <p:cNvPr id="61" name="an-l2"/>
           <p:cNvSpPr txBox="1"/>
           <p:nvPr/>
         </p:nvSpPr>
@@ -14656,7 +14184,7 @@
       </p:sp>
       <p:sp>
         <p:nvSpPr>
-          <p:cNvPr id="65" name="an-d2"/>
+          <p:cNvPr id="62" name="an-d2"/>
           <p:cNvSpPr txBox="1"/>
           <p:nvPr/>
         </p:nvSpPr>
@@ -14705,7 +14233,7 @@
       </p:sp>
       <p:sp>
         <p:nvSpPr>
-          <p:cNvPr id="66" name="an-rule3"/>
+          <p:cNvPr id="63" name="an-rule3"/>
           <p:cNvSpPr/>
           <p:nvPr/>
         </p:nvSpPr>
@@ -14727,7 +14255,7 @@
       </p:sp>
       <p:sp>
         <p:nvSpPr>
-          <p:cNvPr id="67" name="an-v3"/>
+          <p:cNvPr id="64" name="an-v3"/>
           <p:cNvSpPr txBox="1"/>
           <p:nvPr/>
         </p:nvSpPr>
@@ -14770,7 +14298,7 @@
       </p:sp>
       <p:sp>
         <p:nvSpPr>
-          <p:cNvPr id="68" name="an-l3"/>
+          <p:cNvPr id="65" name="an-l3"/>
           <p:cNvSpPr txBox="1"/>
           <p:nvPr/>
         </p:nvSpPr>
@@ -14813,7 +14341,7 @@
       </p:sp>
       <p:sp>
         <p:nvSpPr>
-          <p:cNvPr id="69" name="an-d3"/>
+          <p:cNvPr id="66" name="an-d3"/>
           <p:cNvSpPr txBox="1"/>
           <p:nvPr/>
         </p:nvSpPr>
@@ -16088,7 +15616,7 @@
       </p:sp>
       <p:grpSp>
         <p:nvGrpSpPr>
-          <p:cNvPr id="51" name="m-mark"/>
+          <p:cNvPr id="48" name="m-mark"/>
           <p:cNvGrpSpPr/>
           <p:nvPr/>
         </p:nvGrpSpPr>
@@ -16102,14 +15630,14 @@
         </p:grpSpPr>
         <p:sp>
           <p:nvSpPr>
-            <p:cNvPr id="44" name="m-mark-c0"/>
+            <p:cNvPr id="44" name="m-mark-g"/>
             <p:cNvSpPr/>
             <p:nvPr/>
           </p:nvSpPr>
           <p:spPr>
             <a:xfrm>
               <a:off x="0" y="0"/>
-              <a:ext cx="304800" cy="304800"/>
+              <a:ext cx="273050" cy="266700"/>
             </a:xfrm>
             <a:custGeom>
               <a:avLst/>
@@ -16118,52 +15646,84 @@
               <a:cxnLst/>
               <a:rect l="0" t="0" r="r" b="b"/>
               <a:pathLst>
-                <a:path w="4800" h="4800">
+                <a:path w="4300" h="4200">
                   <a:moveTo>
-                    <a:pt x="611" y="2092"/>
+                    <a:pt x="3871" y="936"/>
                   </a:moveTo>
                   <a:cubicBezTo>
-                    <a:pt x="611" y="2910"/>
-                    <a:pt x="1274" y="3574"/>
-                    <a:pt x="2092" y="3574"/>
-                  </a:cubicBezTo>
-                  <a:cubicBezTo>
-                    <a:pt x="2911" y="3574"/>
-                    <a:pt x="3574" y="2910"/>
-                    <a:pt x="3574" y="2092"/>
-                  </a:cubicBezTo>
-                  <a:cubicBezTo>
-                    <a:pt x="3574" y="1274"/>
-                    <a:pt x="2911" y="610"/>
-                    <a:pt x="2093" y="610"/>
-                  </a:cubicBezTo>
-                  <a:cubicBezTo>
-                    <a:pt x="1274" y="610"/>
-                    <a:pt x="611" y="1274"/>
-                    <a:pt x="611" y="2092"/>
-                  </a:cubicBezTo>
+                    <a:pt x="3296" y="65"/>
+                    <a:pt x="2166" y="-246"/>
+                    <a:pt x="1227" y="208"/>
+                  </a:cubicBezTo>
+                  <a:cubicBezTo>
+                    <a:pt x="287" y="661"/>
+                    <a:pt x="-172" y="1740"/>
+                    <a:pt x="153" y="2731"/>
+                  </a:cubicBezTo>
+                  <a:cubicBezTo>
+                    <a:pt x="477" y="3723"/>
+                    <a:pt x="1485" y="4321"/>
+                    <a:pt x="2511" y="4132"/>
+                  </a:cubicBezTo>
+                  <a:cubicBezTo>
+                    <a:pt x="3537" y="3942"/>
+                    <a:pt x="4264" y="3023"/>
+                    <a:pt x="4213" y="1981"/>
+                  </a:cubicBezTo>
+                  <a:lnTo>
+                    <a:pt x="3151" y="1981"/>
+                  </a:lnTo>
+                  <a:lnTo>
+                    <a:pt x="3151" y="2439"/>
+                  </a:lnTo>
+                  <a:lnTo>
+                    <a:pt x="3671" y="2439"/>
+                  </a:lnTo>
+                  <a:cubicBezTo>
+                    <a:pt x="3502" y="3169"/>
+                    <a:pt x="2843" y="3680"/>
+                    <a:pt x="2093" y="3662"/>
+                  </a:cubicBezTo>
+                  <a:cubicBezTo>
+                    <a:pt x="1344" y="3643"/>
+                    <a:pt x="711" y="3100"/>
+                    <a:pt x="579" y="2362"/>
+                  </a:cubicBezTo>
+                  <a:cubicBezTo>
+                    <a:pt x="446" y="1624"/>
+                    <a:pt x="851" y="895"/>
+                    <a:pt x="1547" y="617"/>
+                  </a:cubicBezTo>
+                  <a:cubicBezTo>
+                    <a:pt x="2243" y="339"/>
+                    <a:pt x="3038" y="588"/>
+                    <a:pt x="3451" y="1214"/>
+                  </a:cubicBezTo>
+                  <a:lnTo>
+                    <a:pt x="3871" y="936"/>
+                  </a:lnTo>
                   <a:close/>
                 </a:path>
               </a:pathLst>
             </a:custGeom>
             <a:solidFill>
-              <a:srgbClr val="1B1E24"/>
-            </a:solidFill>
-            <a:ln>
-              <a:noFill/>
-            </a:ln>
-          </p:spPr>
-        </p:sp>
-        <p:sp>
-          <p:nvSpPr>
-            <p:cNvPr id="45" name="m-mark-c1"/>
-            <p:cNvSpPr/>
-            <p:nvPr/>
-          </p:nvSpPr>
-          <p:spPr>
-            <a:xfrm>
-              <a:off x="0" y="0"/>
-              <a:ext cx="304800" cy="304800"/>
+              <a:srgbClr val="FFFFFF"/>
+            </a:solidFill>
+            <a:ln>
+              <a:noFill/>
+            </a:ln>
+          </p:spPr>
+        </p:sp>
+        <p:sp>
+          <p:nvSpPr>
+            <p:cNvPr id="45" name="m-mark-handle"/>
+            <p:cNvSpPr/>
+            <p:nvPr/>
+          </p:nvSpPr>
+          <p:spPr>
+            <a:xfrm>
+              <a:off x="203200" y="203200"/>
+              <a:ext cx="101600" cy="101600"/>
             </a:xfrm>
             <a:custGeom>
               <a:avLst/>
@@ -16172,52 +15732,58 @@
               <a:cxnLst/>
               <a:rect l="0" t="0" r="r" b="b"/>
               <a:pathLst>
-                <a:path w="4800" h="4800">
+                <a:path w="1600" h="1600">
                   <a:moveTo>
-                    <a:pt x="1271" y="2115"/>
+                    <a:pt x="92" y="514"/>
                   </a:moveTo>
-                  <a:cubicBezTo>
-                    <a:pt x="1271" y="2589"/>
-                    <a:pt x="1656" y="2974"/>
-                    <a:pt x="2130" y="2974"/>
-                  </a:cubicBezTo>
-                  <a:cubicBezTo>
-                    <a:pt x="2604" y="2974"/>
-                    <a:pt x="2989" y="2589"/>
-                    <a:pt x="2989" y="2115"/>
-                  </a:cubicBezTo>
-                  <a:cubicBezTo>
-                    <a:pt x="2989" y="1641"/>
-                    <a:pt x="2604" y="1256"/>
-                    <a:pt x="2130" y="1256"/>
-                  </a:cubicBezTo>
-                  <a:cubicBezTo>
-                    <a:pt x="1656" y="1256"/>
-                    <a:pt x="1271" y="1641"/>
-                    <a:pt x="1271" y="2115"/>
+                  <a:lnTo>
+                    <a:pt x="949" y="1484"/>
+                  </a:lnTo>
+                  <a:cubicBezTo>
+                    <a:pt x="1075" y="1626"/>
+                    <a:pt x="1293" y="1640"/>
+                    <a:pt x="1435" y="1514"/>
+                  </a:cubicBezTo>
+                  <a:cubicBezTo>
+                    <a:pt x="1577" y="1388"/>
+                    <a:pt x="1591" y="1170"/>
+                    <a:pt x="1465" y="1028"/>
+                  </a:cubicBezTo>
+                  <a:lnTo>
+                    <a:pt x="607" y="58"/>
+                  </a:lnTo>
+                  <a:cubicBezTo>
+                    <a:pt x="480" y="-80"/>
+                    <a:pt x="266" y="-91"/>
+                    <a:pt x="126" y="34"/>
+                  </a:cubicBezTo>
+                  <a:cubicBezTo>
+                    <a:pt x="-14" y="158"/>
+                    <a:pt x="-29" y="371"/>
+                    <a:pt x="92" y="514"/>
                   </a:cubicBezTo>
                   <a:close/>
                 </a:path>
               </a:pathLst>
             </a:custGeom>
             <a:solidFill>
-              <a:srgbClr val="D3A32E"/>
-            </a:solidFill>
-            <a:ln>
-              <a:noFill/>
-            </a:ln>
-          </p:spPr>
-        </p:sp>
-        <p:sp>
-          <p:nvSpPr>
-            <p:cNvPr id="46" name="m-mark-c2"/>
-            <p:cNvSpPr/>
-            <p:nvPr/>
-          </p:nvSpPr>
-          <p:spPr>
-            <a:xfrm>
-              <a:off x="0" y="0"/>
-              <a:ext cx="304800" cy="304800"/>
+              <a:srgbClr val="FFFFFF"/>
+            </a:solidFill>
+            <a:ln>
+              <a:noFill/>
+            </a:ln>
+          </p:spPr>
+        </p:sp>
+        <p:sp>
+          <p:nvSpPr>
+            <p:cNvPr id="46" name="m-mark-iris"/>
+            <p:cNvSpPr/>
+            <p:nvPr/>
+          </p:nvSpPr>
+          <p:spPr>
+            <a:xfrm>
+              <a:off x="69850" y="76200"/>
+              <a:ext cx="127000" cy="120650"/>
             </a:xfrm>
             <a:custGeom>
               <a:avLst/>
@@ -16226,52 +15792,76 @@
               <a:cxnLst/>
               <a:rect l="0" t="0" r="r" b="b"/>
               <a:pathLst>
-                <a:path w="4800" h="4800">
+                <a:path w="2000" h="1900">
                   <a:moveTo>
-                    <a:pt x="1658" y="2134"/>
+                    <a:pt x="98" y="916"/>
                   </a:moveTo>
                   <a:cubicBezTo>
-                    <a:pt x="1658" y="2397"/>
-                    <a:pt x="1871" y="2610"/>
-                    <a:pt x="2134" y="2610"/>
-                  </a:cubicBezTo>
-                  <a:cubicBezTo>
-                    <a:pt x="2397" y="2610"/>
-                    <a:pt x="2610" y="2397"/>
-                    <a:pt x="2610" y="2134"/>
-                  </a:cubicBezTo>
-                  <a:cubicBezTo>
-                    <a:pt x="2610" y="1871"/>
-                    <a:pt x="2397" y="1658"/>
-                    <a:pt x="2134" y="1658"/>
-                  </a:cubicBezTo>
-                  <a:cubicBezTo>
-                    <a:pt x="1871" y="1658"/>
-                    <a:pt x="1658" y="1871"/>
-                    <a:pt x="1658" y="2134"/>
+                    <a:pt x="98" y="411"/>
+                    <a:pt x="508" y="1"/>
+                    <a:pt x="1013" y="1"/>
+                  </a:cubicBezTo>
+                  <a:cubicBezTo>
+                    <a:pt x="1518" y="1"/>
+                    <a:pt x="1928" y="411"/>
+                    <a:pt x="1928" y="916"/>
+                  </a:cubicBezTo>
+                  <a:cubicBezTo>
+                    <a:pt x="1928" y="1421"/>
+                    <a:pt x="1518" y="1831"/>
+                    <a:pt x="1013" y="1831"/>
+                  </a:cubicBezTo>
+                  <a:cubicBezTo>
+                    <a:pt x="508" y="1831"/>
+                    <a:pt x="98" y="1421"/>
+                    <a:pt x="98" y="916"/>
+                  </a:cubicBezTo>
+                  <a:close/>
+                  <a:moveTo>
+                    <a:pt x="504" y="916"/>
+                  </a:moveTo>
+                  <a:cubicBezTo>
+                    <a:pt x="516" y="1189"/>
+                    <a:pt x="741" y="1403"/>
+                    <a:pt x="1014" y="1403"/>
+                  </a:cubicBezTo>
+                  <a:cubicBezTo>
+                    <a:pt x="1286" y="1403"/>
+                    <a:pt x="1511" y="1189"/>
+                    <a:pt x="1523" y="916"/>
+                  </a:cubicBezTo>
+                  <a:cubicBezTo>
+                    <a:pt x="1511" y="643"/>
+                    <a:pt x="1286" y="429"/>
+                    <a:pt x="1014" y="429"/>
+                  </a:cubicBezTo>
+                  <a:cubicBezTo>
+                    <a:pt x="741" y="429"/>
+                    <a:pt x="516" y="643"/>
+                    <a:pt x="504" y="916"/>
                   </a:cubicBezTo>
                   <a:close/>
                 </a:path>
               </a:pathLst>
             </a:custGeom>
             <a:solidFill>
-              <a:srgbClr val="F2F4F6"/>
-            </a:solidFill>
-            <a:ln>
-              <a:noFill/>
-            </a:ln>
-          </p:spPr>
-        </p:sp>
-        <p:sp>
-          <p:nvSpPr>
-            <p:cNvPr id="47" name="m-mark-c3"/>
-            <p:cNvSpPr/>
-            <p:nvPr/>
-          </p:nvSpPr>
-          <p:spPr>
-            <a:xfrm>
-              <a:off x="0" y="0"/>
-              <a:ext cx="304800" cy="304800"/>
+              <a:srgbClr val="D3A32E"/>
+            </a:solidFill>
+            <a:ln>
+              <a:noFill/>
+            </a:ln>
+          </p:spPr>
+        </p:sp>
+        <p:sp>
+          <p:nvSpPr>
+            <p:cNvPr id="47" name="m-mark-highlight"/>
+            <p:cNvSpPr/>
+            <p:nvPr/>
+          </p:nvSpPr>
+          <p:spPr>
+            <a:xfrm>
+              <a:off x="139700" y="107950"/>
+              <a:ext cx="25400" cy="25400"/>
             </a:xfrm>
             <a:custGeom>
               <a:avLst/>
@@ -16280,174 +15870,46 @@
               <a:cxnLst/>
               <a:rect l="0" t="0" r="r" b="b"/>
               <a:pathLst>
-                <a:path w="4800" h="4800">
+                <a:path w="400" h="400">
                   <a:moveTo>
-                    <a:pt x="2220" y="1935"/>
+                    <a:pt x="5" y="219"/>
                   </a:moveTo>
                   <a:cubicBezTo>
-                    <a:pt x="2220" y="2010"/>
-                    <a:pt x="2280" y="2070"/>
-                    <a:pt x="2355" y="2070"/>
-                  </a:cubicBezTo>
-                  <a:cubicBezTo>
-                    <a:pt x="2430" y="2070"/>
-                    <a:pt x="2490" y="2010"/>
-                    <a:pt x="2490" y="1935"/>
-                  </a:cubicBezTo>
-                  <a:cubicBezTo>
-                    <a:pt x="2490" y="1860"/>
-                    <a:pt x="2430" y="1800"/>
-                    <a:pt x="2355" y="1800"/>
-                  </a:cubicBezTo>
-                  <a:cubicBezTo>
-                    <a:pt x="2280" y="1800"/>
-                    <a:pt x="2220" y="1860"/>
-                    <a:pt x="2220" y="1935"/>
+                    <a:pt x="5" y="137"/>
+                    <a:pt x="71" y="71"/>
+                    <a:pt x="153" y="71"/>
+                  </a:cubicBezTo>
+                  <a:cubicBezTo>
+                    <a:pt x="235" y="71"/>
+                    <a:pt x="301" y="137"/>
+                    <a:pt x="301" y="219"/>
+                  </a:cubicBezTo>
+                  <a:cubicBezTo>
+                    <a:pt x="301" y="301"/>
+                    <a:pt x="235" y="367"/>
+                    <a:pt x="153" y="367"/>
+                  </a:cubicBezTo>
+                  <a:cubicBezTo>
+                    <a:pt x="71" y="367"/>
+                    <a:pt x="5" y="301"/>
+                    <a:pt x="5" y="219"/>
                   </a:cubicBezTo>
                   <a:close/>
                 </a:path>
               </a:pathLst>
             </a:custGeom>
             <a:solidFill>
-              <a:srgbClr val="0F1114"/>
-            </a:solidFill>
-            <a:ln>
-              <a:noFill/>
-            </a:ln>
-          </p:spPr>
-        </p:sp>
-        <p:sp>
-          <p:nvSpPr>
-            <p:cNvPr id="48" name="m-mark-s0"/>
-            <p:cNvSpPr/>
-            <p:nvPr/>
-          </p:nvSpPr>
-          <p:spPr>
-            <a:xfrm>
-              <a:off x="0" y="0"/>
-              <a:ext cx="304800" cy="304800"/>
-            </a:xfrm>
-            <a:custGeom>
-              <a:avLst/>
-              <a:gdLst/>
-              <a:ahLst/>
-              <a:cxnLst/>
-              <a:rect l="0" t="0" r="r" b="b"/>
-              <a:pathLst>
-                <a:path w="4800" h="4800">
-                  <a:moveTo>
-                    <a:pt x="3795" y="2003"/>
-                  </a:moveTo>
-                  <a:cubicBezTo>
-                    <a:pt x="3840" y="2866"/>
-                    <a:pt x="3233" y="3626"/>
-                    <a:pt x="2381" y="3773"/>
-                  </a:cubicBezTo>
-                  <a:cubicBezTo>
-                    <a:pt x="1529" y="3919"/>
-                    <a:pt x="703" y="3405"/>
-                    <a:pt x="458" y="2577"/>
-                  </a:cubicBezTo>
-                  <a:cubicBezTo>
-                    <a:pt x="212" y="1748"/>
-                    <a:pt x="625" y="867"/>
-                    <a:pt x="1419" y="526"/>
-                  </a:cubicBezTo>
-                  <a:cubicBezTo>
-                    <a:pt x="2213" y="185"/>
-                    <a:pt x="3137" y="492"/>
-                    <a:pt x="3569" y="1240"/>
-                  </a:cubicBezTo>
-                </a:path>
-              </a:pathLst>
-            </a:custGeom>
-            <a:noFill/>
-            <a:ln w="31750" cap="rnd">
-              <a:solidFill>
-                <a:srgbClr val="F2F4F6"/>
-              </a:solidFill>
-              <a:round/>
-            </a:ln>
-          </p:spPr>
-        </p:sp>
-        <p:sp>
-          <p:nvSpPr>
-            <p:cNvPr id="49" name="m-mark-s1"/>
-            <p:cNvSpPr/>
-            <p:nvPr/>
-          </p:nvSpPr>
-          <p:spPr>
-            <a:xfrm>
-              <a:off x="0" y="0"/>
-              <a:ext cx="304800" cy="304800"/>
-            </a:xfrm>
-            <a:custGeom>
-              <a:avLst/>
-              <a:gdLst/>
-              <a:ahLst/>
-              <a:cxnLst/>
-              <a:rect l="0" t="0" r="r" b="b"/>
-              <a:pathLst>
-                <a:path w="4800" h="4800">
-                  <a:moveTo>
-                    <a:pt x="3334" y="2205"/>
-                  </a:moveTo>
-                  <a:lnTo>
-                    <a:pt x="3810" y="2205"/>
-                  </a:lnTo>
-                </a:path>
-              </a:pathLst>
-            </a:custGeom>
-            <a:noFill/>
-            <a:ln w="25400" cap="rnd">
-              <a:solidFill>
-                <a:srgbClr val="F2F4F6"/>
-              </a:solidFill>
-              <a:round/>
-            </a:ln>
-          </p:spPr>
-        </p:sp>
-        <p:sp>
-          <p:nvSpPr>
-            <p:cNvPr id="50" name="m-mark-s2"/>
-            <p:cNvSpPr/>
-            <p:nvPr/>
-          </p:nvSpPr>
-          <p:spPr>
-            <a:xfrm>
-              <a:off x="0" y="0"/>
-              <a:ext cx="304800" cy="304800"/>
-            </a:xfrm>
-            <a:custGeom>
-              <a:avLst/>
-              <a:gdLst/>
-              <a:ahLst/>
-              <a:cxnLst/>
-              <a:rect l="0" t="0" r="r" b="b"/>
-              <a:pathLst>
-                <a:path w="4800" h="4800">
-                  <a:moveTo>
-                    <a:pt x="3542" y="3548"/>
-                  </a:moveTo>
-                  <a:lnTo>
-                    <a:pt x="4334" y="4345"/>
-                  </a:lnTo>
-                </a:path>
-              </a:pathLst>
-            </a:custGeom>
-            <a:noFill/>
-            <a:ln w="38100" cap="rnd">
-              <a:solidFill>
-                <a:srgbClr val="F2F4F6"/>
-              </a:solidFill>
-              <a:round/>
+              <a:srgbClr val="FFFFFF"/>
+            </a:solidFill>
+            <a:ln>
+              <a:noFill/>
             </a:ln>
           </p:spPr>
         </p:sp>
       </p:grpSp>
       <p:sp>
         <p:nvSpPr>
-          <p:cNvPr id="52" name="be-kicker"/>
+          <p:cNvPr id="49" name="be-kicker"/>
           <p:cNvSpPr txBox="1"/>
           <p:nvPr/>
         </p:nvSpPr>
@@ -16490,7 +15952,7 @@
       </p:sp>
       <p:sp>
         <p:nvSpPr>
-          <p:cNvPr id="53" name="be-title"/>
+          <p:cNvPr id="50" name="be-title"/>
           <p:cNvSpPr>
             <a:spLocks noGrp="1"/>
           </p:cNvSpPr>
@@ -16580,7 +16042,7 @@
       </p:sp>
       <p:sp>
         <p:nvSpPr>
-          <p:cNvPr id="54" name="be-card0"/>
+          <p:cNvPr id="51" name="be-card0"/>
           <p:cNvSpPr/>
           <p:nvPr/>
         </p:nvSpPr>
@@ -16608,7 +16070,7 @@
       </p:sp>
       <p:sp>
         <p:nvSpPr>
-          <p:cNvPr id="55" name="be-bar0"/>
+          <p:cNvPr id="52" name="be-bar0"/>
           <p:cNvSpPr/>
           <p:nvPr/>
         </p:nvSpPr>
@@ -16630,7 +16092,7 @@
       </p:sp>
       <p:sp>
         <p:nvSpPr>
-          <p:cNvPr id="56" name="be-t0"/>
+          <p:cNvPr id="53" name="be-t0"/>
           <p:cNvSpPr txBox="1"/>
           <p:nvPr/>
         </p:nvSpPr>
@@ -16673,7 +16135,7 @@
       </p:sp>
       <p:sp>
         <p:nvSpPr>
-          <p:cNvPr id="57" name="be-d0"/>
+          <p:cNvPr id="54" name="be-d0"/>
           <p:cNvSpPr txBox="1"/>
           <p:nvPr/>
         </p:nvSpPr>
@@ -16722,7 +16184,7 @@
       </p:sp>
       <p:sp>
         <p:nvSpPr>
-          <p:cNvPr id="58" name="be-card1"/>
+          <p:cNvPr id="55" name="be-card1"/>
           <p:cNvSpPr/>
           <p:nvPr/>
         </p:nvSpPr>
@@ -16750,7 +16212,7 @@
       </p:sp>
       <p:sp>
         <p:nvSpPr>
-          <p:cNvPr id="59" name="be-bar1"/>
+          <p:cNvPr id="56" name="be-bar1"/>
           <p:cNvSpPr/>
           <p:nvPr/>
         </p:nvSpPr>
@@ -16772,7 +16234,7 @@
       </p:sp>
       <p:sp>
         <p:nvSpPr>
-          <p:cNvPr id="60" name="be-t1"/>
+          <p:cNvPr id="57" name="be-t1"/>
           <p:cNvSpPr txBox="1"/>
           <p:nvPr/>
         </p:nvSpPr>
@@ -16815,7 +16277,7 @@
       </p:sp>
       <p:sp>
         <p:nvSpPr>
-          <p:cNvPr id="61" name="be-d1"/>
+          <p:cNvPr id="58" name="be-d1"/>
           <p:cNvSpPr txBox="1"/>
           <p:nvPr/>
         </p:nvSpPr>
@@ -16864,7 +16326,7 @@
       </p:sp>
       <p:sp>
         <p:nvSpPr>
-          <p:cNvPr id="62" name="be-card2"/>
+          <p:cNvPr id="59" name="be-card2"/>
           <p:cNvSpPr/>
           <p:nvPr/>
         </p:nvSpPr>
@@ -16892,7 +16354,7 @@
       </p:sp>
       <p:sp>
         <p:nvSpPr>
-          <p:cNvPr id="63" name="be-bar2"/>
+          <p:cNvPr id="60" name="be-bar2"/>
           <p:cNvSpPr/>
           <p:nvPr/>
         </p:nvSpPr>
@@ -16914,7 +16376,7 @@
       </p:sp>
       <p:sp>
         <p:nvSpPr>
-          <p:cNvPr id="64" name="be-t2"/>
+          <p:cNvPr id="61" name="be-t2"/>
           <p:cNvSpPr txBox="1"/>
           <p:nvPr/>
         </p:nvSpPr>
@@ -16957,7 +16419,7 @@
       </p:sp>
       <p:sp>
         <p:nvSpPr>
-          <p:cNvPr id="65" name="be-d2"/>
+          <p:cNvPr id="62" name="be-d2"/>
           <p:cNvSpPr txBox="1"/>
           <p:nvPr/>
         </p:nvSpPr>
@@ -17006,7 +16468,7 @@
       </p:sp>
       <p:sp>
         <p:nvSpPr>
-          <p:cNvPr id="66" name="be-note"/>
+          <p:cNvPr id="63" name="be-note"/>
           <p:cNvSpPr txBox="1"/>
           <p:nvPr/>
         </p:nvSpPr>
@@ -18281,7 +17743,7 @@
       </p:sp>
       <p:grpSp>
         <p:nvGrpSpPr>
-          <p:cNvPr id="51" name="m-mark"/>
+          <p:cNvPr id="48" name="m-mark"/>
           <p:cNvGrpSpPr/>
           <p:nvPr/>
         </p:nvGrpSpPr>
@@ -18295,14 +17757,14 @@
         </p:grpSpPr>
         <p:sp>
           <p:nvSpPr>
-            <p:cNvPr id="44" name="m-mark-c0"/>
+            <p:cNvPr id="44" name="m-mark-g"/>
             <p:cNvSpPr/>
             <p:nvPr/>
           </p:nvSpPr>
           <p:spPr>
             <a:xfrm>
               <a:off x="0" y="0"/>
-              <a:ext cx="304800" cy="304800"/>
+              <a:ext cx="273050" cy="266700"/>
             </a:xfrm>
             <a:custGeom>
               <a:avLst/>
@@ -18311,52 +17773,84 @@
               <a:cxnLst/>
               <a:rect l="0" t="0" r="r" b="b"/>
               <a:pathLst>
-                <a:path w="4800" h="4800">
+                <a:path w="4300" h="4200">
                   <a:moveTo>
-                    <a:pt x="611" y="2092"/>
+                    <a:pt x="3871" y="936"/>
                   </a:moveTo>
                   <a:cubicBezTo>
-                    <a:pt x="611" y="2910"/>
-                    <a:pt x="1274" y="3574"/>
-                    <a:pt x="2092" y="3574"/>
-                  </a:cubicBezTo>
-                  <a:cubicBezTo>
-                    <a:pt x="2911" y="3574"/>
-                    <a:pt x="3574" y="2910"/>
-                    <a:pt x="3574" y="2092"/>
-                  </a:cubicBezTo>
-                  <a:cubicBezTo>
-                    <a:pt x="3574" y="1274"/>
-                    <a:pt x="2911" y="610"/>
-                    <a:pt x="2093" y="610"/>
-                  </a:cubicBezTo>
-                  <a:cubicBezTo>
-                    <a:pt x="1274" y="610"/>
-                    <a:pt x="611" y="1274"/>
-                    <a:pt x="611" y="2092"/>
-                  </a:cubicBezTo>
+                    <a:pt x="3296" y="65"/>
+                    <a:pt x="2166" y="-246"/>
+                    <a:pt x="1227" y="208"/>
+                  </a:cubicBezTo>
+                  <a:cubicBezTo>
+                    <a:pt x="287" y="661"/>
+                    <a:pt x="-172" y="1740"/>
+                    <a:pt x="153" y="2731"/>
+                  </a:cubicBezTo>
+                  <a:cubicBezTo>
+                    <a:pt x="477" y="3723"/>
+                    <a:pt x="1485" y="4321"/>
+                    <a:pt x="2511" y="4132"/>
+                  </a:cubicBezTo>
+                  <a:cubicBezTo>
+                    <a:pt x="3537" y="3942"/>
+                    <a:pt x="4264" y="3023"/>
+                    <a:pt x="4213" y="1981"/>
+                  </a:cubicBezTo>
+                  <a:lnTo>
+                    <a:pt x="3151" y="1981"/>
+                  </a:lnTo>
+                  <a:lnTo>
+                    <a:pt x="3151" y="2439"/>
+                  </a:lnTo>
+                  <a:lnTo>
+                    <a:pt x="3671" y="2439"/>
+                  </a:lnTo>
+                  <a:cubicBezTo>
+                    <a:pt x="3502" y="3169"/>
+                    <a:pt x="2843" y="3680"/>
+                    <a:pt x="2093" y="3662"/>
+                  </a:cubicBezTo>
+                  <a:cubicBezTo>
+                    <a:pt x="1344" y="3643"/>
+                    <a:pt x="711" y="3100"/>
+                    <a:pt x="579" y="2362"/>
+                  </a:cubicBezTo>
+                  <a:cubicBezTo>
+                    <a:pt x="446" y="1624"/>
+                    <a:pt x="851" y="895"/>
+                    <a:pt x="1547" y="617"/>
+                  </a:cubicBezTo>
+                  <a:cubicBezTo>
+                    <a:pt x="2243" y="339"/>
+                    <a:pt x="3038" y="588"/>
+                    <a:pt x="3451" y="1214"/>
+                  </a:cubicBezTo>
+                  <a:lnTo>
+                    <a:pt x="3871" y="936"/>
+                  </a:lnTo>
                   <a:close/>
                 </a:path>
               </a:pathLst>
             </a:custGeom>
             <a:solidFill>
-              <a:srgbClr val="1B1E24"/>
-            </a:solidFill>
-            <a:ln>
-              <a:noFill/>
-            </a:ln>
-          </p:spPr>
-        </p:sp>
-        <p:sp>
-          <p:nvSpPr>
-            <p:cNvPr id="45" name="m-mark-c1"/>
-            <p:cNvSpPr/>
-            <p:nvPr/>
-          </p:nvSpPr>
-          <p:spPr>
-            <a:xfrm>
-              <a:off x="0" y="0"/>
-              <a:ext cx="304800" cy="304800"/>
+              <a:srgbClr val="FFFFFF"/>
+            </a:solidFill>
+            <a:ln>
+              <a:noFill/>
+            </a:ln>
+          </p:spPr>
+        </p:sp>
+        <p:sp>
+          <p:nvSpPr>
+            <p:cNvPr id="45" name="m-mark-handle"/>
+            <p:cNvSpPr/>
+            <p:nvPr/>
+          </p:nvSpPr>
+          <p:spPr>
+            <a:xfrm>
+              <a:off x="203200" y="203200"/>
+              <a:ext cx="101600" cy="101600"/>
             </a:xfrm>
             <a:custGeom>
               <a:avLst/>
@@ -18365,52 +17859,58 @@
               <a:cxnLst/>
               <a:rect l="0" t="0" r="r" b="b"/>
               <a:pathLst>
-                <a:path w="4800" h="4800">
+                <a:path w="1600" h="1600">
                   <a:moveTo>
-                    <a:pt x="1271" y="2115"/>
+                    <a:pt x="92" y="514"/>
                   </a:moveTo>
-                  <a:cubicBezTo>
-                    <a:pt x="1271" y="2589"/>
-                    <a:pt x="1656" y="2974"/>
-                    <a:pt x="2130" y="2974"/>
-                  </a:cubicBezTo>
-                  <a:cubicBezTo>
-                    <a:pt x="2604" y="2974"/>
-                    <a:pt x="2989" y="2589"/>
-                    <a:pt x="2989" y="2115"/>
-                  </a:cubicBezTo>
-                  <a:cubicBezTo>
-                    <a:pt x="2989" y="1641"/>
-                    <a:pt x="2604" y="1256"/>
-                    <a:pt x="2130" y="1256"/>
-                  </a:cubicBezTo>
-                  <a:cubicBezTo>
-                    <a:pt x="1656" y="1256"/>
-                    <a:pt x="1271" y="1641"/>
-                    <a:pt x="1271" y="2115"/>
+                  <a:lnTo>
+                    <a:pt x="949" y="1484"/>
+                  </a:lnTo>
+                  <a:cubicBezTo>
+                    <a:pt x="1075" y="1626"/>
+                    <a:pt x="1293" y="1640"/>
+                    <a:pt x="1435" y="1514"/>
+                  </a:cubicBezTo>
+                  <a:cubicBezTo>
+                    <a:pt x="1577" y="1388"/>
+                    <a:pt x="1591" y="1170"/>
+                    <a:pt x="1465" y="1028"/>
+                  </a:cubicBezTo>
+                  <a:lnTo>
+                    <a:pt x="607" y="58"/>
+                  </a:lnTo>
+                  <a:cubicBezTo>
+                    <a:pt x="480" y="-80"/>
+                    <a:pt x="266" y="-91"/>
+                    <a:pt x="126" y="34"/>
+                  </a:cubicBezTo>
+                  <a:cubicBezTo>
+                    <a:pt x="-14" y="158"/>
+                    <a:pt x="-29" y="371"/>
+                    <a:pt x="92" y="514"/>
                   </a:cubicBezTo>
                   <a:close/>
                 </a:path>
               </a:pathLst>
             </a:custGeom>
             <a:solidFill>
-              <a:srgbClr val="D3A32E"/>
-            </a:solidFill>
-            <a:ln>
-              <a:noFill/>
-            </a:ln>
-          </p:spPr>
-        </p:sp>
-        <p:sp>
-          <p:nvSpPr>
-            <p:cNvPr id="46" name="m-mark-c2"/>
-            <p:cNvSpPr/>
-            <p:nvPr/>
-          </p:nvSpPr>
-          <p:spPr>
-            <a:xfrm>
-              <a:off x="0" y="0"/>
-              <a:ext cx="304800" cy="304800"/>
+              <a:srgbClr val="FFFFFF"/>
+            </a:solidFill>
+            <a:ln>
+              <a:noFill/>
+            </a:ln>
+          </p:spPr>
+        </p:sp>
+        <p:sp>
+          <p:nvSpPr>
+            <p:cNvPr id="46" name="m-mark-iris"/>
+            <p:cNvSpPr/>
+            <p:nvPr/>
+          </p:nvSpPr>
+          <p:spPr>
+            <a:xfrm>
+              <a:off x="69850" y="76200"/>
+              <a:ext cx="127000" cy="120650"/>
             </a:xfrm>
             <a:custGeom>
               <a:avLst/>
@@ -18419,52 +17919,76 @@
               <a:cxnLst/>
               <a:rect l="0" t="0" r="r" b="b"/>
               <a:pathLst>
-                <a:path w="4800" h="4800">
+                <a:path w="2000" h="1900">
                   <a:moveTo>
-                    <a:pt x="1658" y="2134"/>
+                    <a:pt x="98" y="916"/>
                   </a:moveTo>
                   <a:cubicBezTo>
-                    <a:pt x="1658" y="2397"/>
-                    <a:pt x="1871" y="2610"/>
-                    <a:pt x="2134" y="2610"/>
-                  </a:cubicBezTo>
-                  <a:cubicBezTo>
-                    <a:pt x="2397" y="2610"/>
-                    <a:pt x="2610" y="2397"/>
-                    <a:pt x="2610" y="2134"/>
-                  </a:cubicBezTo>
-                  <a:cubicBezTo>
-                    <a:pt x="2610" y="1871"/>
-                    <a:pt x="2397" y="1658"/>
-                    <a:pt x="2134" y="1658"/>
-                  </a:cubicBezTo>
-                  <a:cubicBezTo>
-                    <a:pt x="1871" y="1658"/>
-                    <a:pt x="1658" y="1871"/>
-                    <a:pt x="1658" y="2134"/>
+                    <a:pt x="98" y="411"/>
+                    <a:pt x="508" y="1"/>
+                    <a:pt x="1013" y="1"/>
+                  </a:cubicBezTo>
+                  <a:cubicBezTo>
+                    <a:pt x="1518" y="1"/>
+                    <a:pt x="1928" y="411"/>
+                    <a:pt x="1928" y="916"/>
+                  </a:cubicBezTo>
+                  <a:cubicBezTo>
+                    <a:pt x="1928" y="1421"/>
+                    <a:pt x="1518" y="1831"/>
+                    <a:pt x="1013" y="1831"/>
+                  </a:cubicBezTo>
+                  <a:cubicBezTo>
+                    <a:pt x="508" y="1831"/>
+                    <a:pt x="98" y="1421"/>
+                    <a:pt x="98" y="916"/>
+                  </a:cubicBezTo>
+                  <a:close/>
+                  <a:moveTo>
+                    <a:pt x="504" y="916"/>
+                  </a:moveTo>
+                  <a:cubicBezTo>
+                    <a:pt x="516" y="1189"/>
+                    <a:pt x="741" y="1403"/>
+                    <a:pt x="1014" y="1403"/>
+                  </a:cubicBezTo>
+                  <a:cubicBezTo>
+                    <a:pt x="1286" y="1403"/>
+                    <a:pt x="1511" y="1189"/>
+                    <a:pt x="1523" y="916"/>
+                  </a:cubicBezTo>
+                  <a:cubicBezTo>
+                    <a:pt x="1511" y="643"/>
+                    <a:pt x="1286" y="429"/>
+                    <a:pt x="1014" y="429"/>
+                  </a:cubicBezTo>
+                  <a:cubicBezTo>
+                    <a:pt x="741" y="429"/>
+                    <a:pt x="516" y="643"/>
+                    <a:pt x="504" y="916"/>
                   </a:cubicBezTo>
                   <a:close/>
                 </a:path>
               </a:pathLst>
             </a:custGeom>
             <a:solidFill>
-              <a:srgbClr val="F2F4F6"/>
-            </a:solidFill>
-            <a:ln>
-              <a:noFill/>
-            </a:ln>
-          </p:spPr>
-        </p:sp>
-        <p:sp>
-          <p:nvSpPr>
-            <p:cNvPr id="47" name="m-mark-c3"/>
-            <p:cNvSpPr/>
-            <p:nvPr/>
-          </p:nvSpPr>
-          <p:spPr>
-            <a:xfrm>
-              <a:off x="0" y="0"/>
-              <a:ext cx="304800" cy="304800"/>
+              <a:srgbClr val="D3A32E"/>
+            </a:solidFill>
+            <a:ln>
+              <a:noFill/>
+            </a:ln>
+          </p:spPr>
+        </p:sp>
+        <p:sp>
+          <p:nvSpPr>
+            <p:cNvPr id="47" name="m-mark-highlight"/>
+            <p:cNvSpPr/>
+            <p:nvPr/>
+          </p:nvSpPr>
+          <p:spPr>
+            <a:xfrm>
+              <a:off x="139700" y="107950"/>
+              <a:ext cx="25400" cy="25400"/>
             </a:xfrm>
             <a:custGeom>
               <a:avLst/>
@@ -18473,174 +17997,46 @@
               <a:cxnLst/>
               <a:rect l="0" t="0" r="r" b="b"/>
               <a:pathLst>
-                <a:path w="4800" h="4800">
+                <a:path w="400" h="400">
                   <a:moveTo>
-                    <a:pt x="2220" y="1935"/>
+                    <a:pt x="5" y="219"/>
                   </a:moveTo>
                   <a:cubicBezTo>
-                    <a:pt x="2220" y="2010"/>
-                    <a:pt x="2280" y="2070"/>
-                    <a:pt x="2355" y="2070"/>
-                  </a:cubicBezTo>
-                  <a:cubicBezTo>
-                    <a:pt x="2430" y="2070"/>
-                    <a:pt x="2490" y="2010"/>
-                    <a:pt x="2490" y="1935"/>
-                  </a:cubicBezTo>
-                  <a:cubicBezTo>
-                    <a:pt x="2490" y="1860"/>
-                    <a:pt x="2430" y="1800"/>
-                    <a:pt x="2355" y="1800"/>
-                  </a:cubicBezTo>
-                  <a:cubicBezTo>
-                    <a:pt x="2280" y="1800"/>
-                    <a:pt x="2220" y="1860"/>
-                    <a:pt x="2220" y="1935"/>
+                    <a:pt x="5" y="137"/>
+                    <a:pt x="71" y="71"/>
+                    <a:pt x="153" y="71"/>
+                  </a:cubicBezTo>
+                  <a:cubicBezTo>
+                    <a:pt x="235" y="71"/>
+                    <a:pt x="301" y="137"/>
+                    <a:pt x="301" y="219"/>
+                  </a:cubicBezTo>
+                  <a:cubicBezTo>
+                    <a:pt x="301" y="301"/>
+                    <a:pt x="235" y="367"/>
+                    <a:pt x="153" y="367"/>
+                  </a:cubicBezTo>
+                  <a:cubicBezTo>
+                    <a:pt x="71" y="367"/>
+                    <a:pt x="5" y="301"/>
+                    <a:pt x="5" y="219"/>
                   </a:cubicBezTo>
                   <a:close/>
                 </a:path>
               </a:pathLst>
             </a:custGeom>
             <a:solidFill>
-              <a:srgbClr val="0F1114"/>
-            </a:solidFill>
-            <a:ln>
-              <a:noFill/>
-            </a:ln>
-          </p:spPr>
-        </p:sp>
-        <p:sp>
-          <p:nvSpPr>
-            <p:cNvPr id="48" name="m-mark-s0"/>
-            <p:cNvSpPr/>
-            <p:nvPr/>
-          </p:nvSpPr>
-          <p:spPr>
-            <a:xfrm>
-              <a:off x="0" y="0"/>
-              <a:ext cx="304800" cy="304800"/>
-            </a:xfrm>
-            <a:custGeom>
-              <a:avLst/>
-              <a:gdLst/>
-              <a:ahLst/>
-              <a:cxnLst/>
-              <a:rect l="0" t="0" r="r" b="b"/>
-              <a:pathLst>
-                <a:path w="4800" h="4800">
-                  <a:moveTo>
-                    <a:pt x="3795" y="2003"/>
-                  </a:moveTo>
-                  <a:cubicBezTo>
-                    <a:pt x="3840" y="2866"/>
-                    <a:pt x="3233" y="3626"/>
-                    <a:pt x="2381" y="3773"/>
-                  </a:cubicBezTo>
-                  <a:cubicBezTo>
-                    <a:pt x="1529" y="3919"/>
-                    <a:pt x="703" y="3405"/>
-                    <a:pt x="458" y="2577"/>
-                  </a:cubicBezTo>
-                  <a:cubicBezTo>
-                    <a:pt x="212" y="1748"/>
-                    <a:pt x="625" y="867"/>
-                    <a:pt x="1419" y="526"/>
-                  </a:cubicBezTo>
-                  <a:cubicBezTo>
-                    <a:pt x="2213" y="185"/>
-                    <a:pt x="3137" y="492"/>
-                    <a:pt x="3569" y="1240"/>
-                  </a:cubicBezTo>
-                </a:path>
-              </a:pathLst>
-            </a:custGeom>
-            <a:noFill/>
-            <a:ln w="31750" cap="rnd">
-              <a:solidFill>
-                <a:srgbClr val="F2F4F6"/>
-              </a:solidFill>
-              <a:round/>
-            </a:ln>
-          </p:spPr>
-        </p:sp>
-        <p:sp>
-          <p:nvSpPr>
-            <p:cNvPr id="49" name="m-mark-s1"/>
-            <p:cNvSpPr/>
-            <p:nvPr/>
-          </p:nvSpPr>
-          <p:spPr>
-            <a:xfrm>
-              <a:off x="0" y="0"/>
-              <a:ext cx="304800" cy="304800"/>
-            </a:xfrm>
-            <a:custGeom>
-              <a:avLst/>
-              <a:gdLst/>
-              <a:ahLst/>
-              <a:cxnLst/>
-              <a:rect l="0" t="0" r="r" b="b"/>
-              <a:pathLst>
-                <a:path w="4800" h="4800">
-                  <a:moveTo>
-                    <a:pt x="3334" y="2205"/>
-                  </a:moveTo>
-                  <a:lnTo>
-                    <a:pt x="3810" y="2205"/>
-                  </a:lnTo>
-                </a:path>
-              </a:pathLst>
-            </a:custGeom>
-            <a:noFill/>
-            <a:ln w="25400" cap="rnd">
-              <a:solidFill>
-                <a:srgbClr val="F2F4F6"/>
-              </a:solidFill>
-              <a:round/>
-            </a:ln>
-          </p:spPr>
-        </p:sp>
-        <p:sp>
-          <p:nvSpPr>
-            <p:cNvPr id="50" name="m-mark-s2"/>
-            <p:cNvSpPr/>
-            <p:nvPr/>
-          </p:nvSpPr>
-          <p:spPr>
-            <a:xfrm>
-              <a:off x="0" y="0"/>
-              <a:ext cx="304800" cy="304800"/>
-            </a:xfrm>
-            <a:custGeom>
-              <a:avLst/>
-              <a:gdLst/>
-              <a:ahLst/>
-              <a:cxnLst/>
-              <a:rect l="0" t="0" r="r" b="b"/>
-              <a:pathLst>
-                <a:path w="4800" h="4800">
-                  <a:moveTo>
-                    <a:pt x="3542" y="3548"/>
-                  </a:moveTo>
-                  <a:lnTo>
-                    <a:pt x="4334" y="4345"/>
-                  </a:lnTo>
-                </a:path>
-              </a:pathLst>
-            </a:custGeom>
-            <a:noFill/>
-            <a:ln w="38100" cap="rnd">
-              <a:solidFill>
-                <a:srgbClr val="F2F4F6"/>
-              </a:solidFill>
-              <a:round/>
+              <a:srgbClr val="FFFFFF"/>
+            </a:solidFill>
+            <a:ln>
+              <a:noFill/>
             </a:ln>
           </p:spPr>
         </p:sp>
       </p:grpSp>
       <p:sp>
         <p:nvSpPr>
-          <p:cNvPr id="52" name="jo-kicker"/>
+          <p:cNvPr id="49" name="jo-kicker"/>
           <p:cNvSpPr txBox="1"/>
           <p:nvPr/>
         </p:nvSpPr>
@@ -18683,7 +18079,7 @@
       </p:sp>
       <p:sp>
         <p:nvSpPr>
-          <p:cNvPr id="53" name="jo-title"/>
+          <p:cNvPr id="50" name="jo-title"/>
           <p:cNvSpPr>
             <a:spLocks noGrp="1"/>
           </p:cNvSpPr>
@@ -18747,7 +18143,7 @@
       </p:sp>
       <p:sp>
         <p:nvSpPr>
-          <p:cNvPr id="54" name="jo-n0"/>
+          <p:cNvPr id="51" name="jo-n0"/>
           <p:cNvSpPr txBox="1"/>
           <p:nvPr/>
         </p:nvSpPr>
@@ -18790,7 +18186,7 @@
       </p:sp>
       <p:sp>
         <p:nvSpPr>
-          <p:cNvPr id="55" name="jo-t0"/>
+          <p:cNvPr id="52" name="jo-t0"/>
           <p:cNvSpPr txBox="1"/>
           <p:nvPr/>
         </p:nvSpPr>
@@ -18833,7 +18229,7 @@
       </p:sp>
       <p:sp>
         <p:nvSpPr>
-          <p:cNvPr id="56" name="jo-d0"/>
+          <p:cNvPr id="53" name="jo-d0"/>
           <p:cNvSpPr txBox="1"/>
           <p:nvPr/>
         </p:nvSpPr>
@@ -18882,7 +18278,7 @@
       </p:sp>
       <p:sp>
         <p:nvSpPr>
-          <p:cNvPr id="57" name="jo-n1"/>
+          <p:cNvPr id="54" name="jo-n1"/>
           <p:cNvSpPr txBox="1"/>
           <p:nvPr/>
         </p:nvSpPr>
@@ -18925,7 +18321,7 @@
       </p:sp>
       <p:sp>
         <p:nvSpPr>
-          <p:cNvPr id="58" name="jo-t1"/>
+          <p:cNvPr id="55" name="jo-t1"/>
           <p:cNvSpPr txBox="1"/>
           <p:nvPr/>
         </p:nvSpPr>
@@ -18968,7 +18364,7 @@
       </p:sp>
       <p:sp>
         <p:nvSpPr>
-          <p:cNvPr id="59" name="jo-d1"/>
+          <p:cNvPr id="56" name="jo-d1"/>
           <p:cNvSpPr txBox="1"/>
           <p:nvPr/>
         </p:nvSpPr>
@@ -19017,7 +18413,7 @@
       </p:sp>
       <p:sp>
         <p:nvSpPr>
-          <p:cNvPr id="60" name="jo-n2"/>
+          <p:cNvPr id="57" name="jo-n2"/>
           <p:cNvSpPr txBox="1"/>
           <p:nvPr/>
         </p:nvSpPr>
@@ -19060,7 +18456,7 @@
       </p:sp>
       <p:sp>
         <p:nvSpPr>
-          <p:cNvPr id="61" name="jo-t2"/>
+          <p:cNvPr id="58" name="jo-t2"/>
           <p:cNvSpPr txBox="1"/>
           <p:nvPr/>
         </p:nvSpPr>
@@ -19103,7 +18499,7 @@
       </p:sp>
       <p:sp>
         <p:nvSpPr>
-          <p:cNvPr id="62" name="jo-d2"/>
+          <p:cNvPr id="59" name="jo-d2"/>
           <p:cNvSpPr txBox="1"/>
           <p:nvPr/>
         </p:nvSpPr>
@@ -19152,7 +18548,7 @@
       </p:sp>
       <p:sp>
         <p:nvSpPr>
-          <p:cNvPr id="63" name="jo-url1"/>
+          <p:cNvPr id="60" name="jo-url1"/>
           <p:cNvSpPr txBox="1"/>
           <p:nvPr/>
         </p:nvSpPr>
@@ -19195,7 +18591,7 @@
       </p:sp>
       <p:sp>
         <p:nvSpPr>
-          <p:cNvPr id="64" name="jo-url2"/>
+          <p:cNvPr id="61" name="jo-url2"/>
           <p:cNvSpPr txBox="1"/>
           <p:nvPr/>
         </p:nvSpPr>
@@ -20462,28 +19858,28 @@
       </p:grpSp>
       <p:grpSp>
         <p:nvGrpSpPr>
-          <p:cNvPr id="51" name="th-mark"/>
+          <p:cNvPr id="48" name="th-mark"/>
           <p:cNvGrpSpPr/>
           <p:nvPr/>
         </p:nvGrpSpPr>
         <p:grpSpPr>
           <a:xfrm>
-            <a:off x="5143500" y="1079500"/>
-            <a:ext cx="1905000" cy="1905000"/>
+            <a:off x="5162550" y="1079500"/>
+            <a:ext cx="1866900" cy="1911350"/>
             <a:chOff x="0" y="0"/>
-            <a:chExt cx="1905000" cy="1905000"/>
+            <a:chExt cx="1866900" cy="1911350"/>
           </a:xfrm>
         </p:grpSpPr>
         <p:sp>
           <p:nvSpPr>
-            <p:cNvPr id="44" name="th-mark-c0"/>
+            <p:cNvPr id="44" name="th-mark-g"/>
             <p:cNvSpPr/>
             <p:nvPr/>
           </p:nvSpPr>
           <p:spPr>
             <a:xfrm>
               <a:off x="0" y="0"/>
-              <a:ext cx="1905000" cy="1905000"/>
+              <a:ext cx="1657350" cy="1657350"/>
             </a:xfrm>
             <a:custGeom>
               <a:avLst/>
@@ -20492,52 +19888,84 @@
               <a:cxnLst/>
               <a:rect l="0" t="0" r="r" b="b"/>
               <a:pathLst>
-                <a:path w="30000" h="30000">
+                <a:path w="26100" h="26100">
                   <a:moveTo>
-                    <a:pt x="3820" y="13078"/>
+                    <a:pt x="23897" y="5853"/>
                   </a:moveTo>
                   <a:cubicBezTo>
-                    <a:pt x="3820" y="18191"/>
-                    <a:pt x="7965" y="22336"/>
-                    <a:pt x="13078" y="22336"/>
-                  </a:cubicBezTo>
-                  <a:cubicBezTo>
-                    <a:pt x="18191" y="22336"/>
-                    <a:pt x="22336" y="18191"/>
-                    <a:pt x="22336" y="13078"/>
-                  </a:cubicBezTo>
-                  <a:cubicBezTo>
-                    <a:pt x="22336" y="7965"/>
-                    <a:pt x="18191" y="3820"/>
-                    <a:pt x="13078" y="3820"/>
-                  </a:cubicBezTo>
-                  <a:cubicBezTo>
-                    <a:pt x="7965" y="3820"/>
-                    <a:pt x="3820" y="7965"/>
-                    <a:pt x="3820" y="13078"/>
-                  </a:cubicBezTo>
+                    <a:pt x="20307" y="408"/>
+                    <a:pt x="13244" y="-1541"/>
+                    <a:pt x="7370" y="1293"/>
+                  </a:cubicBezTo>
+                  <a:cubicBezTo>
+                    <a:pt x="1496" y="4126"/>
+                    <a:pt x="-1375" y="10868"/>
+                    <a:pt x="652" y="17066"/>
+                  </a:cubicBezTo>
+                  <a:cubicBezTo>
+                    <a:pt x="2678" y="23265"/>
+                    <a:pt x="8978" y="27007"/>
+                    <a:pt x="15391" y="25823"/>
+                  </a:cubicBezTo>
+                  <a:cubicBezTo>
+                    <a:pt x="21804" y="24639"/>
+                    <a:pt x="26352" y="18892"/>
+                    <a:pt x="26031" y="12379"/>
+                  </a:cubicBezTo>
+                  <a:lnTo>
+                    <a:pt x="19393" y="12379"/>
+                  </a:lnTo>
+                  <a:lnTo>
+                    <a:pt x="19393" y="15242"/>
+                  </a:lnTo>
+                  <a:lnTo>
+                    <a:pt x="22643" y="15242"/>
+                  </a:lnTo>
+                  <a:cubicBezTo>
+                    <a:pt x="21588" y="19808"/>
+                    <a:pt x="17469" y="23002"/>
+                    <a:pt x="12784" y="22888"/>
+                  </a:cubicBezTo>
+                  <a:cubicBezTo>
+                    <a:pt x="8100" y="22773"/>
+                    <a:pt x="4142" y="19380"/>
+                    <a:pt x="3312" y="14768"/>
+                  </a:cubicBezTo>
+                  <a:cubicBezTo>
+                    <a:pt x="2483" y="10156"/>
+                    <a:pt x="5010" y="5597"/>
+                    <a:pt x="9361" y="3856"/>
+                  </a:cubicBezTo>
+                  <a:cubicBezTo>
+                    <a:pt x="13712" y="2116"/>
+                    <a:pt x="18686" y="3675"/>
+                    <a:pt x="21266" y="7587"/>
+                  </a:cubicBezTo>
+                  <a:lnTo>
+                    <a:pt x="23897" y="5853"/>
+                  </a:lnTo>
                   <a:close/>
                 </a:path>
               </a:pathLst>
             </a:custGeom>
             <a:solidFill>
-              <a:srgbClr val="1B1E24"/>
-            </a:solidFill>
-            <a:ln>
-              <a:noFill/>
-            </a:ln>
-          </p:spPr>
-        </p:sp>
-        <p:sp>
-          <p:nvSpPr>
-            <p:cNvPr id="45" name="th-mark-c1"/>
-            <p:cNvSpPr/>
-            <p:nvPr/>
-          </p:nvSpPr>
-          <p:spPr>
-            <a:xfrm>
-              <a:off x="0" y="0"/>
-              <a:ext cx="1905000" cy="1905000"/>
+              <a:srgbClr val="FFFFFF"/>
+            </a:solidFill>
+            <a:ln>
+              <a:noFill/>
+            </a:ln>
+          </p:spPr>
+        </p:sp>
+        <p:sp>
+          <p:nvSpPr>
+            <p:cNvPr id="45" name="th-mark-handle"/>
+            <p:cNvSpPr/>
+            <p:nvPr/>
+          </p:nvSpPr>
+          <p:spPr>
+            <a:xfrm>
+              <a:off x="1282700" y="1289050"/>
+              <a:ext cx="584200" cy="622300"/>
             </a:xfrm>
             <a:custGeom>
               <a:avLst/>
@@ -20546,52 +19974,58 @@
               <a:cxnLst/>
               <a:rect l="0" t="0" r="r" b="b"/>
               <a:pathLst>
-                <a:path w="30000" h="30000">
+                <a:path w="9200" h="9800">
                   <a:moveTo>
-                    <a:pt x="7945" y="13219"/>
+                    <a:pt x="74" y="2912"/>
                   </a:moveTo>
-                  <a:cubicBezTo>
-                    <a:pt x="7945" y="16183"/>
-                    <a:pt x="10348" y="18586"/>
-                    <a:pt x="13312" y="18586"/>
-                  </a:cubicBezTo>
-                  <a:cubicBezTo>
-                    <a:pt x="16277" y="18586"/>
-                    <a:pt x="18680" y="16183"/>
-                    <a:pt x="18680" y="13219"/>
-                  </a:cubicBezTo>
-                  <a:cubicBezTo>
-                    <a:pt x="18680" y="10255"/>
-                    <a:pt x="16277" y="7851"/>
-                    <a:pt x="13312" y="7851"/>
-                  </a:cubicBezTo>
-                  <a:cubicBezTo>
-                    <a:pt x="10348" y="7851"/>
-                    <a:pt x="7945" y="10255"/>
-                    <a:pt x="7945" y="13219"/>
+                  <a:lnTo>
+                    <a:pt x="5434" y="8975"/>
+                  </a:lnTo>
+                  <a:cubicBezTo>
+                    <a:pt x="6220" y="9864"/>
+                    <a:pt x="7578" y="9948"/>
+                    <a:pt x="8468" y="9162"/>
+                  </a:cubicBezTo>
+                  <a:cubicBezTo>
+                    <a:pt x="9357" y="8375"/>
+                    <a:pt x="9440" y="7017"/>
+                    <a:pt x="8654" y="6128"/>
+                  </a:cubicBezTo>
+                  <a:lnTo>
+                    <a:pt x="3293" y="65"/>
+                  </a:lnTo>
+                  <a:cubicBezTo>
+                    <a:pt x="2501" y="-800"/>
+                    <a:pt x="1162" y="-870"/>
+                    <a:pt x="284" y="-94"/>
+                  </a:cubicBezTo>
+                  <a:cubicBezTo>
+                    <a:pt x="-594" y="683"/>
+                    <a:pt x="-688" y="2021"/>
+                    <a:pt x="74" y="2912"/>
                   </a:cubicBezTo>
                   <a:close/>
                 </a:path>
               </a:pathLst>
             </a:custGeom>
             <a:solidFill>
-              <a:srgbClr val="D3A32E"/>
-            </a:solidFill>
-            <a:ln>
-              <a:noFill/>
-            </a:ln>
-          </p:spPr>
-        </p:sp>
-        <p:sp>
-          <p:nvSpPr>
-            <p:cNvPr id="46" name="th-mark-c2"/>
-            <p:cNvSpPr/>
-            <p:nvPr/>
-          </p:nvSpPr>
-          <p:spPr>
-            <a:xfrm>
-              <a:off x="0" y="0"/>
-              <a:ext cx="1905000" cy="1905000"/>
+              <a:srgbClr val="FFFFFF"/>
+            </a:solidFill>
+            <a:ln>
+              <a:noFill/>
+            </a:ln>
+          </p:spPr>
+        </p:sp>
+        <p:sp>
+          <p:nvSpPr>
+            <p:cNvPr id="46" name="th-mark-iris"/>
+            <p:cNvSpPr/>
+            <p:nvPr/>
+          </p:nvSpPr>
+          <p:spPr>
+            <a:xfrm>
+              <a:off x="450850" y="476250"/>
+              <a:ext cx="736600" cy="730250"/>
             </a:xfrm>
             <a:custGeom>
               <a:avLst/>
@@ -20600,62 +20034,76 @@
               <a:cxnLst/>
               <a:rect l="0" t="0" r="r" b="b"/>
               <a:pathLst>
-                <a:path w="30000" h="30000">
+                <a:path w="11600" h="11500">
                   <a:moveTo>
-                    <a:pt x="10359" y="13336"/>
+                    <a:pt x="90" y="5723"/>
                   </a:moveTo>
                   <a:cubicBezTo>
-                    <a:pt x="10339" y="14412"/>
-                    <a:pt x="10902" y="15416"/>
-                    <a:pt x="11831" y="15960"/>
-                  </a:cubicBezTo>
-                  <a:cubicBezTo>
-                    <a:pt x="12760" y="16504"/>
-                    <a:pt x="13911" y="16504"/>
-                    <a:pt x="14840" y="15960"/>
-                  </a:cubicBezTo>
-                  <a:cubicBezTo>
-                    <a:pt x="15769" y="15416"/>
-                    <a:pt x="16332" y="14412"/>
-                    <a:pt x="16312" y="13336"/>
-                  </a:cubicBezTo>
-                  <a:cubicBezTo>
-                    <a:pt x="16332" y="12260"/>
-                    <a:pt x="15769" y="11256"/>
-                    <a:pt x="14840" y="10712"/>
-                  </a:cubicBezTo>
-                  <a:cubicBezTo>
-                    <a:pt x="13911" y="10168"/>
-                    <a:pt x="12760" y="10168"/>
-                    <a:pt x="11831" y="10712"/>
-                  </a:cubicBezTo>
-                  <a:cubicBezTo>
-                    <a:pt x="10902" y="11256"/>
-                    <a:pt x="10339" y="12260"/>
-                    <a:pt x="10359" y="13336"/>
+                    <a:pt x="90" y="2565"/>
+                    <a:pt x="2650" y="5"/>
+                    <a:pt x="5808" y="5"/>
+                  </a:cubicBezTo>
+                  <a:cubicBezTo>
+                    <a:pt x="8966" y="5"/>
+                    <a:pt x="11526" y="2565"/>
+                    <a:pt x="11526" y="5723"/>
+                  </a:cubicBezTo>
+                  <a:cubicBezTo>
+                    <a:pt x="11526" y="8881"/>
+                    <a:pt x="8966" y="11441"/>
+                    <a:pt x="5808" y="11441"/>
+                  </a:cubicBezTo>
+                  <a:cubicBezTo>
+                    <a:pt x="2650" y="11441"/>
+                    <a:pt x="90" y="8881"/>
+                    <a:pt x="90" y="5723"/>
+                  </a:cubicBezTo>
+                  <a:close/>
+                  <a:moveTo>
+                    <a:pt x="2623" y="5723"/>
+                  </a:moveTo>
+                  <a:cubicBezTo>
+                    <a:pt x="2623" y="7482"/>
+                    <a:pt x="4049" y="8908"/>
+                    <a:pt x="5808" y="8908"/>
+                  </a:cubicBezTo>
+                  <a:cubicBezTo>
+                    <a:pt x="7567" y="8908"/>
+                    <a:pt x="8993" y="7482"/>
+                    <a:pt x="8993" y="5723"/>
+                  </a:cubicBezTo>
+                  <a:cubicBezTo>
+                    <a:pt x="8993" y="3964"/>
+                    <a:pt x="7567" y="2538"/>
+                    <a:pt x="5808" y="2538"/>
+                  </a:cubicBezTo>
+                  <a:cubicBezTo>
+                    <a:pt x="4049" y="2538"/>
+                    <a:pt x="2623" y="3964"/>
+                    <a:pt x="2623" y="5723"/>
                   </a:cubicBezTo>
                   <a:close/>
                 </a:path>
               </a:pathLst>
             </a:custGeom>
             <a:solidFill>
-              <a:srgbClr val="F2F4F6"/>
-            </a:solidFill>
-            <a:ln>
-              <a:noFill/>
-            </a:ln>
-          </p:spPr>
-        </p:sp>
-        <p:sp>
-          <p:nvSpPr>
-            <p:cNvPr id="47" name="th-mark-c3"/>
-            <p:cNvSpPr/>
-            <p:nvPr/>
-          </p:nvSpPr>
-          <p:spPr>
-            <a:xfrm>
-              <a:off x="0" y="0"/>
-              <a:ext cx="1905000" cy="1905000"/>
+              <a:srgbClr val="D3A32E"/>
+            </a:solidFill>
+            <a:ln>
+              <a:noFill/>
+            </a:ln>
+          </p:spPr>
+        </p:sp>
+        <p:sp>
+          <p:nvSpPr>
+            <p:cNvPr id="47" name="th-mark-highlight"/>
+            <p:cNvSpPr/>
+            <p:nvPr/>
+          </p:nvSpPr>
+          <p:spPr>
+            <a:xfrm>
+              <a:off x="850900" y="698500"/>
+              <a:ext cx="127000" cy="127000"/>
             </a:xfrm>
             <a:custGeom>
               <a:avLst/>
@@ -20664,184 +20112,46 @@
               <a:cxnLst/>
               <a:rect l="0" t="0" r="r" b="b"/>
               <a:pathLst>
-                <a:path w="30000" h="30000">
+                <a:path w="2000" h="2000">
                   <a:moveTo>
-                    <a:pt x="13875" y="12094"/>
+                    <a:pt x="84" y="995"/>
                   </a:moveTo>
                   <a:cubicBezTo>
-                    <a:pt x="13864" y="12402"/>
-                    <a:pt x="14023" y="12692"/>
-                    <a:pt x="14288" y="12849"/>
-                  </a:cubicBezTo>
-                  <a:cubicBezTo>
-                    <a:pt x="14553" y="13006"/>
-                    <a:pt x="14884" y="13006"/>
-                    <a:pt x="15149" y="12849"/>
-                  </a:cubicBezTo>
-                  <a:cubicBezTo>
-                    <a:pt x="15414" y="12692"/>
-                    <a:pt x="15573" y="12402"/>
-                    <a:pt x="15562" y="12094"/>
-                  </a:cubicBezTo>
-                  <a:cubicBezTo>
-                    <a:pt x="15573" y="11786"/>
-                    <a:pt x="15414" y="11496"/>
-                    <a:pt x="15149" y="11339"/>
-                  </a:cubicBezTo>
-                  <a:cubicBezTo>
-                    <a:pt x="14884" y="11182"/>
-                    <a:pt x="14553" y="11182"/>
-                    <a:pt x="14288" y="11339"/>
-                  </a:cubicBezTo>
-                  <a:cubicBezTo>
-                    <a:pt x="14023" y="11496"/>
-                    <a:pt x="13864" y="11786"/>
-                    <a:pt x="13875" y="12094"/>
+                    <a:pt x="100" y="496"/>
+                    <a:pt x="509" y="100"/>
+                    <a:pt x="1008" y="100"/>
+                  </a:cubicBezTo>
+                  <a:cubicBezTo>
+                    <a:pt x="1508" y="100"/>
+                    <a:pt x="1917" y="496"/>
+                    <a:pt x="1933" y="995"/>
+                  </a:cubicBezTo>
+                  <a:cubicBezTo>
+                    <a:pt x="1917" y="1494"/>
+                    <a:pt x="1508" y="1890"/>
+                    <a:pt x="1008" y="1890"/>
+                  </a:cubicBezTo>
+                  <a:cubicBezTo>
+                    <a:pt x="509" y="1890"/>
+                    <a:pt x="100" y="1494"/>
+                    <a:pt x="84" y="995"/>
                   </a:cubicBezTo>
                   <a:close/>
                 </a:path>
               </a:pathLst>
             </a:custGeom>
             <a:solidFill>
-              <a:srgbClr val="0F1114"/>
-            </a:solidFill>
-            <a:ln>
-              <a:noFill/>
-            </a:ln>
-          </p:spPr>
-        </p:sp>
-        <p:sp>
-          <p:nvSpPr>
-            <p:cNvPr id="48" name="th-mark-s0"/>
-            <p:cNvSpPr/>
-            <p:nvPr/>
-          </p:nvSpPr>
-          <p:spPr>
-            <a:xfrm>
-              <a:off x="0" y="0"/>
-              <a:ext cx="1905000" cy="1905000"/>
-            </a:xfrm>
-            <a:custGeom>
-              <a:avLst/>
-              <a:gdLst/>
-              <a:ahLst/>
-              <a:cxnLst/>
-              <a:rect l="0" t="0" r="r" b="b"/>
-              <a:pathLst>
-                <a:path w="30000" h="30000">
-                  <a:moveTo>
-                    <a:pt x="23719" y="12520"/>
-                  </a:moveTo>
-                  <a:cubicBezTo>
-                    <a:pt x="24003" y="17913"/>
-                    <a:pt x="20208" y="22665"/>
-                    <a:pt x="14886" y="23581"/>
-                  </a:cubicBezTo>
-                  <a:cubicBezTo>
-                    <a:pt x="9564" y="24497"/>
-                    <a:pt x="4398" y="21287"/>
-                    <a:pt x="2863" y="16110"/>
-                  </a:cubicBezTo>
-                  <a:cubicBezTo>
-                    <a:pt x="1328" y="10932"/>
-                    <a:pt x="3909" y="5425"/>
-                    <a:pt x="8870" y="3292"/>
-                  </a:cubicBezTo>
-                  <a:cubicBezTo>
-                    <a:pt x="13831" y="1159"/>
-                    <a:pt x="19604" y="3075"/>
-                    <a:pt x="22305" y="7751"/>
-                  </a:cubicBezTo>
-                </a:path>
-              </a:pathLst>
-            </a:custGeom>
-            <a:noFill/>
-            <a:ln w="184150" cap="rnd">
-              <a:solidFill>
-                <a:srgbClr val="F2F4F6"/>
-              </a:solidFill>
-              <a:round/>
-            </a:ln>
-          </p:spPr>
-        </p:sp>
-        <p:sp>
-          <p:nvSpPr>
-            <p:cNvPr id="49" name="th-mark-s1"/>
-            <p:cNvSpPr/>
-            <p:nvPr/>
-          </p:nvSpPr>
-          <p:spPr>
-            <a:xfrm>
-              <a:off x="0" y="0"/>
-              <a:ext cx="1905000" cy="1905000"/>
-            </a:xfrm>
-            <a:custGeom>
-              <a:avLst/>
-              <a:gdLst/>
-              <a:ahLst/>
-              <a:cxnLst/>
-              <a:rect l="0" t="0" r="r" b="b"/>
-              <a:pathLst>
-                <a:path w="30000" h="30000">
-                  <a:moveTo>
-                    <a:pt x="20836" y="13784"/>
-                  </a:moveTo>
-                  <a:lnTo>
-                    <a:pt x="23812" y="13784"/>
-                  </a:lnTo>
-                </a:path>
-              </a:pathLst>
-            </a:custGeom>
-            <a:noFill/>
-            <a:ln w="171450" cap="rnd">
-              <a:solidFill>
-                <a:srgbClr val="F2F4F6"/>
-              </a:solidFill>
-              <a:round/>
-            </a:ln>
-          </p:spPr>
-        </p:sp>
-        <p:sp>
-          <p:nvSpPr>
-            <p:cNvPr id="50" name="th-mark-s2"/>
-            <p:cNvSpPr/>
-            <p:nvPr/>
-          </p:nvSpPr>
-          <p:spPr>
-            <a:xfrm>
-              <a:off x="0" y="0"/>
-              <a:ext cx="1905000" cy="1905000"/>
-            </a:xfrm>
-            <a:custGeom>
-              <a:avLst/>
-              <a:gdLst/>
-              <a:ahLst/>
-              <a:cxnLst/>
-              <a:rect l="0" t="0" r="r" b="b"/>
-              <a:pathLst>
-                <a:path w="30000" h="30000">
-                  <a:moveTo>
-                    <a:pt x="22139" y="22177"/>
-                  </a:moveTo>
-                  <a:lnTo>
-                    <a:pt x="27087" y="27159"/>
-                  </a:lnTo>
-                </a:path>
-              </a:pathLst>
-            </a:custGeom>
-            <a:noFill/>
-            <a:ln w="241300" cap="rnd">
-              <a:solidFill>
-                <a:srgbClr val="F2F4F6"/>
-              </a:solidFill>
-              <a:round/>
+              <a:srgbClr val="FFFFFF"/>
+            </a:solidFill>
+            <a:ln>
+              <a:noFill/>
             </a:ln>
           </p:spPr>
         </p:sp>
       </p:grpSp>
       <p:sp>
         <p:nvSpPr>
-          <p:cNvPr id="52" name="th-title"/>
+          <p:cNvPr id="49" name="th-title"/>
           <p:cNvSpPr>
             <a:spLocks noGrp="1"/>
           </p:cNvSpPr>
@@ -20905,7 +20215,7 @@
       </p:sp>
       <p:sp>
         <p:nvSpPr>
-          <p:cNvPr id="53" name="th-url"/>
+          <p:cNvPr id="50" name="th-url"/>
           <p:cNvSpPr txBox="1"/>
           <p:nvPr/>
         </p:nvSpPr>
